--- a/slides/datasets-in-10-minutes-mcp-atlas.pptx
+++ b/slides/datasets-in-10-minutes-mcp-atlas.pptx
@@ -11880,7 +11880,7 @@
                 <a:ea typeface="Noto Sans CJK JP"/>
                 <a:cs typeface="Noto Sans"/>
               </a:rPr>
-              <a:t>論文の改訂版では、上位モデルは約8割に達する</a:t>
+              <a:t>論文バージョン3では、上位モデルは約8割</a:t>
             </a:r>
           </a:p>
         </p:txBody>
@@ -17772,7 +17772,7 @@
                 <a:ea typeface="Noto Sans CJK JP"/>
                 <a:cs typeface="Noto Sans"/>
               </a:rPr>
-              <a:t>サーバーの実装・依存関係は版を固定し、実行条件を記録する。</a:t>
+              <a:t>サーバーの実装・依存関係はバージョンを固定し、実行条件を記録する。</a:t>
             </a:r>
           </a:p>
         </p:txBody>
@@ -19431,7 +19431,7 @@
                 <a:ea typeface="Noto Sans CJK JP"/>
                 <a:cs typeface="Noto Sans"/>
               </a:rPr>
-              <a:t>版・実装と評価条件</a:t>
+              <a:t>バージョン・実装と評価条件</a:t>
             </a:r>
           </a:p>
           <a:p>
@@ -21021,7 +21021,7 @@
                 <a:ea typeface="Noto Sans CJK JP"/>
                 <a:cs typeface="Noto Sans"/>
               </a:rPr>
-              <a:t>提示する候補から、必要なツールを選ぶ</a:t>
+              <a:t>1課題あたりのツールと正解条件の数</a:t>
             </a:r>
           </a:p>
         </p:txBody>
@@ -21083,19 +21083,19 @@
           <p:nvPr/>
         </p:nvGraphicFramePr>
         <p:xfrm>
-          <a:off x="548640" y="1508760"/>
-          <a:ext cx="8046720" cy="1901952"/>
+          <a:off x="548640" y="1938528"/>
+          <a:ext cx="8046720" cy="1719072"/>
         </p:xfrm>
         <a:graphic>
           <a:graphicData uri="http://schemas.openxmlformats.org/drawingml/2006/table">
             <a:tbl>
               <a:tblPr firstRow="0" bandRow="0"/>
               <a:tblGrid>
-                <a:gridCol w="3931920"/>
-                <a:gridCol w="1828800"/>
+                <a:gridCol w="4023360"/>
+                <a:gridCol w="1737360"/>
                 <a:gridCol w="2286000"/>
               </a:tblGrid>
-              <a:tr h="475488">
+              <a:tr h="429768">
                 <a:tc>
                   <a:txBody>
                     <a:bodyPr wrap="square">
@@ -21105,10 +21105,10 @@
                     <a:p>
                       <a:pPr algn="l">
                         <a:lnSpc>
-                          <a:spcPts val="2300"/>
+                          <a:spcPts val="2200"/>
                         </a:lnSpc>
                         <a:buNone/>
-                        <a:defRPr sz="2000" b="0">
+                        <a:defRPr sz="1850" b="0">
                           <a:solidFill>
                             <a:srgbClr val="303437"/>
                           </a:solidFill>
@@ -21116,7 +21116,7 @@
                         </a:defRPr>
                       </a:pPr>
                       <a:r>
-                        <a:rPr sz="2000" b="0" lang="ja-JP" altLang="en-US">
+                        <a:rPr sz="1850" b="0" lang="ja-JP" altLang="en-US">
                           <a:solidFill>
                             <a:srgbClr val="303437"/>
                           </a:solidFill>
@@ -21124,7 +21124,7 @@
                           <a:ea typeface="Noto Sans CJK JP"/>
                           <a:cs typeface="Noto Sans"/>
                         </a:rPr>
-                        <a:t>構成</a:t>
+                        <a:t>数える対象</a:t>
                       </a:r>
                     </a:p>
                   </a:txBody>
@@ -21161,10 +21161,10 @@
                     <a:p>
                       <a:pPr algn="r">
                         <a:lnSpc>
-                          <a:spcPts val="2300"/>
+                          <a:spcPts val="2200"/>
                         </a:lnSpc>
                         <a:buNone/>
-                        <a:defRPr sz="2000" b="0">
+                        <a:defRPr sz="1850" b="0">
                           <a:solidFill>
                             <a:srgbClr val="303437"/>
                           </a:solidFill>
@@ -21172,7 +21172,7 @@
                         </a:defRPr>
                       </a:pPr>
                       <a:r>
-                        <a:rPr sz="2000" b="0" lang="ja-JP" altLang="en-US">
+                        <a:rPr sz="1850" b="0" lang="ja-JP" altLang="en-US">
                           <a:solidFill>
                             <a:srgbClr val="303437"/>
                           </a:solidFill>
@@ -21180,7 +21180,7 @@
                           <a:ea typeface="Noto Sans CJK JP"/>
                           <a:cs typeface="Noto Sans"/>
                         </a:rPr>
-                        <a:t>平均</a:t>
+                        <a:t>1課題の平均</a:t>
                       </a:r>
                     </a:p>
                   </a:txBody>
@@ -21217,10 +21217,10 @@
                     <a:p>
                       <a:pPr algn="r">
                         <a:lnSpc>
-                          <a:spcPts val="2300"/>
+                          <a:spcPts val="2200"/>
                         </a:lnSpc>
                         <a:buNone/>
-                        <a:defRPr sz="2000" b="0">
+                        <a:defRPr sz="1850" b="0">
                           <a:solidFill>
                             <a:srgbClr val="303437"/>
                           </a:solidFill>
@@ -21228,7 +21228,7 @@
                         </a:defRPr>
                       </a:pPr>
                       <a:r>
-                        <a:rPr sz="2000" b="0" lang="ja-JP" altLang="en-US">
+                        <a:rPr sz="1850" b="0" lang="ja-JP" altLang="en-US">
                           <a:solidFill>
                             <a:srgbClr val="303437"/>
                           </a:solidFill>
@@ -21236,7 +21236,7 @@
                           <a:ea typeface="Noto Sans CJK JP"/>
                           <a:cs typeface="Noto Sans"/>
                         </a:rPr>
-                        <a:t>範囲</a:t>
+                        <a:t>最小〜最大</a:t>
                       </a:r>
                     </a:p>
                   </a:txBody>
@@ -21265,7 +21265,7 @@
                   </a:tcPr>
                 </a:tc>
               </a:tr>
-              <a:tr h="475488">
+              <a:tr h="429768">
                 <a:tc>
                   <a:txBody>
                     <a:bodyPr wrap="square">
@@ -21275,10 +21275,10 @@
                     <a:p>
                       <a:pPr algn="l">
                         <a:lnSpc>
-                          <a:spcPts val="2300"/>
+                          <a:spcPts val="2200"/>
                         </a:lnSpc>
                         <a:buNone/>
-                        <a:defRPr sz="2000" b="0">
+                        <a:defRPr sz="1850" b="0">
                           <a:solidFill>
                             <a:srgbClr val="303437"/>
                           </a:solidFill>
@@ -21286,7 +21286,7 @@
                         </a:defRPr>
                       </a:pPr>
                       <a:r>
-                        <a:rPr sz="2000" b="0" lang="ja-JP" altLang="en-US">
+                        <a:rPr sz="1850" b="0" lang="ja-JP" altLang="en-US">
                           <a:solidFill>
                             <a:srgbClr val="303437"/>
                           </a:solidFill>
@@ -21294,7 +21294,7 @@
                           <a:ea typeface="Noto Sans CJK JP"/>
                           <a:cs typeface="Noto Sans"/>
                         </a:rPr>
-                        <a:t>提示ツール</a:t>
+                        <a:t>提示するツールの種類数</a:t>
                       </a:r>
                     </a:p>
                   </a:txBody>
@@ -21328,10 +21328,10 @@
                     <a:p>
                       <a:pPr algn="r">
                         <a:lnSpc>
-                          <a:spcPts val="2300"/>
+                          <a:spcPts val="2200"/>
                         </a:lnSpc>
                         <a:buNone/>
-                        <a:defRPr sz="2000" b="0">
+                        <a:defRPr sz="1850" b="0">
                           <a:solidFill>
                             <a:srgbClr val="303437"/>
                           </a:solidFill>
@@ -21339,7 +21339,7 @@
                         </a:defRPr>
                       </a:pPr>
                       <a:r>
-                        <a:rPr sz="2000" b="0" lang="ja-JP" altLang="en-US">
+                        <a:rPr sz="1850" b="0" lang="ja-JP" altLang="en-US">
                           <a:solidFill>
                             <a:srgbClr val="303437"/>
                           </a:solidFill>
@@ -21347,7 +21347,7 @@
                           <a:ea typeface="Noto Sans CJK JP"/>
                           <a:cs typeface="Noto Sans"/>
                         </a:rPr>
-                        <a:t>15.2</a:t>
+                        <a:t>15.2種類</a:t>
                       </a:r>
                     </a:p>
                   </a:txBody>
@@ -21381,10 +21381,10 @@
                     <a:p>
                       <a:pPr algn="r">
                         <a:lnSpc>
-                          <a:spcPts val="2300"/>
+                          <a:spcPts val="2200"/>
                         </a:lnSpc>
                         <a:buNone/>
-                        <a:defRPr sz="2000" b="0">
+                        <a:defRPr sz="1850" b="0">
                           <a:solidFill>
                             <a:srgbClr val="303437"/>
                           </a:solidFill>
@@ -21392,7 +21392,7 @@
                         </a:defRPr>
                       </a:pPr>
                       <a:r>
-                        <a:rPr sz="2000" b="0" lang="ja-JP" altLang="en-US">
+                        <a:rPr sz="1850" b="0" lang="ja-JP" altLang="en-US">
                           <a:solidFill>
                             <a:srgbClr val="303437"/>
                           </a:solidFill>
@@ -21400,7 +21400,7 @@
                           <a:ea typeface="Noto Sans CJK JP"/>
                           <a:cs typeface="Noto Sans"/>
                         </a:rPr>
-                        <a:t>6〜37</a:t>
+                        <a:t>6〜37種類</a:t>
                       </a:r>
                     </a:p>
                   </a:txBody>
@@ -21426,7 +21426,7 @@
                   </a:tcPr>
                 </a:tc>
               </a:tr>
-              <a:tr h="475488">
+              <a:tr h="429768">
                 <a:tc>
                   <a:txBody>
                     <a:bodyPr wrap="square">
@@ -21436,10 +21436,10 @@
                     <a:p>
                       <a:pPr algn="l">
                         <a:lnSpc>
-                          <a:spcPts val="2300"/>
+                          <a:spcPts val="2200"/>
                         </a:lnSpc>
                         <a:buNone/>
-                        <a:defRPr sz="2000" b="0">
+                        <a:defRPr sz="1850" b="0">
                           <a:solidFill>
                             <a:srgbClr val="303437"/>
                           </a:solidFill>
@@ -21447,7 +21447,7 @@
                         </a:defRPr>
                       </a:pPr>
                       <a:r>
-                        <a:rPr sz="2000" b="0" lang="ja-JP" altLang="en-US">
+                        <a:rPr sz="1850" b="0" lang="ja-JP" altLang="en-US">
                           <a:solidFill>
                             <a:srgbClr val="303437"/>
                           </a:solidFill>
@@ -21455,7 +21455,7 @@
                           <a:ea typeface="Noto Sans CJK JP"/>
                           <a:cs typeface="Noto Sans"/>
                         </a:rPr>
-                        <a:t>必要ツール</a:t>
+                        <a:t>解答に必要なツールの種類数</a:t>
                       </a:r>
                     </a:p>
                   </a:txBody>
@@ -21486,10 +21486,10 @@
                     <a:p>
                       <a:pPr algn="r">
                         <a:lnSpc>
-                          <a:spcPts val="2300"/>
+                          <a:spcPts val="2200"/>
                         </a:lnSpc>
                         <a:buNone/>
-                        <a:defRPr sz="2000" b="0">
+                        <a:defRPr sz="1850" b="0">
                           <a:solidFill>
                             <a:srgbClr val="303437"/>
                           </a:solidFill>
@@ -21497,7 +21497,7 @@
                         </a:defRPr>
                       </a:pPr>
                       <a:r>
-                        <a:rPr sz="2000" b="0" lang="ja-JP" altLang="en-US">
+                        <a:rPr sz="1850" b="0" lang="ja-JP" altLang="en-US">
                           <a:solidFill>
                             <a:srgbClr val="303437"/>
                           </a:solidFill>
@@ -21505,7 +21505,7 @@
                           <a:ea typeface="Noto Sans CJK JP"/>
                           <a:cs typeface="Noto Sans"/>
                         </a:rPr>
-                        <a:t>4.1</a:t>
+                        <a:t>4.1種類</a:t>
                       </a:r>
                     </a:p>
                   </a:txBody>
@@ -21536,10 +21536,10 @@
                     <a:p>
                       <a:pPr algn="r">
                         <a:lnSpc>
-                          <a:spcPts val="2300"/>
+                          <a:spcPts val="2200"/>
                         </a:lnSpc>
                         <a:buNone/>
-                        <a:defRPr sz="2000" b="0">
+                        <a:defRPr sz="1850" b="0">
                           <a:solidFill>
                             <a:srgbClr val="303437"/>
                           </a:solidFill>
@@ -21547,7 +21547,7 @@
                         </a:defRPr>
                       </a:pPr>
                       <a:r>
-                        <a:rPr sz="2000" b="0" lang="ja-JP" altLang="en-US">
+                        <a:rPr sz="1850" b="0" lang="ja-JP" altLang="en-US">
                           <a:solidFill>
                             <a:srgbClr val="303437"/>
                           </a:solidFill>
@@ -21555,7 +21555,7 @@
                           <a:ea typeface="Noto Sans CJK JP"/>
                           <a:cs typeface="Noto Sans"/>
                         </a:rPr>
-                        <a:t>2〜8</a:t>
+                        <a:t>2〜8種類</a:t>
                       </a:r>
                     </a:p>
                   </a:txBody>
@@ -21578,7 +21578,7 @@
                   </a:tcPr>
                 </a:tc>
               </a:tr>
-              <a:tr h="475488">
+              <a:tr h="429768">
                 <a:tc>
                   <a:txBody>
                     <a:bodyPr wrap="square">
@@ -21588,10 +21588,10 @@
                     <a:p>
                       <a:pPr algn="l">
                         <a:lnSpc>
-                          <a:spcPts val="2300"/>
+                          <a:spcPts val="2200"/>
                         </a:lnSpc>
                         <a:buNone/>
-                        <a:defRPr sz="2000" b="0">
+                        <a:defRPr sz="1850" b="0">
                           <a:solidFill>
                             <a:srgbClr val="303437"/>
                           </a:solidFill>
@@ -21599,7 +21599,7 @@
                         </a:defRPr>
                       </a:pPr>
                       <a:r>
-                        <a:rPr sz="2000" b="0" lang="ja-JP" altLang="en-US">
+                        <a:rPr sz="1850" b="0" lang="ja-JP" altLang="en-US">
                           <a:solidFill>
                             <a:srgbClr val="303437"/>
                           </a:solidFill>
@@ -21607,7 +21607,7 @@
                           <a:ea typeface="Noto Sans CJK JP"/>
                           <a:cs typeface="Noto Sans"/>
                         </a:rPr>
-                        <a:t>正解条件</a:t>
+                        <a:t>回答の正解条件の数</a:t>
                       </a:r>
                     </a:p>
                   </a:txBody>
@@ -21641,10 +21641,10 @@
                     <a:p>
                       <a:pPr algn="r">
                         <a:lnSpc>
-                          <a:spcPts val="2300"/>
+                          <a:spcPts val="2200"/>
                         </a:lnSpc>
                         <a:buNone/>
-                        <a:defRPr sz="2000" b="0">
+                        <a:defRPr sz="1850" b="0">
                           <a:solidFill>
                             <a:srgbClr val="303437"/>
                           </a:solidFill>
@@ -21652,7 +21652,7 @@
                         </a:defRPr>
                       </a:pPr>
                       <a:r>
-                        <a:rPr sz="2000" b="0" lang="ja-JP" altLang="en-US">
+                        <a:rPr sz="1850" b="0" lang="ja-JP" altLang="en-US">
                           <a:solidFill>
                             <a:srgbClr val="303437"/>
                           </a:solidFill>
@@ -21660,7 +21660,7 @@
                           <a:ea typeface="Noto Sans CJK JP"/>
                           <a:cs typeface="Noto Sans"/>
                         </a:rPr>
-                        <a:t>4.7</a:t>
+                        <a:t>4.7項目</a:t>
                       </a:r>
                     </a:p>
                   </a:txBody>
@@ -21694,10 +21694,10 @@
                     <a:p>
                       <a:pPr algn="r">
                         <a:lnSpc>
-                          <a:spcPts val="2300"/>
+                          <a:spcPts val="2200"/>
                         </a:lnSpc>
                         <a:buNone/>
-                        <a:defRPr sz="2000" b="0">
+                        <a:defRPr sz="1850" b="0">
                           <a:solidFill>
                             <a:srgbClr val="303437"/>
                           </a:solidFill>
@@ -21705,7 +21705,7 @@
                         </a:defRPr>
                       </a:pPr>
                       <a:r>
-                        <a:rPr sz="2000" b="0" lang="ja-JP" altLang="en-US">
+                        <a:rPr sz="1850" b="0" lang="ja-JP" altLang="en-US">
                           <a:solidFill>
                             <a:srgbClr val="303437"/>
                           </a:solidFill>
@@ -21713,7 +21713,7 @@
                           <a:ea typeface="Noto Sans CJK JP"/>
                           <a:cs typeface="Noto Sans"/>
                         </a:rPr>
-                        <a:t>1〜23</a:t>
+                        <a:t>1〜23項目</a:t>
                       </a:r>
                     </a:p>
                   </a:txBody>
@@ -21751,8 +21751,8 @@
         </p:nvSpPr>
         <p:spPr>
           <a:xfrm>
-            <a:off x="594360" y="3602736"/>
-            <a:ext cx="7955279" cy="685800"/>
+            <a:off x="594360" y="3858768"/>
+            <a:ext cx="7955279" cy="667512"/>
           </a:xfrm>
           <a:prstGeom prst="rect">
             <a:avLst/>
@@ -21767,7 +21767,7 @@
           <a:p>
             <a:pPr algn="l">
               <a:lnSpc>
-                <a:spcPts val="2160"/>
+                <a:spcPts val="2300"/>
               </a:lnSpc>
               <a:spcBef>
                 <a:spcPts val="0"/>
@@ -21792,13 +21792,13 @@
                 <a:ea typeface="Noto Sans CJK JP"/>
                 <a:cs typeface="Noto Sans"/>
               </a:rPr>
-              <a:t>全1,000課題の論文集計。</a:t>
+              <a:t>種類数はツールの機能の数。同じ機能を繰り返し呼ぶこともある。</a:t>
             </a:r>
           </a:p>
           <a:p>
             <a:pPr algn="l">
               <a:lnSpc>
-                <a:spcPts val="2160"/>
+                <a:spcPts val="2300"/>
               </a:lnSpc>
               <a:spcBef>
                 <a:spcPts val="0"/>
@@ -21823,7 +21823,7 @@
                 <a:ea typeface="Noto Sans CJK JP"/>
                 <a:cs typeface="Noto Sans"/>
               </a:rPr>
-              <a:t>参照の操作履歴は、1課題平均9.8ツール呼び出し。</a:t>
+              <a:t>参照の操作履歴は、1課題あたり平均9.8回のツール呼び出し。</a:t>
             </a:r>
           </a:p>
         </p:txBody>
@@ -21912,6 +21912,47 @@
                 <a:hlinkClick r:id="rId2"/>
               </a:rPr>
               <a:t>https://arxiv.org/abs/2602.00933v3</a:t>
+            </a:r>
+          </a:p>
+        </p:txBody>
+      </p:sp>
+      <p:sp>
+        <p:nvSpPr>
+          <p:cNvPr id="7" name="TextBox 6"/>
+          <p:cNvSpPr txBox="1"/>
+          <p:nvPr/>
+        </p:nvSpPr>
+        <p:spPr>
+          <a:xfrm>
+            <a:off x="594360" y="1417320"/>
+            <a:ext cx="7955279" cy="320040"/>
+          </a:xfrm>
+          <a:prstGeom prst="rect">
+            <a:avLst/>
+          </a:prstGeom>
+          <a:noFill/>
+        </p:spPr>
+        <p:txBody>
+          <a:bodyPr wrap="none" lIns="0" rIns="0" tIns="0" bIns="0">
+            <a:spAutoFit/>
+          </a:bodyPr>
+          <a:lstStyle/>
+          <a:p>
+            <a:pPr>
+              <a:lnSpc>
+                <a:spcPts val="2300"/>
+              </a:lnSpc>
+            </a:pPr>
+            <a:r>
+              <a:rPr sz="1800" b="0" lang="ja-JP" altLang="en-US">
+                <a:solidFill>
+                  <a:srgbClr val="303437"/>
+                </a:solidFill>
+                <a:latin typeface="Noto Sans"/>
+                <a:ea typeface="Noto Sans CJK JP"/>
+                <a:cs typeface="Noto Sans"/>
+              </a:rPr>
+              <a:t>全1,000課題を集計。平均は1課題あたり、範囲は最小〜最大。</a:t>
             </a:r>
           </a:p>
         </p:txBody>
@@ -23917,7 +23958,7 @@
                 <a:ea typeface="Noto Sans CJK JP"/>
                 <a:cs typeface="Noto Sans"/>
               </a:rPr>
-              <a:t>2. 版・実装と評価条件</a:t>
+              <a:t>2. バージョン・実装と評価条件</a:t>
             </a:r>
           </a:p>
         </p:txBody>
@@ -23965,7 +24006,7 @@
                 <a:ea typeface="Noto Sans CJK JP"/>
                 <a:cs typeface="Noto Sans"/>
               </a:rPr>
-              <a:t>Appendix: 2. 版・実装と評価条件</a:t>
+              <a:t>Appendix: 2. バージョン・実装と評価条件</a:t>
             </a:r>
           </a:p>
         </p:txBody>
@@ -24031,7 +24072,7 @@
                 <a:ea typeface="Noto Sans CJK JP"/>
                 <a:cs typeface="Noto Sans"/>
               </a:rPr>
-              <a:t>論文の改訂版は、判定器を変えた結果も示す</a:t>
+              <a:t>論文バージョン3は、判定器も比較する</a:t>
             </a:r>
           </a:p>
         </p:txBody>
@@ -24079,7 +24120,7 @@
                 <a:ea typeface="Noto Sans CJK JP"/>
                 <a:cs typeface="Noto Sans"/>
               </a:rPr>
-              <a:t>Appendix: 2. 版・実装と評価条件</a:t>
+              <a:t>Appendix: 2. バージョン・実装と評価条件</a:t>
             </a:r>
           </a:p>
         </p:txBody>
@@ -25248,7 +25289,7 @@
                 <a:ea typeface="Noto Sans CJK JP"/>
                 <a:cs typeface="Noto Sans"/>
               </a:rPr>
-              <a:t>Appendix: 2. 版・実装と評価条件</a:t>
+              <a:t>Appendix: 2. バージョン・実装と評価条件</a:t>
             </a:r>
           </a:p>
         </p:txBody>
@@ -26530,7 +26571,7 @@
                 <a:ea typeface="Noto Sans CJK JP"/>
                 <a:cs typeface="Noto Sans"/>
               </a:rPr>
-              <a:t>Appendix: 2. 版・実装と評価条件</a:t>
+              <a:t>Appendix: 2. バージョン・実装と評価条件</a:t>
             </a:r>
           </a:p>
         </p:txBody>

--- a/slides/datasets-in-10-minutes-mcp-atlas.pptx
+++ b/slides/datasets-in-10-minutes-mcp-atlas.pptx
@@ -42,6 +42,24 @@
     <p:sldId id="290" r:id="rId40"/>
     <p:sldId id="291" r:id="rId41"/>
     <p:sldId id="292" r:id="rId42"/>
+    <p:sldId id="306" r:id="rId56"/>
+    <p:sldId id="307" r:id="rId57"/>
+    <p:sldId id="308" r:id="rId58"/>
+    <p:sldId id="309" r:id="rId59"/>
+    <p:sldId id="310" r:id="rId60"/>
+    <p:sldId id="311" r:id="rId61"/>
+    <p:sldId id="312" r:id="rId62"/>
+    <p:sldId id="313" r:id="rId63"/>
+    <p:sldId id="314" r:id="rId64"/>
+    <p:sldId id="315" r:id="rId65"/>
+    <p:sldId id="316" r:id="rId66"/>
+    <p:sldId id="317" r:id="rId67"/>
+    <p:sldId id="318" r:id="rId68"/>
+    <p:sldId id="319" r:id="rId69"/>
+    <p:sldId id="320" r:id="rId70"/>
+    <p:sldId id="321" r:id="rId71"/>
+    <p:sldId id="322" r:id="rId72"/>
+    <p:sldId id="323" r:id="rId73"/>
     <p:sldId id="293" r:id="rId43"/>
     <p:sldId id="294" r:id="rId44"/>
     <p:sldId id="295" r:id="rId45"/>
@@ -20747,6 +20765,6276 @@
                 <a:ea typeface="Noto Sans CJK JP"/>
                 <a:cs typeface="Noto Sans"/>
               </a:rPr>
+              <a:t>追加例2：最短の部品が使う依存関係を調べる</a:t>
+            </a:r>
+          </a:p>
+        </p:txBody>
+      </p:sp>
+      <p:sp>
+        <p:nvSpPr>
+          <p:cNvPr id="3" name="Title 2"/>
+          <p:cNvSpPr>
+            <a:spLocks noGrp="1"/>
+          </p:cNvSpPr>
+          <p:nvPr>
+            <p:ph type="title" idx="2"/>
+          </p:nvPr>
+        </p:nvSpPr>
+        <p:spPr>
+          <a:xfrm>
+            <a:off x="75895" y="0"/>
+            <a:ext cx="8115300" cy="480060"/>
+          </a:xfrm>
+        </p:spPr>
+        <p:txBody>
+          <a:bodyPr wrap="square" lIns="0" rIns="0" tIns="0" bIns="0" anchor="ctr">
+            <a:noAutofit/>
+          </a:bodyPr>
+          <a:lstStyle/>
+          <a:p>
+            <a:pPr algn="l">
+              <a:lnSpc>
+                <a:spcPct val="110000"/>
+              </a:lnSpc>
+              <a:buNone/>
+              <a:defRPr sz="1400" b="0">
+                <a:solidFill>
+                  <a:srgbClr val="303437"/>
+                </a:solidFill>
+                <a:latin typeface="Noto Sans"/>
+              </a:defRPr>
+            </a:pPr>
+            <a:r>
+              <a:rPr sz="1400" b="1" lang="ja-JP" altLang="en-US">
+                <a:solidFill>
+                  <a:srgbClr val="FFFFFF"/>
+                </a:solidFill>
+                <a:latin typeface="Noto Sans"/>
+                <a:ea typeface="Noto Sans CJK JP"/>
+                <a:cs typeface="Noto Sans"/>
+              </a:rPr>
+              <a:t>Appendix: 1. 追加の課題と分布</a:t>
+            </a:r>
+          </a:p>
+        </p:txBody>
+      </p:sp>
+      <p:sp>
+        <p:nvSpPr>
+          <p:cNvPr id="4" name="TextBox 3"/>
+          <p:cNvSpPr txBox="1"/>
+          <p:nvPr/>
+        </p:nvSpPr>
+        <p:spPr>
+          <a:xfrm>
+            <a:off x="594360" y="1389888"/>
+            <a:ext cx="7955279" cy="228600"/>
+          </a:xfrm>
+          <a:prstGeom prst="rect">
+            <a:avLst/>
+          </a:prstGeom>
+          <a:noFill/>
+        </p:spPr>
+        <p:txBody>
+          <a:bodyPr wrap="square" lIns="0" rIns="0" tIns="0" bIns="0">
+            <a:noAutofit/>
+          </a:bodyPr>
+          <a:lstStyle/>
+          <a:p>
+            <a:pPr algn="l">
+              <a:lnSpc>
+                <a:spcPct val="117000"/>
+              </a:lnSpc>
+              <a:spcBef>
+                <a:spcPts val="0"/>
+              </a:spcBef>
+              <a:spcAft>
+                <a:spcPts val="0"/>
+              </a:spcAft>
+              <a:buNone/>
+              <a:defRPr sz="1200" b="0">
+                <a:solidFill>
+                  <a:srgbClr val="303437"/>
+                </a:solidFill>
+                <a:latin typeface="Noto Sans"/>
+              </a:defRPr>
+            </a:pPr>
+            <a:r>
+              <a:rPr sz="1200" b="0" lang="ja-JP" altLang="en-US">
+                <a:solidFill>
+                  <a:srgbClr val="626669"/>
+                </a:solidFill>
+                <a:latin typeface="Noto Sans"/>
+                <a:ea typeface="Noto Sans CJK JP"/>
+                <a:cs typeface="Noto Sans"/>
+              </a:rPr>
+              <a:t>公開課題（原文）</a:t>
+            </a:r>
+          </a:p>
+        </p:txBody>
+      </p:sp>
+      <p:sp>
+        <p:nvSpPr>
+          <p:cNvPr id="5" name="TextBox 4"/>
+          <p:cNvSpPr txBox="1"/>
+          <p:nvPr/>
+        </p:nvSpPr>
+        <p:spPr>
+          <a:xfrm>
+            <a:off x="594360" y="1737360"/>
+            <a:ext cx="7955279" cy="1691640"/>
+          </a:xfrm>
+          <a:prstGeom prst="rect">
+            <a:avLst/>
+          </a:prstGeom>
+          <a:noFill/>
+        </p:spPr>
+        <p:txBody>
+          <a:bodyPr wrap="square" lIns="0" rIns="0" tIns="0" bIns="0">
+            <a:noAutofit/>
+          </a:bodyPr>
+          <a:lstStyle/>
+          <a:p>
+            <a:pPr algn="l">
+              <a:lnSpc>
+                <a:spcPct val="120000"/>
+              </a:lnSpc>
+              <a:spcBef>
+                <a:spcPts val="0"/>
+              </a:spcBef>
+              <a:spcAft>
+                <a:spcPts val="0"/>
+              </a:spcAft>
+              <a:buNone/>
+              <a:defRPr sz="1800" b="0">
+                <a:solidFill>
+                  <a:srgbClr val="303437"/>
+                </a:solidFill>
+                <a:latin typeface="Noto Sans"/>
+              </a:defRPr>
+            </a:pPr>
+            <a:r>
+              <a:rPr sz="1800" b="0" lang="ja-JP" altLang="en-US">
+                <a:solidFill>
+                  <a:srgbClr val="303437"/>
+                </a:solidFill>
+                <a:latin typeface="Noto Sans"/>
+                <a:ea typeface="Noto Sans CJK JP"/>
+                <a:cs typeface="Noto Sans"/>
+              </a:rPr>
+              <a:t>I've been working on a local project for telling stories where I've already built a few react components. I want to check the required dependency version for the component that has the fewest lines of code.</a:t>
+            </a:r>
+          </a:p>
+        </p:txBody>
+      </p:sp>
+      <p:sp>
+        <p:nvSpPr>
+          <p:cNvPr id="6" name="TextBox 5"/>
+          <p:cNvSpPr txBox="1"/>
+          <p:nvPr/>
+        </p:nvSpPr>
+        <p:spPr>
+          <a:xfrm>
+            <a:off x="594360" y="3712463"/>
+            <a:ext cx="7955279" cy="777240"/>
+          </a:xfrm>
+          <a:prstGeom prst="rect">
+            <a:avLst/>
+          </a:prstGeom>
+          <a:noFill/>
+        </p:spPr>
+        <p:txBody>
+          <a:bodyPr wrap="square" lIns="0" rIns="0" tIns="0" bIns="0">
+            <a:noAutofit/>
+          </a:bodyPr>
+          <a:lstStyle/>
+          <a:p>
+            <a:pPr algn="l">
+              <a:lnSpc>
+                <a:spcPct val="120000"/>
+              </a:lnSpc>
+              <a:spcBef>
+                <a:spcPts val="0"/>
+              </a:spcBef>
+              <a:spcAft>
+                <a:spcPts val="0"/>
+              </a:spcAft>
+              <a:buNone/>
+              <a:defRPr sz="2000" b="0">
+                <a:solidFill>
+                  <a:srgbClr val="303437"/>
+                </a:solidFill>
+                <a:latin typeface="Noto Sans"/>
+              </a:defRPr>
+            </a:pPr>
+            <a:r>
+              <a:rPr sz="2000" b="0" lang="ja-JP" altLang="en-US">
+                <a:solidFill>
+                  <a:srgbClr val="303437"/>
+                </a:solidFill>
+                <a:latin typeface="Noto Sans"/>
+                <a:ea typeface="Noto Sans CJK JP"/>
+                <a:cs typeface="Noto Sans"/>
+              </a:rPr>
+              <a:t>ローカルのReact部品を比較し、最も短い部品の依存パッケージと要求バージョンを調べる。</a:t>
+            </a:r>
+          </a:p>
+        </p:txBody>
+      </p:sp>
+      <p:sp>
+        <p:nvSpPr>
+          <p:cNvPr id="7" name="TextBox 6"/>
+          <p:cNvSpPr txBox="1"/>
+          <p:nvPr/>
+        </p:nvSpPr>
+        <p:spPr>
+          <a:xfrm>
+            <a:off x="502920" y="4690872"/>
+            <a:ext cx="8183879" cy="393192"/>
+          </a:xfrm>
+          <a:prstGeom prst="rect">
+            <a:avLst/>
+          </a:prstGeom>
+          <a:noFill/>
+        </p:spPr>
+        <p:txBody>
+          <a:bodyPr wrap="square" lIns="0" rIns="0" tIns="0" bIns="0">
+            <a:noAutofit/>
+          </a:bodyPr>
+          <a:lstStyle/>
+          <a:p>
+            <a:pPr algn="l">
+              <a:lnSpc>
+                <a:spcPct val="112000"/>
+              </a:lnSpc>
+              <a:spcBef>
+                <a:spcPts val="0"/>
+              </a:spcBef>
+              <a:spcAft>
+                <a:spcPts val="0"/>
+              </a:spcAft>
+              <a:buNone/>
+              <a:defRPr sz="810" b="0">
+                <a:solidFill>
+                  <a:srgbClr val="303437"/>
+                </a:solidFill>
+                <a:latin typeface="Noto Sans"/>
+              </a:defRPr>
+            </a:pPr>
+            <a:r>
+              <a:rPr sz="810" b="0" lang="ja-JP" altLang="en-US">
+                <a:solidFill>
+                  <a:srgbClr val="626669"/>
+                </a:solidFill>
+                <a:latin typeface="Noto Sans"/>
+                <a:ea typeface="Noto Sans CJK JP"/>
+                <a:cs typeface="Noto Sans"/>
+              </a:rPr>
+              <a:t/>
+            </a:r>
+            <a:r>
+              <a:rPr sz="810" b="0" lang="ja-JP" altLang="en-US">
+                <a:solidFill>
+                  <a:srgbClr val="626669"/>
+                </a:solidFill>
+                <a:latin typeface="Noto Sans"/>
+                <a:ea typeface="Noto Sans CJK JP"/>
+                <a:cs typeface="Noto Sans"/>
+              </a:rPr>
+              <a:t>Scale AI. MCP-Atlas / 公開train。課題689e0b1d9c8e2ac413c1f25c。CC BY 4.0。</a:t>
+            </a:r>
+            <a:r>
+              <a:rPr sz="810" b="0" lang="ja-JP" altLang="en-US">
+                <a:solidFill>
+                  <a:srgbClr val="626669"/>
+                </a:solidFill>
+                <a:latin typeface="Noto Sans"/>
+                <a:ea typeface="Noto Sans CJK JP"/>
+                <a:cs typeface="Noto Sans"/>
+              </a:rPr>
+              <a:t>  </a:t>
+            </a:r>
+            <a:r>
+              <a:rPr sz="810" b="0" lang="ja-JP" altLang="en-US">
+                <a:solidFill>
+                  <a:srgbClr val="626669"/>
+                </a:solidFill>
+                <a:latin typeface="Noto Sans"/>
+                <a:ea typeface="Noto Sans CJK JP"/>
+                <a:cs typeface="Noto Sans"/>
+                <a:hlinkClick r:id="rId2"/>
+              </a:rPr>
+              <a:t>https://huggingface.co/datasets/ScaleAI/MCP-Atlas/viewer/default/train?row=4</a:t>
+            </a:r>
+          </a:p>
+        </p:txBody>
+      </p:sp>
+    </p:spTree>
+  </p:cSld>
+  <p:clrMapOvr>
+    <a:masterClrMapping/>
+  </p:clrMapOvr>
+</p:sld>
+</file>
+
+<file path=ppt/slides/slide39.xml><?xml version="1.0" encoding="utf-8"?>
+<p:sld xmlns:a="http://schemas.openxmlformats.org/drawingml/2006/main" xmlns:p="http://schemas.openxmlformats.org/presentationml/2006/main" xmlns:r="http://schemas.openxmlformats.org/officeDocument/2006/relationships">
+  <p:cSld>
+    <p:spTree>
+      <p:nvGrpSpPr>
+        <p:cNvPr id="1" name=""/>
+        <p:cNvGrpSpPr/>
+        <p:nvPr/>
+      </p:nvGrpSpPr>
+      <p:grpSpPr/>
+      <p:sp>
+        <p:nvSpPr>
+          <p:cNvPr id="2" name="Title 1"/>
+          <p:cNvSpPr>
+            <a:spLocks noGrp="1"/>
+          </p:cNvSpPr>
+          <p:nvPr>
+            <p:ph type="title"/>
+          </p:nvPr>
+        </p:nvSpPr>
+        <p:spPr>
+          <a:xfrm>
+            <a:off x="548640" y="786384"/>
+            <a:ext cx="8046720" cy="502920"/>
+          </a:xfrm>
+        </p:spPr>
+        <p:txBody>
+          <a:bodyPr wrap="square" lIns="0" rIns="0" tIns="0" bIns="0">
+            <a:noAutofit/>
+          </a:bodyPr>
+          <a:lstStyle/>
+          <a:p>
+            <a:pPr algn="l">
+              <a:lnSpc>
+                <a:spcPct val="110000"/>
+              </a:lnSpc>
+              <a:buNone/>
+              <a:defRPr sz="2800" b="0">
+                <a:solidFill>
+                  <a:srgbClr val="303437"/>
+                </a:solidFill>
+                <a:latin typeface="Noto Sans"/>
+              </a:defRPr>
+            </a:pPr>
+            <a:r>
+              <a:rPr sz="2800" b="1" lang="ja-JP" altLang="en-US">
+                <a:solidFill>
+                  <a:srgbClr val="303437"/>
+                </a:solidFill>
+                <a:latin typeface="Noto Sans"/>
+                <a:ea typeface="Noto Sans CJK JP"/>
+                <a:cs typeface="Noto Sans"/>
+              </a:rPr>
+              <a:t>最短の部品と、必要なバージョンを対応させる</a:t>
+            </a:r>
+          </a:p>
+        </p:txBody>
+      </p:sp>
+      <p:sp>
+        <p:nvSpPr>
+          <p:cNvPr id="3" name="Text Placeholder 2"/>
+          <p:cNvSpPr>
+            <a:spLocks noGrp="1"/>
+          </p:cNvSpPr>
+          <p:nvPr>
+            <p:ph type="body" idx="1"/>
+          </p:nvPr>
+        </p:nvSpPr>
+        <p:spPr>
+          <a:xfrm>
+            <a:off x="594360" y="1463040"/>
+            <a:ext cx="7955279" cy="3090672"/>
+          </a:xfrm>
+        </p:spPr>
+        <p:txBody>
+          <a:bodyPr wrap="square" tIns="91440" bIns="91440">
+            <a:noAutofit/>
+          </a:bodyPr>
+          <a:lstStyle/>
+          <a:p>
+            <a:pPr marL="457200" indent="-355600">
+              <a:lnSpc>
+                <a:spcPts val="2760"/>
+              </a:lnSpc>
+              <a:spcAft>
+                <a:spcPts val="800"/>
+              </a:spcAft>
+              <a:buSzPct val="57826"/>
+              <a:buFont typeface="Noto Sans CJK JP"/>
+              <a:buChar char="●"/>
+              <a:defRPr sz="2300" b="0">
+                <a:solidFill>
+                  <a:srgbClr val="303437"/>
+                </a:solidFill>
+                <a:latin typeface="Noto Sans"/>
+              </a:defRPr>
+            </a:pPr>
+            <a:r>
+              <a:rPr sz="2300" b="0" lang="ja-JP" altLang="en-US">
+                <a:solidFill>
+                  <a:srgbClr val="303437"/>
+                </a:solidFill>
+                <a:latin typeface="Noto Sans"/>
+                <a:ea typeface="Noto Sans CJK JP"/>
+                <a:cs typeface="Noto Sans"/>
+              </a:rPr>
+              <a:t>最も短いコンポーネントはAspectRatio。依存するパッケージは@radix-ui/react-aspect-ratio、要求バージョンは「^1.0.3」。</a:t>
+            </a:r>
+          </a:p>
+          <a:p>
+            <a:pPr marL="457200" indent="-355600">
+              <a:lnSpc>
+                <a:spcPts val="2760"/>
+              </a:lnSpc>
+              <a:spcAft>
+                <a:spcPts val="0"/>
+              </a:spcAft>
+              <a:buSzPct val="57826"/>
+              <a:buFont typeface="Noto Sans CJK JP"/>
+              <a:buChar char="●"/>
+              <a:defRPr sz="2300" b="0">
+                <a:solidFill>
+                  <a:srgbClr val="303437"/>
+                </a:solidFill>
+                <a:latin typeface="Noto Sans"/>
+              </a:defRPr>
+            </a:pPr>
+            <a:r>
+              <a:rPr sz="2300" b="0" lang="ja-JP" altLang="en-US">
+                <a:solidFill>
+                  <a:srgbClr val="303437"/>
+                </a:solidFill>
+                <a:latin typeface="Noto Sans"/>
+                <a:ea typeface="Noto Sans CJK JP"/>
+                <a:cs typeface="Noto Sans"/>
+              </a:rPr>
+              <a:t>参照履歴は、ローカルのディレクトリや複数ファイルを読み、端末コマンドでコード量と依存情報を確認する。</a:t>
+            </a:r>
+          </a:p>
+        </p:txBody>
+      </p:sp>
+      <p:sp>
+        <p:nvSpPr>
+          <p:cNvPr id="4" name="Title 3"/>
+          <p:cNvSpPr>
+            <a:spLocks noGrp="1"/>
+          </p:cNvSpPr>
+          <p:nvPr>
+            <p:ph type="title" idx="2"/>
+          </p:nvPr>
+        </p:nvSpPr>
+        <p:spPr>
+          <a:xfrm>
+            <a:off x="75895" y="0"/>
+            <a:ext cx="8115300" cy="480060"/>
+          </a:xfrm>
+        </p:spPr>
+        <p:txBody>
+          <a:bodyPr wrap="square" lIns="0" rIns="0" tIns="0" bIns="0" anchor="ctr">
+            <a:noAutofit/>
+          </a:bodyPr>
+          <a:lstStyle/>
+          <a:p>
+            <a:pPr algn="l">
+              <a:lnSpc>
+                <a:spcPct val="110000"/>
+              </a:lnSpc>
+              <a:buNone/>
+              <a:defRPr sz="1400" b="0">
+                <a:solidFill>
+                  <a:srgbClr val="303437"/>
+                </a:solidFill>
+                <a:latin typeface="Noto Sans"/>
+              </a:defRPr>
+            </a:pPr>
+            <a:r>
+              <a:rPr sz="1400" b="1" lang="ja-JP" altLang="en-US">
+                <a:solidFill>
+                  <a:srgbClr val="FFFFFF"/>
+                </a:solidFill>
+                <a:latin typeface="Noto Sans"/>
+                <a:ea typeface="Noto Sans CJK JP"/>
+                <a:cs typeface="Noto Sans"/>
+              </a:rPr>
+              <a:t>Appendix: 1. 追加の課題と分布</a:t>
+            </a:r>
+          </a:p>
+        </p:txBody>
+      </p:sp>
+      <p:sp>
+        <p:nvSpPr>
+          <p:cNvPr id="5" name="TextBox 4"/>
+          <p:cNvSpPr txBox="1"/>
+          <p:nvPr/>
+        </p:nvSpPr>
+        <p:spPr>
+          <a:xfrm>
+            <a:off x="502920" y="4690872"/>
+            <a:ext cx="8183879" cy="393192"/>
+          </a:xfrm>
+          <a:prstGeom prst="rect">
+            <a:avLst/>
+          </a:prstGeom>
+          <a:noFill/>
+        </p:spPr>
+        <p:txBody>
+          <a:bodyPr wrap="square" lIns="0" rIns="0" tIns="0" bIns="0">
+            <a:noAutofit/>
+          </a:bodyPr>
+          <a:lstStyle/>
+          <a:p>
+            <a:pPr algn="l">
+              <a:lnSpc>
+                <a:spcPct val="112000"/>
+              </a:lnSpc>
+              <a:spcBef>
+                <a:spcPts val="0"/>
+              </a:spcBef>
+              <a:spcAft>
+                <a:spcPts val="0"/>
+              </a:spcAft>
+              <a:buNone/>
+              <a:defRPr sz="810" b="0">
+                <a:solidFill>
+                  <a:srgbClr val="303437"/>
+                </a:solidFill>
+                <a:latin typeface="Noto Sans"/>
+              </a:defRPr>
+            </a:pPr>
+            <a:r>
+              <a:rPr sz="810" b="0" lang="ja-JP" altLang="en-US">
+                <a:solidFill>
+                  <a:srgbClr val="626669"/>
+                </a:solidFill>
+                <a:latin typeface="Noto Sans"/>
+                <a:ea typeface="Noto Sans CJK JP"/>
+                <a:cs typeface="Noto Sans"/>
+              </a:rPr>
+              <a:t/>
+            </a:r>
+            <a:r>
+              <a:rPr sz="810" b="0" lang="ja-JP" altLang="en-US">
+                <a:solidFill>
+                  <a:srgbClr val="626669"/>
+                </a:solidFill>
+                <a:latin typeface="Noto Sans"/>
+                <a:ea typeface="Noto Sans CJK JP"/>
+                <a:cs typeface="Noto Sans"/>
+              </a:rPr>
+              <a:t>Scale AI. MCP-Atlas / 公開train。課題689e0b1d9c8e2ac413c1f25c。CC BY 4.0。</a:t>
+            </a:r>
+            <a:r>
+              <a:rPr sz="810" b="0" lang="ja-JP" altLang="en-US">
+                <a:solidFill>
+                  <a:srgbClr val="626669"/>
+                </a:solidFill>
+                <a:latin typeface="Noto Sans"/>
+                <a:ea typeface="Noto Sans CJK JP"/>
+                <a:cs typeface="Noto Sans"/>
+              </a:rPr>
+              <a:t>  </a:t>
+            </a:r>
+            <a:r>
+              <a:rPr sz="810" b="0" lang="ja-JP" altLang="en-US">
+                <a:solidFill>
+                  <a:srgbClr val="626669"/>
+                </a:solidFill>
+                <a:latin typeface="Noto Sans"/>
+                <a:ea typeface="Noto Sans CJK JP"/>
+                <a:cs typeface="Noto Sans"/>
+                <a:hlinkClick r:id="rId2"/>
+              </a:rPr>
+              <a:t>https://huggingface.co/datasets/ScaleAI/MCP-Atlas/viewer/default/train?row=4</a:t>
+            </a:r>
+          </a:p>
+        </p:txBody>
+      </p:sp>
+    </p:spTree>
+  </p:cSld>
+  <p:clrMapOvr>
+    <a:masterClrMapping/>
+  </p:clrMapOvr>
+</p:sld>
+</file>
+
+<file path=ppt/slides/slide4.xml><?xml version="1.0" encoding="utf-8"?>
+<p:sld xmlns:a="http://schemas.openxmlformats.org/drawingml/2006/main" xmlns:p="http://schemas.openxmlformats.org/presentationml/2006/main" xmlns:r="http://schemas.openxmlformats.org/officeDocument/2006/relationships">
+  <p:cSld>
+    <p:spTree>
+      <p:nvGrpSpPr>
+        <p:cNvPr id="1" name=""/>
+        <p:cNvGrpSpPr/>
+        <p:nvPr/>
+      </p:nvGrpSpPr>
+      <p:grpSpPr/>
+      <p:sp>
+        <p:nvSpPr>
+          <p:cNvPr id="2" name="Title 1"/>
+          <p:cNvSpPr>
+            <a:spLocks noGrp="1"/>
+          </p:cNvSpPr>
+          <p:nvPr>
+            <p:ph type="title"/>
+          </p:nvPr>
+        </p:nvSpPr>
+        <p:spPr>
+          <a:xfrm>
+            <a:off x="548640" y="2388106"/>
+            <a:ext cx="8046720" cy="822960"/>
+          </a:xfrm>
+        </p:spPr>
+        <p:txBody>
+          <a:bodyPr wrap="square" lIns="0" rIns="0" tIns="0" bIns="0" anchor="ctr">
+            <a:noAutofit/>
+          </a:bodyPr>
+          <a:lstStyle/>
+          <a:p>
+            <a:pPr algn="ctr">
+              <a:lnSpc>
+                <a:spcPct val="110000"/>
+              </a:lnSpc>
+              <a:buNone/>
+              <a:defRPr sz="3100" b="0">
+                <a:solidFill>
+                  <a:srgbClr val="303437"/>
+                </a:solidFill>
+                <a:latin typeface="Noto Sans"/>
+              </a:defRPr>
+            </a:pPr>
+            <a:r>
+              <a:rPr sz="3100" b="1" lang="ja-JP" altLang="en-US">
+                <a:solidFill>
+                  <a:srgbClr val="303437"/>
+                </a:solidFill>
+                <a:latin typeface="Noto Sans"/>
+                <a:ea typeface="Noto Sans CJK JP"/>
+                <a:cs typeface="Noto Sans"/>
+              </a:rPr>
+              <a:t>1. 複数ツールを使う仕事と実例</a:t>
+            </a:r>
+          </a:p>
+        </p:txBody>
+      </p:sp>
+      <p:sp>
+        <p:nvSpPr>
+          <p:cNvPr id="3" name="Title 2"/>
+          <p:cNvSpPr>
+            <a:spLocks noGrp="1"/>
+          </p:cNvSpPr>
+          <p:nvPr>
+            <p:ph type="title" idx="2"/>
+          </p:nvPr>
+        </p:nvSpPr>
+        <p:spPr>
+          <a:xfrm>
+            <a:off x="75895" y="0"/>
+            <a:ext cx="8115300" cy="480060"/>
+          </a:xfrm>
+        </p:spPr>
+        <p:txBody>
+          <a:bodyPr wrap="square" lIns="0" rIns="0" tIns="0" bIns="0" anchor="ctr">
+            <a:noAutofit/>
+          </a:bodyPr>
+          <a:lstStyle/>
+          <a:p>
+            <a:pPr algn="l">
+              <a:lnSpc>
+                <a:spcPct val="110000"/>
+              </a:lnSpc>
+              <a:buNone/>
+              <a:defRPr sz="1400" b="0">
+                <a:solidFill>
+                  <a:srgbClr val="303437"/>
+                </a:solidFill>
+                <a:latin typeface="Noto Sans"/>
+              </a:defRPr>
+            </a:pPr>
+            <a:r>
+              <a:rPr sz="1400" b="1" lang="ja-JP" altLang="en-US">
+                <a:solidFill>
+                  <a:srgbClr val="FFFFFF"/>
+                </a:solidFill>
+                <a:latin typeface="Noto Sans"/>
+                <a:ea typeface="Noto Sans CJK JP"/>
+                <a:cs typeface="Noto Sans"/>
+              </a:rPr>
+              <a:t>1. 複数ツールを使う仕事と実例</a:t>
+            </a:r>
+          </a:p>
+        </p:txBody>
+      </p:sp>
+    </p:spTree>
+  </p:cSld>
+  <p:clrMapOvr>
+    <a:masterClrMapping/>
+  </p:clrMapOvr>
+</p:sld>
+</file>
+
+<file path=ppt/slides/slide40.xml><?xml version="1.0" encoding="utf-8"?>
+<p:sld xmlns:a="http://schemas.openxmlformats.org/drawingml/2006/main" xmlns:p="http://schemas.openxmlformats.org/presentationml/2006/main" xmlns:r="http://schemas.openxmlformats.org/officeDocument/2006/relationships">
+  <p:cSld>
+    <p:spTree>
+      <p:nvGrpSpPr>
+        <p:cNvPr id="1" name=""/>
+        <p:cNvGrpSpPr/>
+        <p:nvPr/>
+      </p:nvGrpSpPr>
+      <p:grpSpPr/>
+      <p:sp>
+        <p:nvSpPr>
+          <p:cNvPr id="2" name="Title 1"/>
+          <p:cNvSpPr>
+            <a:spLocks noGrp="1"/>
+          </p:cNvSpPr>
+          <p:nvPr>
+            <p:ph type="title"/>
+          </p:nvPr>
+        </p:nvSpPr>
+        <p:spPr>
+          <a:xfrm>
+            <a:off x="548640" y="786384"/>
+            <a:ext cx="8046720" cy="502920"/>
+          </a:xfrm>
+        </p:spPr>
+        <p:txBody>
+          <a:bodyPr wrap="square" lIns="0" rIns="0" tIns="0" bIns="0">
+            <a:noAutofit/>
+          </a:bodyPr>
+          <a:lstStyle/>
+          <a:p>
+            <a:pPr algn="l">
+              <a:lnSpc>
+                <a:spcPct val="110000"/>
+              </a:lnSpc>
+              <a:buNone/>
+              <a:defRPr sz="2800" b="0">
+                <a:solidFill>
+                  <a:srgbClr val="303437"/>
+                </a:solidFill>
+                <a:latin typeface="Noto Sans"/>
+              </a:defRPr>
+            </a:pPr>
+            <a:r>
+              <a:rPr sz="2800" b="1" lang="ja-JP" altLang="en-US">
+                <a:solidFill>
+                  <a:srgbClr val="303437"/>
+                </a:solidFill>
+                <a:latin typeface="Noto Sans"/>
+                <a:ea typeface="Noto Sans CJK JP"/>
+                <a:cs typeface="Noto Sans"/>
+              </a:rPr>
+              <a:t>追加例3：特定の開発者の変更履歴を追う</a:t>
+            </a:r>
+          </a:p>
+        </p:txBody>
+      </p:sp>
+      <p:sp>
+        <p:nvSpPr>
+          <p:cNvPr id="3" name="Title 2"/>
+          <p:cNvSpPr>
+            <a:spLocks noGrp="1"/>
+          </p:cNvSpPr>
+          <p:nvPr>
+            <p:ph type="title" idx="2"/>
+          </p:nvPr>
+        </p:nvSpPr>
+        <p:spPr>
+          <a:xfrm>
+            <a:off x="75895" y="0"/>
+            <a:ext cx="8115300" cy="480060"/>
+          </a:xfrm>
+        </p:spPr>
+        <p:txBody>
+          <a:bodyPr wrap="square" lIns="0" rIns="0" tIns="0" bIns="0" anchor="ctr">
+            <a:noAutofit/>
+          </a:bodyPr>
+          <a:lstStyle/>
+          <a:p>
+            <a:pPr algn="l">
+              <a:lnSpc>
+                <a:spcPct val="110000"/>
+              </a:lnSpc>
+              <a:buNone/>
+              <a:defRPr sz="1400" b="0">
+                <a:solidFill>
+                  <a:srgbClr val="303437"/>
+                </a:solidFill>
+                <a:latin typeface="Noto Sans"/>
+              </a:defRPr>
+            </a:pPr>
+            <a:r>
+              <a:rPr sz="1400" b="1" lang="ja-JP" altLang="en-US">
+                <a:solidFill>
+                  <a:srgbClr val="FFFFFF"/>
+                </a:solidFill>
+                <a:latin typeface="Noto Sans"/>
+                <a:ea typeface="Noto Sans CJK JP"/>
+                <a:cs typeface="Noto Sans"/>
+              </a:rPr>
+              <a:t>Appendix: 1. 追加の課題と分布</a:t>
+            </a:r>
+          </a:p>
+        </p:txBody>
+      </p:sp>
+      <p:sp>
+        <p:nvSpPr>
+          <p:cNvPr id="4" name="TextBox 3"/>
+          <p:cNvSpPr txBox="1"/>
+          <p:nvPr/>
+        </p:nvSpPr>
+        <p:spPr>
+          <a:xfrm>
+            <a:off x="594360" y="1389888"/>
+            <a:ext cx="7955279" cy="228600"/>
+          </a:xfrm>
+          <a:prstGeom prst="rect">
+            <a:avLst/>
+          </a:prstGeom>
+          <a:noFill/>
+        </p:spPr>
+        <p:txBody>
+          <a:bodyPr wrap="square" lIns="0" rIns="0" tIns="0" bIns="0">
+            <a:noAutofit/>
+          </a:bodyPr>
+          <a:lstStyle/>
+          <a:p>
+            <a:pPr algn="l">
+              <a:lnSpc>
+                <a:spcPct val="117000"/>
+              </a:lnSpc>
+              <a:spcBef>
+                <a:spcPts val="0"/>
+              </a:spcBef>
+              <a:spcAft>
+                <a:spcPts val="0"/>
+              </a:spcAft>
+              <a:buNone/>
+              <a:defRPr sz="1200" b="0">
+                <a:solidFill>
+                  <a:srgbClr val="303437"/>
+                </a:solidFill>
+                <a:latin typeface="Noto Sans"/>
+              </a:defRPr>
+            </a:pPr>
+            <a:r>
+              <a:rPr sz="1200" b="0" lang="ja-JP" altLang="en-US">
+                <a:solidFill>
+                  <a:srgbClr val="626669"/>
+                </a:solidFill>
+                <a:latin typeface="Noto Sans"/>
+                <a:ea typeface="Noto Sans CJK JP"/>
+                <a:cs typeface="Noto Sans"/>
+              </a:rPr>
+              <a:t>公開課題（原文）</a:t>
+            </a:r>
+          </a:p>
+        </p:txBody>
+      </p:sp>
+      <p:sp>
+        <p:nvSpPr>
+          <p:cNvPr id="5" name="TextBox 4"/>
+          <p:cNvSpPr txBox="1"/>
+          <p:nvPr/>
+        </p:nvSpPr>
+        <p:spPr>
+          <a:xfrm>
+            <a:off x="594360" y="1737360"/>
+            <a:ext cx="7955279" cy="1691640"/>
+          </a:xfrm>
+          <a:prstGeom prst="rect">
+            <a:avLst/>
+          </a:prstGeom>
+          <a:noFill/>
+        </p:spPr>
+        <p:txBody>
+          <a:bodyPr wrap="square" lIns="0" rIns="0" tIns="0" bIns="0">
+            <a:noAutofit/>
+          </a:bodyPr>
+          <a:lstStyle/>
+          <a:p>
+            <a:pPr algn="l">
+              <a:lnSpc>
+                <a:spcPct val="120000"/>
+              </a:lnSpc>
+              <a:spcBef>
+                <a:spcPts val="0"/>
+              </a:spcBef>
+              <a:spcAft>
+                <a:spcPts val="0"/>
+              </a:spcAft>
+              <a:buNone/>
+              <a:defRPr sz="1800" b="0">
+                <a:solidFill>
+                  <a:srgbClr val="303437"/>
+                </a:solidFill>
+                <a:latin typeface="Noto Sans"/>
+              </a:defRPr>
+            </a:pPr>
+            <a:r>
+              <a:rPr sz="1800" b="0" lang="ja-JP" altLang="en-US">
+                <a:solidFill>
+                  <a:srgbClr val="303437"/>
+                </a:solidFill>
+                <a:latin typeface="Noto Sans"/>
+                <a:ea typeface="Noto Sans CJK JP"/>
+                <a:cs typeface="Noto Sans"/>
+              </a:rPr>
+              <a:t>I'm studying some repos I have on my computer. I was wondering, what is the name of the utility introduced in the 30th commit made by the person with the most commits in the project related to museums?</a:t>
+            </a:r>
+          </a:p>
+        </p:txBody>
+      </p:sp>
+      <p:sp>
+        <p:nvSpPr>
+          <p:cNvPr id="6" name="TextBox 5"/>
+          <p:cNvSpPr txBox="1"/>
+          <p:nvPr/>
+        </p:nvSpPr>
+        <p:spPr>
+          <a:xfrm>
+            <a:off x="594360" y="3712463"/>
+            <a:ext cx="7955279" cy="777240"/>
+          </a:xfrm>
+          <a:prstGeom prst="rect">
+            <a:avLst/>
+          </a:prstGeom>
+          <a:noFill/>
+        </p:spPr>
+        <p:txBody>
+          <a:bodyPr wrap="square" lIns="0" rIns="0" tIns="0" bIns="0">
+            <a:noAutofit/>
+          </a:bodyPr>
+          <a:lstStyle/>
+          <a:p>
+            <a:pPr algn="l">
+              <a:lnSpc>
+                <a:spcPct val="120000"/>
+              </a:lnSpc>
+              <a:spcBef>
+                <a:spcPts val="0"/>
+              </a:spcBef>
+              <a:spcAft>
+                <a:spcPts val="0"/>
+              </a:spcAft>
+              <a:buNone/>
+              <a:defRPr sz="2000" b="0">
+                <a:solidFill>
+                  <a:srgbClr val="303437"/>
+                </a:solidFill>
+                <a:latin typeface="Noto Sans"/>
+              </a:defRPr>
+            </a:pPr>
+            <a:r>
+              <a:rPr sz="2000" b="0" lang="ja-JP" altLang="en-US">
+                <a:solidFill>
+                  <a:srgbClr val="303437"/>
+                </a:solidFill>
+                <a:latin typeface="Noto Sans"/>
+                <a:ea typeface="Noto Sans CJK JP"/>
+                <a:cs typeface="Noto Sans"/>
+              </a:rPr>
+              <a:t>博物館関連のリポジトリで、最多コミットの開発者が行った30番目の変更を調べる。</a:t>
+            </a:r>
+          </a:p>
+        </p:txBody>
+      </p:sp>
+      <p:sp>
+        <p:nvSpPr>
+          <p:cNvPr id="7" name="TextBox 6"/>
+          <p:cNvSpPr txBox="1"/>
+          <p:nvPr/>
+        </p:nvSpPr>
+        <p:spPr>
+          <a:xfrm>
+            <a:off x="502920" y="4690872"/>
+            <a:ext cx="8183879" cy="393192"/>
+          </a:xfrm>
+          <a:prstGeom prst="rect">
+            <a:avLst/>
+          </a:prstGeom>
+          <a:noFill/>
+        </p:spPr>
+        <p:txBody>
+          <a:bodyPr wrap="square" lIns="0" rIns="0" tIns="0" bIns="0">
+            <a:noAutofit/>
+          </a:bodyPr>
+          <a:lstStyle/>
+          <a:p>
+            <a:pPr algn="l">
+              <a:lnSpc>
+                <a:spcPct val="112000"/>
+              </a:lnSpc>
+              <a:spcBef>
+                <a:spcPts val="0"/>
+              </a:spcBef>
+              <a:spcAft>
+                <a:spcPts val="0"/>
+              </a:spcAft>
+              <a:buNone/>
+              <a:defRPr sz="810" b="0">
+                <a:solidFill>
+                  <a:srgbClr val="303437"/>
+                </a:solidFill>
+                <a:latin typeface="Noto Sans"/>
+              </a:defRPr>
+            </a:pPr>
+            <a:r>
+              <a:rPr sz="810" b="0" lang="ja-JP" altLang="en-US">
+                <a:solidFill>
+                  <a:srgbClr val="626669"/>
+                </a:solidFill>
+                <a:latin typeface="Noto Sans"/>
+                <a:ea typeface="Noto Sans CJK JP"/>
+                <a:cs typeface="Noto Sans"/>
+              </a:rPr>
+              <a:t/>
+            </a:r>
+            <a:r>
+              <a:rPr sz="810" b="0" lang="ja-JP" altLang="en-US">
+                <a:solidFill>
+                  <a:srgbClr val="626669"/>
+                </a:solidFill>
+                <a:latin typeface="Noto Sans"/>
+                <a:ea typeface="Noto Sans CJK JP"/>
+                <a:cs typeface="Noto Sans"/>
+              </a:rPr>
+              <a:t>Scale AI. MCP-Atlas / 公開train。課題689f4d693e212e8ef339071f。CC BY 4.0。</a:t>
+            </a:r>
+            <a:r>
+              <a:rPr sz="810" b="0" lang="ja-JP" altLang="en-US">
+                <a:solidFill>
+                  <a:srgbClr val="626669"/>
+                </a:solidFill>
+                <a:latin typeface="Noto Sans"/>
+                <a:ea typeface="Noto Sans CJK JP"/>
+                <a:cs typeface="Noto Sans"/>
+              </a:rPr>
+              <a:t>  </a:t>
+            </a:r>
+            <a:r>
+              <a:rPr sz="810" b="0" lang="ja-JP" altLang="en-US">
+                <a:solidFill>
+                  <a:srgbClr val="626669"/>
+                </a:solidFill>
+                <a:latin typeface="Noto Sans"/>
+                <a:ea typeface="Noto Sans CJK JP"/>
+                <a:cs typeface="Noto Sans"/>
+                <a:hlinkClick r:id="rId2"/>
+              </a:rPr>
+              <a:t>https://huggingface.co/datasets/ScaleAI/MCP-Atlas/viewer/default/train?row=30</a:t>
+            </a:r>
+          </a:p>
+        </p:txBody>
+      </p:sp>
+    </p:spTree>
+  </p:cSld>
+  <p:clrMapOvr>
+    <a:masterClrMapping/>
+  </p:clrMapOvr>
+</p:sld>
+</file>
+
+<file path=ppt/slides/slide41.xml><?xml version="1.0" encoding="utf-8"?>
+<p:sld xmlns:a="http://schemas.openxmlformats.org/drawingml/2006/main" xmlns:p="http://schemas.openxmlformats.org/presentationml/2006/main" xmlns:r="http://schemas.openxmlformats.org/officeDocument/2006/relationships">
+  <p:cSld>
+    <p:spTree>
+      <p:nvGrpSpPr>
+        <p:cNvPr id="1" name=""/>
+        <p:cNvGrpSpPr/>
+        <p:nvPr/>
+      </p:nvGrpSpPr>
+      <p:grpSpPr/>
+      <p:sp>
+        <p:nvSpPr>
+          <p:cNvPr id="2" name="Title 1"/>
+          <p:cNvSpPr>
+            <a:spLocks noGrp="1"/>
+          </p:cNvSpPr>
+          <p:nvPr>
+            <p:ph type="title"/>
+          </p:nvPr>
+        </p:nvSpPr>
+        <p:spPr>
+          <a:xfrm>
+            <a:off x="548640" y="786384"/>
+            <a:ext cx="8046720" cy="502920"/>
+          </a:xfrm>
+        </p:spPr>
+        <p:txBody>
+          <a:bodyPr wrap="square" lIns="0" rIns="0" tIns="0" bIns="0">
+            <a:noAutofit/>
+          </a:bodyPr>
+          <a:lstStyle/>
+          <a:p>
+            <a:pPr algn="l">
+              <a:lnSpc>
+                <a:spcPct val="110000"/>
+              </a:lnSpc>
+              <a:buNone/>
+              <a:defRPr sz="2800" b="0">
+                <a:solidFill>
+                  <a:srgbClr val="303437"/>
+                </a:solidFill>
+                <a:latin typeface="Noto Sans"/>
+              </a:defRPr>
+            </a:pPr>
+            <a:r>
+              <a:rPr sz="2800" b="1" lang="ja-JP" altLang="en-US">
+                <a:solidFill>
+                  <a:srgbClr val="303437"/>
+                </a:solidFill>
+                <a:latin typeface="Noto Sans"/>
+                <a:ea typeface="Noto Sans CJK JP"/>
+                <a:cs typeface="Noto Sans"/>
+              </a:rPr>
+              <a:t>開発者を数え、対象コミットの変更を見る</a:t>
+            </a:r>
+          </a:p>
+        </p:txBody>
+      </p:sp>
+      <p:sp>
+        <p:nvSpPr>
+          <p:cNvPr id="3" name="Text Placeholder 2"/>
+          <p:cNvSpPr>
+            <a:spLocks noGrp="1"/>
+          </p:cNvSpPr>
+          <p:nvPr>
+            <p:ph type="body" idx="1"/>
+          </p:nvPr>
+        </p:nvSpPr>
+        <p:spPr>
+          <a:xfrm>
+            <a:off x="594360" y="1463040"/>
+            <a:ext cx="7955279" cy="3090672"/>
+          </a:xfrm>
+        </p:spPr>
+        <p:txBody>
+          <a:bodyPr wrap="square" tIns="91440" bIns="91440">
+            <a:noAutofit/>
+          </a:bodyPr>
+          <a:lstStyle/>
+          <a:p>
+            <a:pPr marL="457200" indent="-355600">
+              <a:lnSpc>
+                <a:spcPts val="2760"/>
+              </a:lnSpc>
+              <a:spcAft>
+                <a:spcPts val="800"/>
+              </a:spcAft>
+              <a:buSzPct val="57826"/>
+              <a:buFont typeface="Noto Sans CJK JP"/>
+              <a:buChar char="●"/>
+              <a:defRPr sz="2300" b="0">
+                <a:solidFill>
+                  <a:srgbClr val="303437"/>
+                </a:solidFill>
+                <a:latin typeface="Noto Sans"/>
+              </a:defRPr>
+            </a:pPr>
+            <a:r>
+              <a:rPr sz="2300" b="0" lang="ja-JP" altLang="en-US">
+                <a:solidFill>
+                  <a:srgbClr val="303437"/>
+                </a:solidFill>
+                <a:latin typeface="Noto Sans"/>
+                <a:ea typeface="Noto Sans CJK JP"/>
+                <a:cs typeface="Noto Sans"/>
+              </a:rPr>
+              <a:t>対象はmetmuseum-mcp。最多のコミットを行った開発者はMike Chaoで、その30番目のコミットでRateLimiter.tsが追加された。</a:t>
+            </a:r>
+          </a:p>
+          <a:p>
+            <a:pPr marL="457200" indent="-355600">
+              <a:lnSpc>
+                <a:spcPts val="2760"/>
+              </a:lnSpc>
+              <a:spcAft>
+                <a:spcPts val="0"/>
+              </a:spcAft>
+              <a:buSzPct val="57826"/>
+              <a:buFont typeface="Noto Sans CJK JP"/>
+              <a:buChar char="●"/>
+              <a:defRPr sz="2300" b="0">
+                <a:solidFill>
+                  <a:srgbClr val="303437"/>
+                </a:solidFill>
+                <a:latin typeface="Noto Sans"/>
+              </a:defRPr>
+            </a:pPr>
+            <a:r>
+              <a:rPr sz="2300" b="0" lang="ja-JP" altLang="en-US">
+                <a:solidFill>
+                  <a:srgbClr val="303437"/>
+                </a:solidFill>
+                <a:latin typeface="Noto Sans"/>
+                <a:ea typeface="Noto Sans CJK JP"/>
+                <a:cs typeface="Noto Sans"/>
+              </a:rPr>
+              <a:t>参照履歴は、端末でリポジトリを調べ、Gitの履歴を取得する。コードで対象コミットを絞り、Gitで変更内容を読む。</a:t>
+            </a:r>
+          </a:p>
+        </p:txBody>
+      </p:sp>
+      <p:sp>
+        <p:nvSpPr>
+          <p:cNvPr id="4" name="Title 3"/>
+          <p:cNvSpPr>
+            <a:spLocks noGrp="1"/>
+          </p:cNvSpPr>
+          <p:nvPr>
+            <p:ph type="title" idx="2"/>
+          </p:nvPr>
+        </p:nvSpPr>
+        <p:spPr>
+          <a:xfrm>
+            <a:off x="75895" y="0"/>
+            <a:ext cx="8115300" cy="480060"/>
+          </a:xfrm>
+        </p:spPr>
+        <p:txBody>
+          <a:bodyPr wrap="square" lIns="0" rIns="0" tIns="0" bIns="0" anchor="ctr">
+            <a:noAutofit/>
+          </a:bodyPr>
+          <a:lstStyle/>
+          <a:p>
+            <a:pPr algn="l">
+              <a:lnSpc>
+                <a:spcPct val="110000"/>
+              </a:lnSpc>
+              <a:buNone/>
+              <a:defRPr sz="1400" b="0">
+                <a:solidFill>
+                  <a:srgbClr val="303437"/>
+                </a:solidFill>
+                <a:latin typeface="Noto Sans"/>
+              </a:defRPr>
+            </a:pPr>
+            <a:r>
+              <a:rPr sz="1400" b="1" lang="ja-JP" altLang="en-US">
+                <a:solidFill>
+                  <a:srgbClr val="FFFFFF"/>
+                </a:solidFill>
+                <a:latin typeface="Noto Sans"/>
+                <a:ea typeface="Noto Sans CJK JP"/>
+                <a:cs typeface="Noto Sans"/>
+              </a:rPr>
+              <a:t>Appendix: 1. 追加の課題と分布</a:t>
+            </a:r>
+          </a:p>
+        </p:txBody>
+      </p:sp>
+      <p:sp>
+        <p:nvSpPr>
+          <p:cNvPr id="5" name="TextBox 4"/>
+          <p:cNvSpPr txBox="1"/>
+          <p:nvPr/>
+        </p:nvSpPr>
+        <p:spPr>
+          <a:xfrm>
+            <a:off x="502920" y="4690872"/>
+            <a:ext cx="8183879" cy="393192"/>
+          </a:xfrm>
+          <a:prstGeom prst="rect">
+            <a:avLst/>
+          </a:prstGeom>
+          <a:noFill/>
+        </p:spPr>
+        <p:txBody>
+          <a:bodyPr wrap="square" lIns="0" rIns="0" tIns="0" bIns="0">
+            <a:noAutofit/>
+          </a:bodyPr>
+          <a:lstStyle/>
+          <a:p>
+            <a:pPr algn="l">
+              <a:lnSpc>
+                <a:spcPct val="112000"/>
+              </a:lnSpc>
+              <a:spcBef>
+                <a:spcPts val="0"/>
+              </a:spcBef>
+              <a:spcAft>
+                <a:spcPts val="0"/>
+              </a:spcAft>
+              <a:buNone/>
+              <a:defRPr sz="810" b="0">
+                <a:solidFill>
+                  <a:srgbClr val="303437"/>
+                </a:solidFill>
+                <a:latin typeface="Noto Sans"/>
+              </a:defRPr>
+            </a:pPr>
+            <a:r>
+              <a:rPr sz="810" b="0" lang="ja-JP" altLang="en-US">
+                <a:solidFill>
+                  <a:srgbClr val="626669"/>
+                </a:solidFill>
+                <a:latin typeface="Noto Sans"/>
+                <a:ea typeface="Noto Sans CJK JP"/>
+                <a:cs typeface="Noto Sans"/>
+              </a:rPr>
+              <a:t/>
+            </a:r>
+            <a:r>
+              <a:rPr sz="810" b="0" lang="ja-JP" altLang="en-US">
+                <a:solidFill>
+                  <a:srgbClr val="626669"/>
+                </a:solidFill>
+                <a:latin typeface="Noto Sans"/>
+                <a:ea typeface="Noto Sans CJK JP"/>
+                <a:cs typeface="Noto Sans"/>
+              </a:rPr>
+              <a:t>Scale AI. MCP-Atlas / 公開train。課題689f4d693e212e8ef339071f。CC BY 4.0。</a:t>
+            </a:r>
+            <a:r>
+              <a:rPr sz="810" b="0" lang="ja-JP" altLang="en-US">
+                <a:solidFill>
+                  <a:srgbClr val="626669"/>
+                </a:solidFill>
+                <a:latin typeface="Noto Sans"/>
+                <a:ea typeface="Noto Sans CJK JP"/>
+                <a:cs typeface="Noto Sans"/>
+              </a:rPr>
+              <a:t>  </a:t>
+            </a:r>
+            <a:r>
+              <a:rPr sz="810" b="0" lang="ja-JP" altLang="en-US">
+                <a:solidFill>
+                  <a:srgbClr val="626669"/>
+                </a:solidFill>
+                <a:latin typeface="Noto Sans"/>
+                <a:ea typeface="Noto Sans CJK JP"/>
+                <a:cs typeface="Noto Sans"/>
+                <a:hlinkClick r:id="rId2"/>
+              </a:rPr>
+              <a:t>https://huggingface.co/datasets/ScaleAI/MCP-Atlas/viewer/default/train?row=30</a:t>
+            </a:r>
+          </a:p>
+        </p:txBody>
+      </p:sp>
+    </p:spTree>
+  </p:cSld>
+  <p:clrMapOvr>
+    <a:masterClrMapping/>
+  </p:clrMapOvr>
+</p:sld>
+</file>
+
+<file path=ppt/slides/slide42.xml><?xml version="1.0" encoding="utf-8"?>
+<p:sld xmlns:a="http://schemas.openxmlformats.org/drawingml/2006/main" xmlns:p="http://schemas.openxmlformats.org/presentationml/2006/main" xmlns:r="http://schemas.openxmlformats.org/officeDocument/2006/relationships">
+  <p:cSld>
+    <p:spTree>
+      <p:nvGrpSpPr>
+        <p:cNvPr id="1" name=""/>
+        <p:cNvGrpSpPr/>
+        <p:nvPr/>
+      </p:nvGrpSpPr>
+      <p:grpSpPr/>
+      <p:sp>
+        <p:nvSpPr>
+          <p:cNvPr id="2" name="Title 1"/>
+          <p:cNvSpPr>
+            <a:spLocks noGrp="1"/>
+          </p:cNvSpPr>
+          <p:nvPr>
+            <p:ph type="title"/>
+          </p:nvPr>
+        </p:nvSpPr>
+        <p:spPr>
+          <a:xfrm>
+            <a:off x="548640" y="786384"/>
+            <a:ext cx="8046720" cy="502920"/>
+          </a:xfrm>
+        </p:spPr>
+        <p:txBody>
+          <a:bodyPr wrap="square" lIns="0" rIns="0" tIns="0" bIns="0">
+            <a:noAutofit/>
+          </a:bodyPr>
+          <a:lstStyle/>
+          <a:p>
+            <a:pPr algn="l">
+              <a:lnSpc>
+                <a:spcPct val="110000"/>
+              </a:lnSpc>
+              <a:buNone/>
+              <a:defRPr sz="2800" b="0">
+                <a:solidFill>
+                  <a:srgbClr val="303437"/>
+                </a:solidFill>
+                <a:latin typeface="Noto Sans"/>
+              </a:defRPr>
+            </a:pPr>
+            <a:r>
+              <a:rPr sz="2800" b="1" lang="ja-JP" altLang="en-US">
+                <a:solidFill>
+                  <a:srgbClr val="303437"/>
+                </a:solidFill>
+                <a:latin typeface="Noto Sans"/>
+                <a:ea typeface="Noto Sans CJK JP"/>
+                <a:cs typeface="Noto Sans"/>
+              </a:rPr>
+              <a:t>追加例4：勧められた映画を見たか確認する</a:t>
+            </a:r>
+          </a:p>
+        </p:txBody>
+      </p:sp>
+      <p:sp>
+        <p:nvSpPr>
+          <p:cNvPr id="3" name="Title 2"/>
+          <p:cNvSpPr>
+            <a:spLocks noGrp="1"/>
+          </p:cNvSpPr>
+          <p:nvPr>
+            <p:ph type="title" idx="2"/>
+          </p:nvPr>
+        </p:nvSpPr>
+        <p:spPr>
+          <a:xfrm>
+            <a:off x="75895" y="0"/>
+            <a:ext cx="8115300" cy="480060"/>
+          </a:xfrm>
+        </p:spPr>
+        <p:txBody>
+          <a:bodyPr wrap="square" lIns="0" rIns="0" tIns="0" bIns="0" anchor="ctr">
+            <a:noAutofit/>
+          </a:bodyPr>
+          <a:lstStyle/>
+          <a:p>
+            <a:pPr algn="l">
+              <a:lnSpc>
+                <a:spcPct val="110000"/>
+              </a:lnSpc>
+              <a:buNone/>
+              <a:defRPr sz="1400" b="0">
+                <a:solidFill>
+                  <a:srgbClr val="303437"/>
+                </a:solidFill>
+                <a:latin typeface="Noto Sans"/>
+              </a:defRPr>
+            </a:pPr>
+            <a:r>
+              <a:rPr sz="1400" b="1" lang="ja-JP" altLang="en-US">
+                <a:solidFill>
+                  <a:srgbClr val="FFFFFF"/>
+                </a:solidFill>
+                <a:latin typeface="Noto Sans"/>
+                <a:ea typeface="Noto Sans CJK JP"/>
+                <a:cs typeface="Noto Sans"/>
+              </a:rPr>
+              <a:t>Appendix: 1. 追加の課題と分布</a:t>
+            </a:r>
+          </a:p>
+        </p:txBody>
+      </p:sp>
+      <p:sp>
+        <p:nvSpPr>
+          <p:cNvPr id="4" name="TextBox 3"/>
+          <p:cNvSpPr txBox="1"/>
+          <p:nvPr/>
+        </p:nvSpPr>
+        <p:spPr>
+          <a:xfrm>
+            <a:off x="594360" y="1389888"/>
+            <a:ext cx="7955279" cy="228600"/>
+          </a:xfrm>
+          <a:prstGeom prst="rect">
+            <a:avLst/>
+          </a:prstGeom>
+          <a:noFill/>
+        </p:spPr>
+        <p:txBody>
+          <a:bodyPr wrap="square" lIns="0" rIns="0" tIns="0" bIns="0">
+            <a:noAutofit/>
+          </a:bodyPr>
+          <a:lstStyle/>
+          <a:p>
+            <a:pPr algn="l">
+              <a:lnSpc>
+                <a:spcPct val="117000"/>
+              </a:lnSpc>
+              <a:spcBef>
+                <a:spcPts val="0"/>
+              </a:spcBef>
+              <a:spcAft>
+                <a:spcPts val="0"/>
+              </a:spcAft>
+              <a:buNone/>
+              <a:defRPr sz="1200" b="0">
+                <a:solidFill>
+                  <a:srgbClr val="303437"/>
+                </a:solidFill>
+                <a:latin typeface="Noto Sans"/>
+              </a:defRPr>
+            </a:pPr>
+            <a:r>
+              <a:rPr sz="1200" b="0" lang="ja-JP" altLang="en-US">
+                <a:solidFill>
+                  <a:srgbClr val="626669"/>
+                </a:solidFill>
+                <a:latin typeface="Noto Sans"/>
+                <a:ea typeface="Noto Sans CJK JP"/>
+                <a:cs typeface="Noto Sans"/>
+              </a:rPr>
+              <a:t>公開課題（原文）</a:t>
+            </a:r>
+          </a:p>
+        </p:txBody>
+      </p:sp>
+      <p:sp>
+        <p:nvSpPr>
+          <p:cNvPr id="5" name="TextBox 4"/>
+          <p:cNvSpPr txBox="1"/>
+          <p:nvPr/>
+        </p:nvSpPr>
+        <p:spPr>
+          <a:xfrm>
+            <a:off x="594360" y="1737360"/>
+            <a:ext cx="7955279" cy="1691640"/>
+          </a:xfrm>
+          <a:prstGeom prst="rect">
+            <a:avLst/>
+          </a:prstGeom>
+          <a:noFill/>
+        </p:spPr>
+        <p:txBody>
+          <a:bodyPr wrap="square" lIns="0" rIns="0" tIns="0" bIns="0">
+            <a:noAutofit/>
+          </a:bodyPr>
+          <a:lstStyle/>
+          <a:p>
+            <a:pPr algn="l">
+              <a:lnSpc>
+                <a:spcPct val="120000"/>
+              </a:lnSpc>
+              <a:spcBef>
+                <a:spcPts val="0"/>
+              </a:spcBef>
+              <a:spcAft>
+                <a:spcPts val="0"/>
+              </a:spcAft>
+              <a:buNone/>
+              <a:defRPr sz="1800" b="0">
+                <a:solidFill>
+                  <a:srgbClr val="303437"/>
+                </a:solidFill>
+                <a:latin typeface="Noto Sans"/>
+              </a:defRPr>
+            </a:pPr>
+            <a:r>
+              <a:rPr sz="1800" b="0" lang="ja-JP" altLang="en-US">
+                <a:solidFill>
+                  <a:srgbClr val="303437"/>
+                </a:solidFill>
+                <a:latin typeface="Noto Sans"/>
+                <a:ea typeface="Noto Sans CJK JP"/>
+                <a:cs typeface="Noto Sans"/>
+              </a:rPr>
+              <a:t>According to my local movie data, have I watched the movie recommended by kcpfan46 in the movie suggestions channel?</a:t>
+            </a:r>
+          </a:p>
+        </p:txBody>
+      </p:sp>
+      <p:sp>
+        <p:nvSpPr>
+          <p:cNvPr id="6" name="TextBox 5"/>
+          <p:cNvSpPr txBox="1"/>
+          <p:nvPr/>
+        </p:nvSpPr>
+        <p:spPr>
+          <a:xfrm>
+            <a:off x="594360" y="3712463"/>
+            <a:ext cx="7955279" cy="777240"/>
+          </a:xfrm>
+          <a:prstGeom prst="rect">
+            <a:avLst/>
+          </a:prstGeom>
+          <a:noFill/>
+        </p:spPr>
+        <p:txBody>
+          <a:bodyPr wrap="square" lIns="0" rIns="0" tIns="0" bIns="0">
+            <a:noAutofit/>
+          </a:bodyPr>
+          <a:lstStyle/>
+          <a:p>
+            <a:pPr algn="l">
+              <a:lnSpc>
+                <a:spcPct val="120000"/>
+              </a:lnSpc>
+              <a:spcBef>
+                <a:spcPts val="0"/>
+              </a:spcBef>
+              <a:spcAft>
+                <a:spcPts val="0"/>
+              </a:spcAft>
+              <a:buNone/>
+              <a:defRPr sz="2000" b="0">
+                <a:solidFill>
+                  <a:srgbClr val="303437"/>
+                </a:solidFill>
+                <a:latin typeface="Noto Sans"/>
+              </a:defRPr>
+            </a:pPr>
+            <a:r>
+              <a:rPr sz="2000" b="0" lang="ja-JP" altLang="en-US">
+                <a:solidFill>
+                  <a:srgbClr val="303437"/>
+                </a:solidFill>
+                <a:latin typeface="Noto Sans"/>
+                <a:ea typeface="Noto Sans CJK JP"/>
+                <a:cs typeface="Noto Sans"/>
+              </a:rPr>
+              <a:t>Slackで特定ユーザーが勧めた映画を探し、ローカルの鑑賞記録と照合する。</a:t>
+            </a:r>
+          </a:p>
+        </p:txBody>
+      </p:sp>
+      <p:sp>
+        <p:nvSpPr>
+          <p:cNvPr id="7" name="TextBox 6"/>
+          <p:cNvSpPr txBox="1"/>
+          <p:nvPr/>
+        </p:nvSpPr>
+        <p:spPr>
+          <a:xfrm>
+            <a:off x="502920" y="4690872"/>
+            <a:ext cx="8183879" cy="393192"/>
+          </a:xfrm>
+          <a:prstGeom prst="rect">
+            <a:avLst/>
+          </a:prstGeom>
+          <a:noFill/>
+        </p:spPr>
+        <p:txBody>
+          <a:bodyPr wrap="square" lIns="0" rIns="0" tIns="0" bIns="0">
+            <a:noAutofit/>
+          </a:bodyPr>
+          <a:lstStyle/>
+          <a:p>
+            <a:pPr algn="l">
+              <a:lnSpc>
+                <a:spcPct val="112000"/>
+              </a:lnSpc>
+              <a:spcBef>
+                <a:spcPts val="0"/>
+              </a:spcBef>
+              <a:spcAft>
+                <a:spcPts val="0"/>
+              </a:spcAft>
+              <a:buNone/>
+              <a:defRPr sz="810" b="0">
+                <a:solidFill>
+                  <a:srgbClr val="303437"/>
+                </a:solidFill>
+                <a:latin typeface="Noto Sans"/>
+              </a:defRPr>
+            </a:pPr>
+            <a:r>
+              <a:rPr sz="810" b="0" lang="ja-JP" altLang="en-US">
+                <a:solidFill>
+                  <a:srgbClr val="626669"/>
+                </a:solidFill>
+                <a:latin typeface="Noto Sans"/>
+                <a:ea typeface="Noto Sans CJK JP"/>
+                <a:cs typeface="Noto Sans"/>
+              </a:rPr>
+              <a:t/>
+            </a:r>
+            <a:r>
+              <a:rPr sz="810" b="0" lang="ja-JP" altLang="en-US">
+                <a:solidFill>
+                  <a:srgbClr val="626669"/>
+                </a:solidFill>
+                <a:latin typeface="Noto Sans"/>
+                <a:ea typeface="Noto Sans CJK JP"/>
+                <a:cs typeface="Noto Sans"/>
+              </a:rPr>
+              <a:t>Scale AI. MCP-Atlas / 公開train。課題689cd6f8522029b7ad7b2014。CC BY 4.0。</a:t>
+            </a:r>
+            <a:r>
+              <a:rPr sz="810" b="0" lang="ja-JP" altLang="en-US">
+                <a:solidFill>
+                  <a:srgbClr val="626669"/>
+                </a:solidFill>
+                <a:latin typeface="Noto Sans"/>
+                <a:ea typeface="Noto Sans CJK JP"/>
+                <a:cs typeface="Noto Sans"/>
+              </a:rPr>
+              <a:t>  </a:t>
+            </a:r>
+            <a:r>
+              <a:rPr sz="810" b="0" lang="ja-JP" altLang="en-US">
+                <a:solidFill>
+                  <a:srgbClr val="626669"/>
+                </a:solidFill>
+                <a:latin typeface="Noto Sans"/>
+                <a:ea typeface="Noto Sans CJK JP"/>
+                <a:cs typeface="Noto Sans"/>
+                <a:hlinkClick r:id="rId2"/>
+              </a:rPr>
+              <a:t>https://huggingface.co/datasets/ScaleAI/MCP-Atlas/viewer/default/train?row=63</a:t>
+            </a:r>
+          </a:p>
+        </p:txBody>
+      </p:sp>
+    </p:spTree>
+  </p:cSld>
+  <p:clrMapOvr>
+    <a:masterClrMapping/>
+  </p:clrMapOvr>
+</p:sld>
+</file>
+
+<file path=ppt/slides/slide43.xml><?xml version="1.0" encoding="utf-8"?>
+<p:sld xmlns:a="http://schemas.openxmlformats.org/drawingml/2006/main" xmlns:p="http://schemas.openxmlformats.org/presentationml/2006/main" xmlns:r="http://schemas.openxmlformats.org/officeDocument/2006/relationships">
+  <p:cSld>
+    <p:spTree>
+      <p:nvGrpSpPr>
+        <p:cNvPr id="1" name=""/>
+        <p:cNvGrpSpPr/>
+        <p:nvPr/>
+      </p:nvGrpSpPr>
+      <p:grpSpPr/>
+      <p:sp>
+        <p:nvSpPr>
+          <p:cNvPr id="2" name="Title 1"/>
+          <p:cNvSpPr>
+            <a:spLocks noGrp="1"/>
+          </p:cNvSpPr>
+          <p:nvPr>
+            <p:ph type="title"/>
+          </p:nvPr>
+        </p:nvSpPr>
+        <p:spPr>
+          <a:xfrm>
+            <a:off x="548640" y="786384"/>
+            <a:ext cx="8046720" cy="502920"/>
+          </a:xfrm>
+        </p:spPr>
+        <p:txBody>
+          <a:bodyPr wrap="square" lIns="0" rIns="0" tIns="0" bIns="0">
+            <a:noAutofit/>
+          </a:bodyPr>
+          <a:lstStyle/>
+          <a:p>
+            <a:pPr algn="l">
+              <a:lnSpc>
+                <a:spcPct val="110000"/>
+              </a:lnSpc>
+              <a:buNone/>
+              <a:defRPr sz="2800" b="0">
+                <a:solidFill>
+                  <a:srgbClr val="303437"/>
+                </a:solidFill>
+                <a:latin typeface="Noto Sans"/>
+              </a:defRPr>
+            </a:pPr>
+            <a:r>
+              <a:rPr sz="2800" b="1" lang="ja-JP" altLang="en-US">
+                <a:solidFill>
+                  <a:srgbClr val="303437"/>
+                </a:solidFill>
+                <a:latin typeface="Noto Sans"/>
+                <a:ea typeface="Noto Sans CJK JP"/>
+                <a:cs typeface="Noto Sans"/>
+              </a:rPr>
+              <a:t>会話中の映画名を、個人の鑑賞記録へつなぐ</a:t>
+            </a:r>
+          </a:p>
+        </p:txBody>
+      </p:sp>
+      <p:sp>
+        <p:nvSpPr>
+          <p:cNvPr id="3" name="Text Placeholder 2"/>
+          <p:cNvSpPr>
+            <a:spLocks noGrp="1"/>
+          </p:cNvSpPr>
+          <p:nvPr>
+            <p:ph type="body" idx="1"/>
+          </p:nvPr>
+        </p:nvSpPr>
+        <p:spPr>
+          <a:xfrm>
+            <a:off x="594360" y="1463040"/>
+            <a:ext cx="7955279" cy="3090672"/>
+          </a:xfrm>
+        </p:spPr>
+        <p:txBody>
+          <a:bodyPr wrap="square" tIns="91440" bIns="91440">
+            <a:noAutofit/>
+          </a:bodyPr>
+          <a:lstStyle/>
+          <a:p>
+            <a:pPr marL="457200" indent="-355600">
+              <a:lnSpc>
+                <a:spcPts val="2760"/>
+              </a:lnSpc>
+              <a:spcAft>
+                <a:spcPts val="800"/>
+              </a:spcAft>
+              <a:buSzPct val="57826"/>
+              <a:buFont typeface="Noto Sans CJK JP"/>
+              <a:buChar char="●"/>
+              <a:defRPr sz="2300" b="0">
+                <a:solidFill>
+                  <a:srgbClr val="303437"/>
+                </a:solidFill>
+                <a:latin typeface="Noto Sans"/>
+              </a:defRPr>
+            </a:pPr>
+            <a:r>
+              <a:rPr sz="2300" b="0" lang="ja-JP" altLang="en-US">
+                <a:solidFill>
+                  <a:srgbClr val="303437"/>
+                </a:solidFill>
+                <a:latin typeface="Noto Sans"/>
+                <a:ea typeface="Noto Sans CJK JP"/>
+                <a:cs typeface="Noto Sans"/>
+              </a:rPr>
+              <a:t>kcpfan46が勧めた映画はThe Matrix。ローカルの映画データには、利用者が鑑賞済みであることが記録されている。</a:t>
+            </a:r>
+          </a:p>
+          <a:p>
+            <a:pPr marL="457200" indent="-355600">
+              <a:lnSpc>
+                <a:spcPts val="2760"/>
+              </a:lnSpc>
+              <a:spcAft>
+                <a:spcPts val="0"/>
+              </a:spcAft>
+              <a:buSzPct val="57826"/>
+              <a:buFont typeface="Noto Sans CJK JP"/>
+              <a:buChar char="●"/>
+              <a:defRPr sz="2300" b="0">
+                <a:solidFill>
+                  <a:srgbClr val="303437"/>
+                </a:solidFill>
+                <a:latin typeface="Noto Sans"/>
+              </a:defRPr>
+            </a:pPr>
+            <a:r>
+              <a:rPr sz="2300" b="0" lang="ja-JP" altLang="en-US">
+                <a:solidFill>
+                  <a:srgbClr val="303437"/>
+                </a:solidFill>
+                <a:latin typeface="Noto Sans"/>
+                <a:ea typeface="Noto Sans CJK JP"/>
+                <a:cs typeface="Noto Sans"/>
+              </a:rPr>
+              <a:t>参照履歴は、Slackのチャンネルとメッセージを検索した後、ローカルのディレクトリを探して該当ファイルを読む。</a:t>
+            </a:r>
+          </a:p>
+        </p:txBody>
+      </p:sp>
+      <p:sp>
+        <p:nvSpPr>
+          <p:cNvPr id="4" name="Title 3"/>
+          <p:cNvSpPr>
+            <a:spLocks noGrp="1"/>
+          </p:cNvSpPr>
+          <p:nvPr>
+            <p:ph type="title" idx="2"/>
+          </p:nvPr>
+        </p:nvSpPr>
+        <p:spPr>
+          <a:xfrm>
+            <a:off x="75895" y="0"/>
+            <a:ext cx="8115300" cy="480060"/>
+          </a:xfrm>
+        </p:spPr>
+        <p:txBody>
+          <a:bodyPr wrap="square" lIns="0" rIns="0" tIns="0" bIns="0" anchor="ctr">
+            <a:noAutofit/>
+          </a:bodyPr>
+          <a:lstStyle/>
+          <a:p>
+            <a:pPr algn="l">
+              <a:lnSpc>
+                <a:spcPct val="110000"/>
+              </a:lnSpc>
+              <a:buNone/>
+              <a:defRPr sz="1400" b="0">
+                <a:solidFill>
+                  <a:srgbClr val="303437"/>
+                </a:solidFill>
+                <a:latin typeface="Noto Sans"/>
+              </a:defRPr>
+            </a:pPr>
+            <a:r>
+              <a:rPr sz="1400" b="1" lang="ja-JP" altLang="en-US">
+                <a:solidFill>
+                  <a:srgbClr val="FFFFFF"/>
+                </a:solidFill>
+                <a:latin typeface="Noto Sans"/>
+                <a:ea typeface="Noto Sans CJK JP"/>
+                <a:cs typeface="Noto Sans"/>
+              </a:rPr>
+              <a:t>Appendix: 1. 追加の課題と分布</a:t>
+            </a:r>
+          </a:p>
+        </p:txBody>
+      </p:sp>
+      <p:sp>
+        <p:nvSpPr>
+          <p:cNvPr id="5" name="TextBox 4"/>
+          <p:cNvSpPr txBox="1"/>
+          <p:nvPr/>
+        </p:nvSpPr>
+        <p:spPr>
+          <a:xfrm>
+            <a:off x="502920" y="4690872"/>
+            <a:ext cx="8183879" cy="393192"/>
+          </a:xfrm>
+          <a:prstGeom prst="rect">
+            <a:avLst/>
+          </a:prstGeom>
+          <a:noFill/>
+        </p:spPr>
+        <p:txBody>
+          <a:bodyPr wrap="square" lIns="0" rIns="0" tIns="0" bIns="0">
+            <a:noAutofit/>
+          </a:bodyPr>
+          <a:lstStyle/>
+          <a:p>
+            <a:pPr algn="l">
+              <a:lnSpc>
+                <a:spcPct val="112000"/>
+              </a:lnSpc>
+              <a:spcBef>
+                <a:spcPts val="0"/>
+              </a:spcBef>
+              <a:spcAft>
+                <a:spcPts val="0"/>
+              </a:spcAft>
+              <a:buNone/>
+              <a:defRPr sz="810" b="0">
+                <a:solidFill>
+                  <a:srgbClr val="303437"/>
+                </a:solidFill>
+                <a:latin typeface="Noto Sans"/>
+              </a:defRPr>
+            </a:pPr>
+            <a:r>
+              <a:rPr sz="810" b="0" lang="ja-JP" altLang="en-US">
+                <a:solidFill>
+                  <a:srgbClr val="626669"/>
+                </a:solidFill>
+                <a:latin typeface="Noto Sans"/>
+                <a:ea typeface="Noto Sans CJK JP"/>
+                <a:cs typeface="Noto Sans"/>
+              </a:rPr>
+              <a:t/>
+            </a:r>
+            <a:r>
+              <a:rPr sz="810" b="0" lang="ja-JP" altLang="en-US">
+                <a:solidFill>
+                  <a:srgbClr val="626669"/>
+                </a:solidFill>
+                <a:latin typeface="Noto Sans"/>
+                <a:ea typeface="Noto Sans CJK JP"/>
+                <a:cs typeface="Noto Sans"/>
+              </a:rPr>
+              <a:t>Scale AI. MCP-Atlas / 公開train。課題689cd6f8522029b7ad7b2014。CC BY 4.0。</a:t>
+            </a:r>
+            <a:r>
+              <a:rPr sz="810" b="0" lang="ja-JP" altLang="en-US">
+                <a:solidFill>
+                  <a:srgbClr val="626669"/>
+                </a:solidFill>
+                <a:latin typeface="Noto Sans"/>
+                <a:ea typeface="Noto Sans CJK JP"/>
+                <a:cs typeface="Noto Sans"/>
+              </a:rPr>
+              <a:t>  </a:t>
+            </a:r>
+            <a:r>
+              <a:rPr sz="810" b="0" lang="ja-JP" altLang="en-US">
+                <a:solidFill>
+                  <a:srgbClr val="626669"/>
+                </a:solidFill>
+                <a:latin typeface="Noto Sans"/>
+                <a:ea typeface="Noto Sans CJK JP"/>
+                <a:cs typeface="Noto Sans"/>
+                <a:hlinkClick r:id="rId2"/>
+              </a:rPr>
+              <a:t>https://huggingface.co/datasets/ScaleAI/MCP-Atlas/viewer/default/train?row=63</a:t>
+            </a:r>
+          </a:p>
+        </p:txBody>
+      </p:sp>
+    </p:spTree>
+  </p:cSld>
+  <p:clrMapOvr>
+    <a:masterClrMapping/>
+  </p:clrMapOvr>
+</p:sld>
+</file>
+
+<file path=ppt/slides/slide44.xml><?xml version="1.0" encoding="utf-8"?>
+<p:sld xmlns:a="http://schemas.openxmlformats.org/drawingml/2006/main" xmlns:p="http://schemas.openxmlformats.org/presentationml/2006/main" xmlns:r="http://schemas.openxmlformats.org/officeDocument/2006/relationships">
+  <p:cSld>
+    <p:spTree>
+      <p:nvGrpSpPr>
+        <p:cNvPr id="1" name=""/>
+        <p:cNvGrpSpPr/>
+        <p:nvPr/>
+      </p:nvGrpSpPr>
+      <p:grpSpPr/>
+      <p:sp>
+        <p:nvSpPr>
+          <p:cNvPr id="2" name="Title 1"/>
+          <p:cNvSpPr>
+            <a:spLocks noGrp="1"/>
+          </p:cNvSpPr>
+          <p:nvPr>
+            <p:ph type="title"/>
+          </p:nvPr>
+        </p:nvSpPr>
+        <p:spPr>
+          <a:xfrm>
+            <a:off x="548640" y="786384"/>
+            <a:ext cx="8046720" cy="502920"/>
+          </a:xfrm>
+        </p:spPr>
+        <p:txBody>
+          <a:bodyPr wrap="square" lIns="0" rIns="0" tIns="0" bIns="0">
+            <a:noAutofit/>
+          </a:bodyPr>
+          <a:lstStyle/>
+          <a:p>
+            <a:pPr algn="l">
+              <a:lnSpc>
+                <a:spcPct val="110000"/>
+              </a:lnSpc>
+              <a:buNone/>
+              <a:defRPr sz="2800" b="0">
+                <a:solidFill>
+                  <a:srgbClr val="303437"/>
+                </a:solidFill>
+                <a:latin typeface="Noto Sans"/>
+              </a:defRPr>
+            </a:pPr>
+            <a:r>
+              <a:rPr sz="2800" b="1" lang="ja-JP" altLang="en-US">
+                <a:solidFill>
+                  <a:srgbClr val="303437"/>
+                </a:solidFill>
+                <a:latin typeface="Noto Sans"/>
+                <a:ea typeface="Noto Sans CJK JP"/>
+                <a:cs typeface="Noto Sans"/>
+              </a:rPr>
+              <a:t>追加例5：組織グラフから従業員を特定する</a:t>
+            </a:r>
+          </a:p>
+        </p:txBody>
+      </p:sp>
+      <p:sp>
+        <p:nvSpPr>
+          <p:cNvPr id="3" name="Title 2"/>
+          <p:cNvSpPr>
+            <a:spLocks noGrp="1"/>
+          </p:cNvSpPr>
+          <p:nvPr>
+            <p:ph type="title" idx="2"/>
+          </p:nvPr>
+        </p:nvSpPr>
+        <p:spPr>
+          <a:xfrm>
+            <a:off x="75895" y="0"/>
+            <a:ext cx="8115300" cy="480060"/>
+          </a:xfrm>
+        </p:spPr>
+        <p:txBody>
+          <a:bodyPr wrap="square" lIns="0" rIns="0" tIns="0" bIns="0" anchor="ctr">
+            <a:noAutofit/>
+          </a:bodyPr>
+          <a:lstStyle/>
+          <a:p>
+            <a:pPr algn="l">
+              <a:lnSpc>
+                <a:spcPct val="110000"/>
+              </a:lnSpc>
+              <a:buNone/>
+              <a:defRPr sz="1400" b="0">
+                <a:solidFill>
+                  <a:srgbClr val="303437"/>
+                </a:solidFill>
+                <a:latin typeface="Noto Sans"/>
+              </a:defRPr>
+            </a:pPr>
+            <a:r>
+              <a:rPr sz="1400" b="1" lang="ja-JP" altLang="en-US">
+                <a:solidFill>
+                  <a:srgbClr val="FFFFFF"/>
+                </a:solidFill>
+                <a:latin typeface="Noto Sans"/>
+                <a:ea typeface="Noto Sans CJK JP"/>
+                <a:cs typeface="Noto Sans"/>
+              </a:rPr>
+              <a:t>Appendix: 1. 追加の課題と分布</a:t>
+            </a:r>
+          </a:p>
+        </p:txBody>
+      </p:sp>
+      <p:sp>
+        <p:nvSpPr>
+          <p:cNvPr id="4" name="TextBox 3"/>
+          <p:cNvSpPr txBox="1"/>
+          <p:nvPr/>
+        </p:nvSpPr>
+        <p:spPr>
+          <a:xfrm>
+            <a:off x="594360" y="1389888"/>
+            <a:ext cx="7955279" cy="228600"/>
+          </a:xfrm>
+          <a:prstGeom prst="rect">
+            <a:avLst/>
+          </a:prstGeom>
+          <a:noFill/>
+        </p:spPr>
+        <p:txBody>
+          <a:bodyPr wrap="square" lIns="0" rIns="0" tIns="0" bIns="0">
+            <a:noAutofit/>
+          </a:bodyPr>
+          <a:lstStyle/>
+          <a:p>
+            <a:pPr algn="l">
+              <a:lnSpc>
+                <a:spcPct val="117000"/>
+              </a:lnSpc>
+              <a:spcBef>
+                <a:spcPts val="0"/>
+              </a:spcBef>
+              <a:spcAft>
+                <a:spcPts val="0"/>
+              </a:spcAft>
+              <a:buNone/>
+              <a:defRPr sz="1200" b="0">
+                <a:solidFill>
+                  <a:srgbClr val="303437"/>
+                </a:solidFill>
+                <a:latin typeface="Noto Sans"/>
+              </a:defRPr>
+            </a:pPr>
+            <a:r>
+              <a:rPr sz="1200" b="0" lang="ja-JP" altLang="en-US">
+                <a:solidFill>
+                  <a:srgbClr val="626669"/>
+                </a:solidFill>
+                <a:latin typeface="Noto Sans"/>
+                <a:ea typeface="Noto Sans CJK JP"/>
+                <a:cs typeface="Noto Sans"/>
+              </a:rPr>
+              <a:t>公開課題（原文）</a:t>
+            </a:r>
+          </a:p>
+        </p:txBody>
+      </p:sp>
+      <p:sp>
+        <p:nvSpPr>
+          <p:cNvPr id="5" name="TextBox 4"/>
+          <p:cNvSpPr txBox="1"/>
+          <p:nvPr/>
+        </p:nvSpPr>
+        <p:spPr>
+          <a:xfrm>
+            <a:off x="594360" y="1737360"/>
+            <a:ext cx="7955279" cy="1691640"/>
+          </a:xfrm>
+          <a:prstGeom prst="rect">
+            <a:avLst/>
+          </a:prstGeom>
+          <a:noFill/>
+        </p:spPr>
+        <p:txBody>
+          <a:bodyPr wrap="square" lIns="0" rIns="0" tIns="0" bIns="0">
+            <a:noAutofit/>
+          </a:bodyPr>
+          <a:lstStyle/>
+          <a:p>
+            <a:pPr algn="l">
+              <a:lnSpc>
+                <a:spcPct val="120000"/>
+              </a:lnSpc>
+              <a:spcBef>
+                <a:spcPts val="0"/>
+              </a:spcBef>
+              <a:spcAft>
+                <a:spcPts val="0"/>
+              </a:spcAft>
+              <a:buNone/>
+              <a:defRPr sz="1800" b="0">
+                <a:solidFill>
+                  <a:srgbClr val="303437"/>
+                </a:solidFill>
+                <a:latin typeface="Noto Sans"/>
+              </a:defRPr>
+            </a:pPr>
+            <a:r>
+              <a:rPr sz="1800" b="0" lang="ja-JP" altLang="en-US">
+                <a:solidFill>
+                  <a:srgbClr val="303437"/>
+                </a:solidFill>
+                <a:latin typeface="Noto Sans"/>
+                <a:ea typeface="Noto Sans CJK JP"/>
+                <a:cs typeface="Noto Sans"/>
+              </a:rPr>
+              <a:t>I'm trying to find the first name of employee 1011 from the staff satisfaction database. I believe their last name was gomez? I'd check the organizational graph, they should be still working with buildwell. Get me their first name and survey ids, please.</a:t>
+            </a:r>
+          </a:p>
+        </p:txBody>
+      </p:sp>
+      <p:sp>
+        <p:nvSpPr>
+          <p:cNvPr id="6" name="TextBox 5"/>
+          <p:cNvSpPr txBox="1"/>
+          <p:nvPr/>
+        </p:nvSpPr>
+        <p:spPr>
+          <a:xfrm>
+            <a:off x="594360" y="3712463"/>
+            <a:ext cx="7955279" cy="777240"/>
+          </a:xfrm>
+          <a:prstGeom prst="rect">
+            <a:avLst/>
+          </a:prstGeom>
+          <a:noFill/>
+        </p:spPr>
+        <p:txBody>
+          <a:bodyPr wrap="square" lIns="0" rIns="0" tIns="0" bIns="0">
+            <a:noAutofit/>
+          </a:bodyPr>
+          <a:lstStyle/>
+          <a:p>
+            <a:pPr algn="l">
+              <a:lnSpc>
+                <a:spcPct val="120000"/>
+              </a:lnSpc>
+              <a:spcBef>
+                <a:spcPts val="0"/>
+              </a:spcBef>
+              <a:spcAft>
+                <a:spcPts val="0"/>
+              </a:spcAft>
+              <a:buNone/>
+              <a:defRPr sz="2000" b="0">
+                <a:solidFill>
+                  <a:srgbClr val="303437"/>
+                </a:solidFill>
+                <a:latin typeface="Noto Sans"/>
+              </a:defRPr>
+            </a:pPr>
+            <a:r>
+              <a:rPr sz="2000" b="0" lang="ja-JP" altLang="en-US">
+                <a:solidFill>
+                  <a:srgbClr val="303437"/>
+                </a:solidFill>
+                <a:latin typeface="Noto Sans"/>
+                <a:ea typeface="Noto Sans CJK JP"/>
+                <a:cs typeface="Noto Sans"/>
+              </a:rPr>
+              <a:t>所属企業と姓から従業員を特定し、満足度調査の回答IDをデータベースから取得する。</a:t>
+            </a:r>
+          </a:p>
+        </p:txBody>
+      </p:sp>
+      <p:sp>
+        <p:nvSpPr>
+          <p:cNvPr id="7" name="TextBox 6"/>
+          <p:cNvSpPr txBox="1"/>
+          <p:nvPr/>
+        </p:nvSpPr>
+        <p:spPr>
+          <a:xfrm>
+            <a:off x="502920" y="4690872"/>
+            <a:ext cx="8183879" cy="393192"/>
+          </a:xfrm>
+          <a:prstGeom prst="rect">
+            <a:avLst/>
+          </a:prstGeom>
+          <a:noFill/>
+        </p:spPr>
+        <p:txBody>
+          <a:bodyPr wrap="square" lIns="0" rIns="0" tIns="0" bIns="0">
+            <a:noAutofit/>
+          </a:bodyPr>
+          <a:lstStyle/>
+          <a:p>
+            <a:pPr algn="l">
+              <a:lnSpc>
+                <a:spcPct val="112000"/>
+              </a:lnSpc>
+              <a:spcBef>
+                <a:spcPts val="0"/>
+              </a:spcBef>
+              <a:spcAft>
+                <a:spcPts val="0"/>
+              </a:spcAft>
+              <a:buNone/>
+              <a:defRPr sz="810" b="0">
+                <a:solidFill>
+                  <a:srgbClr val="303437"/>
+                </a:solidFill>
+                <a:latin typeface="Noto Sans"/>
+              </a:defRPr>
+            </a:pPr>
+            <a:r>
+              <a:rPr sz="810" b="0" lang="ja-JP" altLang="en-US">
+                <a:solidFill>
+                  <a:srgbClr val="626669"/>
+                </a:solidFill>
+                <a:latin typeface="Noto Sans"/>
+                <a:ea typeface="Noto Sans CJK JP"/>
+                <a:cs typeface="Noto Sans"/>
+              </a:rPr>
+              <a:t/>
+            </a:r>
+            <a:r>
+              <a:rPr sz="810" b="0" lang="ja-JP" altLang="en-US">
+                <a:solidFill>
+                  <a:srgbClr val="626669"/>
+                </a:solidFill>
+                <a:latin typeface="Noto Sans"/>
+                <a:ea typeface="Noto Sans CJK JP"/>
+                <a:cs typeface="Noto Sans"/>
+              </a:rPr>
+              <a:t>Scale AI. MCP-Atlas / 公開train。課題689e0b1d9c8e2ac413c1f214。CC BY 4.0。</a:t>
+            </a:r>
+            <a:r>
+              <a:rPr sz="810" b="0" lang="ja-JP" altLang="en-US">
+                <a:solidFill>
+                  <a:srgbClr val="626669"/>
+                </a:solidFill>
+                <a:latin typeface="Noto Sans"/>
+                <a:ea typeface="Noto Sans CJK JP"/>
+                <a:cs typeface="Noto Sans"/>
+              </a:rPr>
+              <a:t>  </a:t>
+            </a:r>
+            <a:r>
+              <a:rPr sz="810" b="0" lang="ja-JP" altLang="en-US">
+                <a:solidFill>
+                  <a:srgbClr val="626669"/>
+                </a:solidFill>
+                <a:latin typeface="Noto Sans"/>
+                <a:ea typeface="Noto Sans CJK JP"/>
+                <a:cs typeface="Noto Sans"/>
+                <a:hlinkClick r:id="rId2"/>
+              </a:rPr>
+              <a:t>https://huggingface.co/datasets/ScaleAI/MCP-Atlas/viewer/default/train?row=66</a:t>
+            </a:r>
+          </a:p>
+        </p:txBody>
+      </p:sp>
+    </p:spTree>
+  </p:cSld>
+  <p:clrMapOvr>
+    <a:masterClrMapping/>
+  </p:clrMapOvr>
+</p:sld>
+</file>
+
+<file path=ppt/slides/slide45.xml><?xml version="1.0" encoding="utf-8"?>
+<p:sld xmlns:a="http://schemas.openxmlformats.org/drawingml/2006/main" xmlns:p="http://schemas.openxmlformats.org/presentationml/2006/main" xmlns:r="http://schemas.openxmlformats.org/officeDocument/2006/relationships">
+  <p:cSld>
+    <p:spTree>
+      <p:nvGrpSpPr>
+        <p:cNvPr id="1" name=""/>
+        <p:cNvGrpSpPr/>
+        <p:nvPr/>
+      </p:nvGrpSpPr>
+      <p:grpSpPr/>
+      <p:sp>
+        <p:nvSpPr>
+          <p:cNvPr id="2" name="Title 1"/>
+          <p:cNvSpPr>
+            <a:spLocks noGrp="1"/>
+          </p:cNvSpPr>
+          <p:nvPr>
+            <p:ph type="title"/>
+          </p:nvPr>
+        </p:nvSpPr>
+        <p:spPr>
+          <a:xfrm>
+            <a:off x="548640" y="786384"/>
+            <a:ext cx="8046720" cy="502920"/>
+          </a:xfrm>
+        </p:spPr>
+        <p:txBody>
+          <a:bodyPr wrap="square" lIns="0" rIns="0" tIns="0" bIns="0">
+            <a:noAutofit/>
+          </a:bodyPr>
+          <a:lstStyle/>
+          <a:p>
+            <a:pPr algn="l">
+              <a:lnSpc>
+                <a:spcPct val="110000"/>
+              </a:lnSpc>
+              <a:buNone/>
+              <a:defRPr sz="2800" b="0">
+                <a:solidFill>
+                  <a:srgbClr val="303437"/>
+                </a:solidFill>
+                <a:latin typeface="Noto Sans"/>
+              </a:defRPr>
+            </a:pPr>
+            <a:r>
+              <a:rPr sz="2800" b="1" lang="ja-JP" altLang="en-US">
+                <a:solidFill>
+                  <a:srgbClr val="303437"/>
+                </a:solidFill>
+                <a:latin typeface="Noto Sans"/>
+                <a:ea typeface="Noto Sans CJK JP"/>
+                <a:cs typeface="Noto Sans"/>
+              </a:rPr>
+              <a:t>人物の同定と、調査レコードの取得をつなぐ</a:t>
+            </a:r>
+          </a:p>
+        </p:txBody>
+      </p:sp>
+      <p:sp>
+        <p:nvSpPr>
+          <p:cNvPr id="3" name="Text Placeholder 2"/>
+          <p:cNvSpPr>
+            <a:spLocks noGrp="1"/>
+          </p:cNvSpPr>
+          <p:nvPr>
+            <p:ph type="body" idx="1"/>
+          </p:nvPr>
+        </p:nvSpPr>
+        <p:spPr>
+          <a:xfrm>
+            <a:off x="594360" y="1463040"/>
+            <a:ext cx="7955279" cy="3090672"/>
+          </a:xfrm>
+        </p:spPr>
+        <p:txBody>
+          <a:bodyPr wrap="square" tIns="91440" bIns="91440">
+            <a:noAutofit/>
+          </a:bodyPr>
+          <a:lstStyle/>
+          <a:p>
+            <a:pPr marL="457200" indent="-355600">
+              <a:lnSpc>
+                <a:spcPts val="2760"/>
+              </a:lnSpc>
+              <a:spcAft>
+                <a:spcPts val="800"/>
+              </a:spcAft>
+              <a:buSzPct val="57826"/>
+              <a:buFont typeface="Noto Sans CJK JP"/>
+              <a:buChar char="●"/>
+              <a:defRPr sz="2300" b="0">
+                <a:solidFill>
+                  <a:srgbClr val="303437"/>
+                </a:solidFill>
+                <a:latin typeface="Noto Sans"/>
+              </a:defRPr>
+            </a:pPr>
+            <a:r>
+              <a:rPr sz="2300" b="0" lang="ja-JP" altLang="en-US">
+                <a:solidFill>
+                  <a:srgbClr val="303437"/>
+                </a:solidFill>
+                <a:latin typeface="Noto Sans"/>
+                <a:ea typeface="Noto Sans CJK JP"/>
+                <a:cs typeface="Noto Sans"/>
+              </a:rPr>
+              <a:t>Buildwellを含む企業に勤めるGomez姓の人物はAlice。EMP1011に対応する調査IDはSURV7979とSURV9741。</a:t>
+            </a:r>
+          </a:p>
+          <a:p>
+            <a:pPr marL="457200" indent="-355600">
+              <a:lnSpc>
+                <a:spcPts val="2760"/>
+              </a:lnSpc>
+              <a:spcAft>
+                <a:spcPts val="0"/>
+              </a:spcAft>
+              <a:buSzPct val="57826"/>
+              <a:buFont typeface="Noto Sans CJK JP"/>
+              <a:buChar char="●"/>
+              <a:defRPr sz="2300" b="0">
+                <a:solidFill>
+                  <a:srgbClr val="303437"/>
+                </a:solidFill>
+                <a:latin typeface="Noto Sans"/>
+              </a:defRPr>
+            </a:pPr>
+            <a:r>
+              <a:rPr sz="2300" b="0" lang="ja-JP" altLang="en-US">
+                <a:solidFill>
+                  <a:srgbClr val="303437"/>
+                </a:solidFill>
+                <a:latin typeface="Noto Sans"/>
+                <a:ea typeface="Noto Sans CJK JP"/>
+                <a:cs typeface="Noto Sans"/>
+              </a:rPr>
+              <a:t>参照履歴は、メモリーサーバーの組織グラフを読み、Notionで満足度調査のデータベースを検索・照会する。</a:t>
+            </a:r>
+          </a:p>
+        </p:txBody>
+      </p:sp>
+      <p:sp>
+        <p:nvSpPr>
+          <p:cNvPr id="4" name="Title 3"/>
+          <p:cNvSpPr>
+            <a:spLocks noGrp="1"/>
+          </p:cNvSpPr>
+          <p:nvPr>
+            <p:ph type="title" idx="2"/>
+          </p:nvPr>
+        </p:nvSpPr>
+        <p:spPr>
+          <a:xfrm>
+            <a:off x="75895" y="0"/>
+            <a:ext cx="8115300" cy="480060"/>
+          </a:xfrm>
+        </p:spPr>
+        <p:txBody>
+          <a:bodyPr wrap="square" lIns="0" rIns="0" tIns="0" bIns="0" anchor="ctr">
+            <a:noAutofit/>
+          </a:bodyPr>
+          <a:lstStyle/>
+          <a:p>
+            <a:pPr algn="l">
+              <a:lnSpc>
+                <a:spcPct val="110000"/>
+              </a:lnSpc>
+              <a:buNone/>
+              <a:defRPr sz="1400" b="0">
+                <a:solidFill>
+                  <a:srgbClr val="303437"/>
+                </a:solidFill>
+                <a:latin typeface="Noto Sans"/>
+              </a:defRPr>
+            </a:pPr>
+            <a:r>
+              <a:rPr sz="1400" b="1" lang="ja-JP" altLang="en-US">
+                <a:solidFill>
+                  <a:srgbClr val="FFFFFF"/>
+                </a:solidFill>
+                <a:latin typeface="Noto Sans"/>
+                <a:ea typeface="Noto Sans CJK JP"/>
+                <a:cs typeface="Noto Sans"/>
+              </a:rPr>
+              <a:t>Appendix: 1. 追加の課題と分布</a:t>
+            </a:r>
+          </a:p>
+        </p:txBody>
+      </p:sp>
+      <p:sp>
+        <p:nvSpPr>
+          <p:cNvPr id="5" name="TextBox 4"/>
+          <p:cNvSpPr txBox="1"/>
+          <p:nvPr/>
+        </p:nvSpPr>
+        <p:spPr>
+          <a:xfrm>
+            <a:off x="502920" y="4690872"/>
+            <a:ext cx="8183879" cy="393192"/>
+          </a:xfrm>
+          <a:prstGeom prst="rect">
+            <a:avLst/>
+          </a:prstGeom>
+          <a:noFill/>
+        </p:spPr>
+        <p:txBody>
+          <a:bodyPr wrap="square" lIns="0" rIns="0" tIns="0" bIns="0">
+            <a:noAutofit/>
+          </a:bodyPr>
+          <a:lstStyle/>
+          <a:p>
+            <a:pPr algn="l">
+              <a:lnSpc>
+                <a:spcPct val="112000"/>
+              </a:lnSpc>
+              <a:spcBef>
+                <a:spcPts val="0"/>
+              </a:spcBef>
+              <a:spcAft>
+                <a:spcPts val="0"/>
+              </a:spcAft>
+              <a:buNone/>
+              <a:defRPr sz="810" b="0">
+                <a:solidFill>
+                  <a:srgbClr val="303437"/>
+                </a:solidFill>
+                <a:latin typeface="Noto Sans"/>
+              </a:defRPr>
+            </a:pPr>
+            <a:r>
+              <a:rPr sz="810" b="0" lang="ja-JP" altLang="en-US">
+                <a:solidFill>
+                  <a:srgbClr val="626669"/>
+                </a:solidFill>
+                <a:latin typeface="Noto Sans"/>
+                <a:ea typeface="Noto Sans CJK JP"/>
+                <a:cs typeface="Noto Sans"/>
+              </a:rPr>
+              <a:t/>
+            </a:r>
+            <a:r>
+              <a:rPr sz="810" b="0" lang="ja-JP" altLang="en-US">
+                <a:solidFill>
+                  <a:srgbClr val="626669"/>
+                </a:solidFill>
+                <a:latin typeface="Noto Sans"/>
+                <a:ea typeface="Noto Sans CJK JP"/>
+                <a:cs typeface="Noto Sans"/>
+              </a:rPr>
+              <a:t>Scale AI. MCP-Atlas / 公開train。課題689e0b1d9c8e2ac413c1f214。CC BY 4.0。</a:t>
+            </a:r>
+            <a:r>
+              <a:rPr sz="810" b="0" lang="ja-JP" altLang="en-US">
+                <a:solidFill>
+                  <a:srgbClr val="626669"/>
+                </a:solidFill>
+                <a:latin typeface="Noto Sans"/>
+                <a:ea typeface="Noto Sans CJK JP"/>
+                <a:cs typeface="Noto Sans"/>
+              </a:rPr>
+              <a:t>  </a:t>
+            </a:r>
+            <a:r>
+              <a:rPr sz="810" b="0" lang="ja-JP" altLang="en-US">
+                <a:solidFill>
+                  <a:srgbClr val="626669"/>
+                </a:solidFill>
+                <a:latin typeface="Noto Sans"/>
+                <a:ea typeface="Noto Sans CJK JP"/>
+                <a:cs typeface="Noto Sans"/>
+                <a:hlinkClick r:id="rId2"/>
+              </a:rPr>
+              <a:t>https://huggingface.co/datasets/ScaleAI/MCP-Atlas/viewer/default/train?row=66</a:t>
+            </a:r>
+          </a:p>
+        </p:txBody>
+      </p:sp>
+    </p:spTree>
+  </p:cSld>
+  <p:clrMapOvr>
+    <a:masterClrMapping/>
+  </p:clrMapOvr>
+</p:sld>
+</file>
+
+<file path=ppt/slides/slide46.xml><?xml version="1.0" encoding="utf-8"?>
+<p:sld xmlns:a="http://schemas.openxmlformats.org/drawingml/2006/main" xmlns:p="http://schemas.openxmlformats.org/presentationml/2006/main" xmlns:r="http://schemas.openxmlformats.org/officeDocument/2006/relationships">
+  <p:cSld>
+    <p:spTree>
+      <p:nvGrpSpPr>
+        <p:cNvPr id="1" name=""/>
+        <p:cNvGrpSpPr/>
+        <p:nvPr/>
+      </p:nvGrpSpPr>
+      <p:grpSpPr/>
+      <p:sp>
+        <p:nvSpPr>
+          <p:cNvPr id="2" name="Title 1"/>
+          <p:cNvSpPr>
+            <a:spLocks noGrp="1"/>
+          </p:cNvSpPr>
+          <p:nvPr>
+            <p:ph type="title"/>
+          </p:nvPr>
+        </p:nvSpPr>
+        <p:spPr>
+          <a:xfrm>
+            <a:off x="548640" y="786384"/>
+            <a:ext cx="8046720" cy="502920"/>
+          </a:xfrm>
+        </p:spPr>
+        <p:txBody>
+          <a:bodyPr wrap="square" lIns="0" rIns="0" tIns="0" bIns="0">
+            <a:noAutofit/>
+          </a:bodyPr>
+          <a:lstStyle/>
+          <a:p>
+            <a:pPr algn="l">
+              <a:lnSpc>
+                <a:spcPct val="110000"/>
+              </a:lnSpc>
+              <a:buNone/>
+              <a:defRPr sz="2800" b="0">
+                <a:solidFill>
+                  <a:srgbClr val="303437"/>
+                </a:solidFill>
+                <a:latin typeface="Noto Sans"/>
+              </a:defRPr>
+            </a:pPr>
+            <a:r>
+              <a:rPr sz="2800" b="1" lang="ja-JP" altLang="en-US">
+                <a:solidFill>
+                  <a:srgbClr val="303437"/>
+                </a:solidFill>
+                <a:latin typeface="Noto Sans"/>
+                <a:ea typeface="Noto Sans CJK JP"/>
+                <a:cs typeface="Noto Sans"/>
+              </a:rPr>
+              <a:t>追加例6：期間を特定し、価格変化を求める</a:t>
+            </a:r>
+          </a:p>
+        </p:txBody>
+      </p:sp>
+      <p:sp>
+        <p:nvSpPr>
+          <p:cNvPr id="3" name="Title 2"/>
+          <p:cNvSpPr>
+            <a:spLocks noGrp="1"/>
+          </p:cNvSpPr>
+          <p:nvPr>
+            <p:ph type="title" idx="2"/>
+          </p:nvPr>
+        </p:nvSpPr>
+        <p:spPr>
+          <a:xfrm>
+            <a:off x="75895" y="0"/>
+            <a:ext cx="8115300" cy="480060"/>
+          </a:xfrm>
+        </p:spPr>
+        <p:txBody>
+          <a:bodyPr wrap="square" lIns="0" rIns="0" tIns="0" bIns="0" anchor="ctr">
+            <a:noAutofit/>
+          </a:bodyPr>
+          <a:lstStyle/>
+          <a:p>
+            <a:pPr algn="l">
+              <a:lnSpc>
+                <a:spcPct val="110000"/>
+              </a:lnSpc>
+              <a:buNone/>
+              <a:defRPr sz="1400" b="0">
+                <a:solidFill>
+                  <a:srgbClr val="303437"/>
+                </a:solidFill>
+                <a:latin typeface="Noto Sans"/>
+              </a:defRPr>
+            </a:pPr>
+            <a:r>
+              <a:rPr sz="1400" b="1" lang="ja-JP" altLang="en-US">
+                <a:solidFill>
+                  <a:srgbClr val="FFFFFF"/>
+                </a:solidFill>
+                <a:latin typeface="Noto Sans"/>
+                <a:ea typeface="Noto Sans CJK JP"/>
+                <a:cs typeface="Noto Sans"/>
+              </a:rPr>
+              <a:t>Appendix: 1. 追加の課題と分布</a:t>
+            </a:r>
+          </a:p>
+        </p:txBody>
+      </p:sp>
+      <p:sp>
+        <p:nvSpPr>
+          <p:cNvPr id="4" name="TextBox 3"/>
+          <p:cNvSpPr txBox="1"/>
+          <p:nvPr/>
+        </p:nvSpPr>
+        <p:spPr>
+          <a:xfrm>
+            <a:off x="594360" y="1389888"/>
+            <a:ext cx="7955279" cy="228600"/>
+          </a:xfrm>
+          <a:prstGeom prst="rect">
+            <a:avLst/>
+          </a:prstGeom>
+          <a:noFill/>
+        </p:spPr>
+        <p:txBody>
+          <a:bodyPr wrap="square" lIns="0" rIns="0" tIns="0" bIns="0">
+            <a:noAutofit/>
+          </a:bodyPr>
+          <a:lstStyle/>
+          <a:p>
+            <a:pPr algn="l">
+              <a:lnSpc>
+                <a:spcPct val="117000"/>
+              </a:lnSpc>
+              <a:spcBef>
+                <a:spcPts val="0"/>
+              </a:spcBef>
+              <a:spcAft>
+                <a:spcPts val="0"/>
+              </a:spcAft>
+              <a:buNone/>
+              <a:defRPr sz="1200" b="0">
+                <a:solidFill>
+                  <a:srgbClr val="303437"/>
+                </a:solidFill>
+                <a:latin typeface="Noto Sans"/>
+              </a:defRPr>
+            </a:pPr>
+            <a:r>
+              <a:rPr sz="1200" b="0" lang="ja-JP" altLang="en-US">
+                <a:solidFill>
+                  <a:srgbClr val="626669"/>
+                </a:solidFill>
+                <a:latin typeface="Noto Sans"/>
+                <a:ea typeface="Noto Sans CJK JP"/>
+                <a:cs typeface="Noto Sans"/>
+              </a:rPr>
+              <a:t>公開課題（原文）</a:t>
+            </a:r>
+          </a:p>
+        </p:txBody>
+      </p:sp>
+      <p:sp>
+        <p:nvSpPr>
+          <p:cNvPr id="5" name="TextBox 4"/>
+          <p:cNvSpPr txBox="1"/>
+          <p:nvPr/>
+        </p:nvSpPr>
+        <p:spPr>
+          <a:xfrm>
+            <a:off x="594360" y="1737360"/>
+            <a:ext cx="7955279" cy="1691640"/>
+          </a:xfrm>
+          <a:prstGeom prst="rect">
+            <a:avLst/>
+          </a:prstGeom>
+          <a:noFill/>
+        </p:spPr>
+        <p:txBody>
+          <a:bodyPr wrap="square" lIns="0" rIns="0" tIns="0" bIns="0">
+            <a:noAutofit/>
+          </a:bodyPr>
+          <a:lstStyle/>
+          <a:p>
+            <a:pPr algn="l">
+              <a:lnSpc>
+                <a:spcPct val="120000"/>
+              </a:lnSpc>
+              <a:spcBef>
+                <a:spcPts val="0"/>
+              </a:spcBef>
+              <a:spcAft>
+                <a:spcPts val="0"/>
+              </a:spcAft>
+              <a:buNone/>
+              <a:defRPr sz="1800" b="0">
+                <a:solidFill>
+                  <a:srgbClr val="303437"/>
+                </a:solidFill>
+                <a:latin typeface="Noto Sans"/>
+              </a:defRPr>
+            </a:pPr>
+            <a:r>
+              <a:rPr sz="1800" b="0" lang="ja-JP" altLang="en-US">
+                <a:solidFill>
+                  <a:srgbClr val="303437"/>
+                </a:solidFill>
+                <a:latin typeface="Noto Sans"/>
+                <a:ea typeface="Noto Sans CJK JP"/>
+                <a:cs typeface="Noto Sans"/>
+              </a:rPr>
+              <a:t>I want to analyze the percentage change of the ethereum token from the starts of the liquidity mining program for the comp token the year that joe biden wins the presidential election and the first day of autumn in the us the same year.</a:t>
+            </a:r>
+          </a:p>
+        </p:txBody>
+      </p:sp>
+      <p:sp>
+        <p:nvSpPr>
+          <p:cNvPr id="6" name="TextBox 5"/>
+          <p:cNvSpPr txBox="1"/>
+          <p:nvPr/>
+        </p:nvSpPr>
+        <p:spPr>
+          <a:xfrm>
+            <a:off x="594360" y="3712463"/>
+            <a:ext cx="7955279" cy="777240"/>
+          </a:xfrm>
+          <a:prstGeom prst="rect">
+            <a:avLst/>
+          </a:prstGeom>
+          <a:noFill/>
+        </p:spPr>
+        <p:txBody>
+          <a:bodyPr wrap="square" lIns="0" rIns="0" tIns="0" bIns="0">
+            <a:noAutofit/>
+          </a:bodyPr>
+          <a:lstStyle/>
+          <a:p>
+            <a:pPr algn="l">
+              <a:lnSpc>
+                <a:spcPct val="120000"/>
+              </a:lnSpc>
+              <a:spcBef>
+                <a:spcPts val="0"/>
+              </a:spcBef>
+              <a:spcAft>
+                <a:spcPts val="0"/>
+              </a:spcAft>
+              <a:buNone/>
+              <a:defRPr sz="2000" b="0">
+                <a:solidFill>
+                  <a:srgbClr val="303437"/>
+                </a:solidFill>
+                <a:latin typeface="Noto Sans"/>
+              </a:defRPr>
+            </a:pPr>
+            <a:r>
+              <a:rPr sz="2000" b="0" lang="ja-JP" altLang="en-US">
+                <a:solidFill>
+                  <a:srgbClr val="303437"/>
+                </a:solidFill>
+                <a:latin typeface="Noto Sans"/>
+                <a:ea typeface="Noto Sans CJK JP"/>
+                <a:cs typeface="Noto Sans"/>
+              </a:rPr>
+              <a:t>COMPの流動性マイニング開始日から同年の秋の初日まで、Ethereumの価格変化率を求める。</a:t>
+            </a:r>
+          </a:p>
+        </p:txBody>
+      </p:sp>
+      <p:sp>
+        <p:nvSpPr>
+          <p:cNvPr id="7" name="TextBox 6"/>
+          <p:cNvSpPr txBox="1"/>
+          <p:nvPr/>
+        </p:nvSpPr>
+        <p:spPr>
+          <a:xfrm>
+            <a:off x="502920" y="4690872"/>
+            <a:ext cx="8183879" cy="393192"/>
+          </a:xfrm>
+          <a:prstGeom prst="rect">
+            <a:avLst/>
+          </a:prstGeom>
+          <a:noFill/>
+        </p:spPr>
+        <p:txBody>
+          <a:bodyPr wrap="square" lIns="0" rIns="0" tIns="0" bIns="0">
+            <a:noAutofit/>
+          </a:bodyPr>
+          <a:lstStyle/>
+          <a:p>
+            <a:pPr algn="l">
+              <a:lnSpc>
+                <a:spcPct val="112000"/>
+              </a:lnSpc>
+              <a:spcBef>
+                <a:spcPts val="0"/>
+              </a:spcBef>
+              <a:spcAft>
+                <a:spcPts val="0"/>
+              </a:spcAft>
+              <a:buNone/>
+              <a:defRPr sz="810" b="0">
+                <a:solidFill>
+                  <a:srgbClr val="303437"/>
+                </a:solidFill>
+                <a:latin typeface="Noto Sans"/>
+              </a:defRPr>
+            </a:pPr>
+            <a:r>
+              <a:rPr sz="810" b="0" lang="ja-JP" altLang="en-US">
+                <a:solidFill>
+                  <a:srgbClr val="626669"/>
+                </a:solidFill>
+                <a:latin typeface="Noto Sans"/>
+                <a:ea typeface="Noto Sans CJK JP"/>
+                <a:cs typeface="Noto Sans"/>
+              </a:rPr>
+              <a:t/>
+            </a:r>
+            <a:r>
+              <a:rPr sz="810" b="0" lang="ja-JP" altLang="en-US">
+                <a:solidFill>
+                  <a:srgbClr val="626669"/>
+                </a:solidFill>
+                <a:latin typeface="Noto Sans"/>
+                <a:ea typeface="Noto Sans CJK JP"/>
+                <a:cs typeface="Noto Sans"/>
+              </a:rPr>
+              <a:t>Scale AI. MCP-Atlas / 公開train。課題689a373e148a49f91233e023。CC BY 4.0。</a:t>
+            </a:r>
+            <a:r>
+              <a:rPr sz="810" b="0" lang="ja-JP" altLang="en-US">
+                <a:solidFill>
+                  <a:srgbClr val="626669"/>
+                </a:solidFill>
+                <a:latin typeface="Noto Sans"/>
+                <a:ea typeface="Noto Sans CJK JP"/>
+                <a:cs typeface="Noto Sans"/>
+              </a:rPr>
+              <a:t>  </a:t>
+            </a:r>
+            <a:r>
+              <a:rPr sz="810" b="0" lang="ja-JP" altLang="en-US">
+                <a:solidFill>
+                  <a:srgbClr val="626669"/>
+                </a:solidFill>
+                <a:latin typeface="Noto Sans"/>
+                <a:ea typeface="Noto Sans CJK JP"/>
+                <a:cs typeface="Noto Sans"/>
+                <a:hlinkClick r:id="rId2"/>
+              </a:rPr>
+              <a:t>https://huggingface.co/datasets/ScaleAI/MCP-Atlas/viewer/default/train?row=76</a:t>
+            </a:r>
+          </a:p>
+        </p:txBody>
+      </p:sp>
+    </p:spTree>
+  </p:cSld>
+  <p:clrMapOvr>
+    <a:masterClrMapping/>
+  </p:clrMapOvr>
+</p:sld>
+</file>
+
+<file path=ppt/slides/slide47.xml><?xml version="1.0" encoding="utf-8"?>
+<p:sld xmlns:a="http://schemas.openxmlformats.org/drawingml/2006/main" xmlns:p="http://schemas.openxmlformats.org/presentationml/2006/main" xmlns:r="http://schemas.openxmlformats.org/officeDocument/2006/relationships">
+  <p:cSld>
+    <p:spTree>
+      <p:nvGrpSpPr>
+        <p:cNvPr id="1" name=""/>
+        <p:cNvGrpSpPr/>
+        <p:nvPr/>
+      </p:nvGrpSpPr>
+      <p:grpSpPr/>
+      <p:sp>
+        <p:nvSpPr>
+          <p:cNvPr id="2" name="Title 1"/>
+          <p:cNvSpPr>
+            <a:spLocks noGrp="1"/>
+          </p:cNvSpPr>
+          <p:nvPr>
+            <p:ph type="title"/>
+          </p:nvPr>
+        </p:nvSpPr>
+        <p:spPr>
+          <a:xfrm>
+            <a:off x="548640" y="786384"/>
+            <a:ext cx="8046720" cy="502920"/>
+          </a:xfrm>
+        </p:spPr>
+        <p:txBody>
+          <a:bodyPr wrap="square" lIns="0" rIns="0" tIns="0" bIns="0">
+            <a:noAutofit/>
+          </a:bodyPr>
+          <a:lstStyle/>
+          <a:p>
+            <a:pPr algn="l">
+              <a:lnSpc>
+                <a:spcPct val="110000"/>
+              </a:lnSpc>
+              <a:buNone/>
+              <a:defRPr sz="2800" b="0">
+                <a:solidFill>
+                  <a:srgbClr val="303437"/>
+                </a:solidFill>
+                <a:latin typeface="Noto Sans"/>
+              </a:defRPr>
+            </a:pPr>
+            <a:r>
+              <a:rPr sz="2800" b="1" lang="ja-JP" altLang="en-US">
+                <a:solidFill>
+                  <a:srgbClr val="303437"/>
+                </a:solidFill>
+                <a:latin typeface="Noto Sans"/>
+                <a:ea typeface="Noto Sans CJK JP"/>
+                <a:cs typeface="Noto Sans"/>
+              </a:rPr>
+              <a:t>二つの日付を特定し、同じ期間の価格を比べる</a:t>
+            </a:r>
+          </a:p>
+        </p:txBody>
+      </p:sp>
+      <p:sp>
+        <p:nvSpPr>
+          <p:cNvPr id="3" name="Text Placeholder 2"/>
+          <p:cNvSpPr>
+            <a:spLocks noGrp="1"/>
+          </p:cNvSpPr>
+          <p:nvPr>
+            <p:ph type="body" idx="1"/>
+          </p:nvPr>
+        </p:nvSpPr>
+        <p:spPr>
+          <a:xfrm>
+            <a:off x="594360" y="1463040"/>
+            <a:ext cx="7955279" cy="3090672"/>
+          </a:xfrm>
+        </p:spPr>
+        <p:txBody>
+          <a:bodyPr wrap="square" tIns="91440" bIns="91440">
+            <a:noAutofit/>
+          </a:bodyPr>
+          <a:lstStyle/>
+          <a:p>
+            <a:pPr marL="457200" indent="-355600">
+              <a:lnSpc>
+                <a:spcPts val="2760"/>
+              </a:lnSpc>
+              <a:spcAft>
+                <a:spcPts val="800"/>
+              </a:spcAft>
+              <a:buSzPct val="57826"/>
+              <a:buFont typeface="Noto Sans CJK JP"/>
+              <a:buChar char="●"/>
+              <a:defRPr sz="2300" b="0">
+                <a:solidFill>
+                  <a:srgbClr val="303437"/>
+                </a:solidFill>
+                <a:latin typeface="Noto Sans"/>
+              </a:defRPr>
+            </a:pPr>
+            <a:r>
+              <a:rPr sz="2300" b="0" lang="ja-JP" altLang="en-US">
+                <a:solidFill>
+                  <a:srgbClr val="303437"/>
+                </a:solidFill>
+                <a:latin typeface="Noto Sans"/>
+                <a:ea typeface="Noto Sans CJK JP"/>
+                <a:cs typeface="Noto Sans"/>
+              </a:rPr>
+              <a:t>対象年は2020年。開始日はCOMPの流動性マイニングが始まった6月15日、終了日は米国の秋の初日である9月22日。</a:t>
+            </a:r>
+          </a:p>
+          <a:p>
+            <a:pPr marL="457200" indent="-355600">
+              <a:lnSpc>
+                <a:spcPts val="2760"/>
+              </a:lnSpc>
+              <a:spcAft>
+                <a:spcPts val="0"/>
+              </a:spcAft>
+              <a:buSzPct val="57826"/>
+              <a:buFont typeface="Noto Sans CJK JP"/>
+              <a:buChar char="●"/>
+              <a:defRPr sz="2300" b="0">
+                <a:solidFill>
+                  <a:srgbClr val="303437"/>
+                </a:solidFill>
+                <a:latin typeface="Noto Sans"/>
+              </a:defRPr>
+            </a:pPr>
+            <a:r>
+              <a:rPr sz="2300" b="0" lang="ja-JP" altLang="en-US">
+                <a:solidFill>
+                  <a:srgbClr val="303437"/>
+                </a:solidFill>
+                <a:latin typeface="Noto Sans"/>
+                <a:ea typeface="Noto Sans CJK JP"/>
+                <a:cs typeface="Noto Sans"/>
+              </a:rPr>
+              <a:t>配布正解の価格変化率は約47.03%の上昇。参照履歴はWeb検索で日付を確認し、AlchemyでEthereumの価格履歴を取得してコードで計算する。</a:t>
+            </a:r>
+          </a:p>
+        </p:txBody>
+      </p:sp>
+      <p:sp>
+        <p:nvSpPr>
+          <p:cNvPr id="4" name="Title 3"/>
+          <p:cNvSpPr>
+            <a:spLocks noGrp="1"/>
+          </p:cNvSpPr>
+          <p:nvPr>
+            <p:ph type="title" idx="2"/>
+          </p:nvPr>
+        </p:nvSpPr>
+        <p:spPr>
+          <a:xfrm>
+            <a:off x="75895" y="0"/>
+            <a:ext cx="8115300" cy="480060"/>
+          </a:xfrm>
+        </p:spPr>
+        <p:txBody>
+          <a:bodyPr wrap="square" lIns="0" rIns="0" tIns="0" bIns="0" anchor="ctr">
+            <a:noAutofit/>
+          </a:bodyPr>
+          <a:lstStyle/>
+          <a:p>
+            <a:pPr algn="l">
+              <a:lnSpc>
+                <a:spcPct val="110000"/>
+              </a:lnSpc>
+              <a:buNone/>
+              <a:defRPr sz="1400" b="0">
+                <a:solidFill>
+                  <a:srgbClr val="303437"/>
+                </a:solidFill>
+                <a:latin typeface="Noto Sans"/>
+              </a:defRPr>
+            </a:pPr>
+            <a:r>
+              <a:rPr sz="1400" b="1" lang="ja-JP" altLang="en-US">
+                <a:solidFill>
+                  <a:srgbClr val="FFFFFF"/>
+                </a:solidFill>
+                <a:latin typeface="Noto Sans"/>
+                <a:ea typeface="Noto Sans CJK JP"/>
+                <a:cs typeface="Noto Sans"/>
+              </a:rPr>
+              <a:t>Appendix: 1. 追加の課題と分布</a:t>
+            </a:r>
+          </a:p>
+        </p:txBody>
+      </p:sp>
+      <p:sp>
+        <p:nvSpPr>
+          <p:cNvPr id="5" name="TextBox 4"/>
+          <p:cNvSpPr txBox="1"/>
+          <p:nvPr/>
+        </p:nvSpPr>
+        <p:spPr>
+          <a:xfrm>
+            <a:off x="502920" y="4690872"/>
+            <a:ext cx="8183879" cy="393192"/>
+          </a:xfrm>
+          <a:prstGeom prst="rect">
+            <a:avLst/>
+          </a:prstGeom>
+          <a:noFill/>
+        </p:spPr>
+        <p:txBody>
+          <a:bodyPr wrap="square" lIns="0" rIns="0" tIns="0" bIns="0">
+            <a:noAutofit/>
+          </a:bodyPr>
+          <a:lstStyle/>
+          <a:p>
+            <a:pPr algn="l">
+              <a:lnSpc>
+                <a:spcPct val="112000"/>
+              </a:lnSpc>
+              <a:spcBef>
+                <a:spcPts val="0"/>
+              </a:spcBef>
+              <a:spcAft>
+                <a:spcPts val="0"/>
+              </a:spcAft>
+              <a:buNone/>
+              <a:defRPr sz="810" b="0">
+                <a:solidFill>
+                  <a:srgbClr val="303437"/>
+                </a:solidFill>
+                <a:latin typeface="Noto Sans"/>
+              </a:defRPr>
+            </a:pPr>
+            <a:r>
+              <a:rPr sz="810" b="0" lang="ja-JP" altLang="en-US">
+                <a:solidFill>
+                  <a:srgbClr val="626669"/>
+                </a:solidFill>
+                <a:latin typeface="Noto Sans"/>
+                <a:ea typeface="Noto Sans CJK JP"/>
+                <a:cs typeface="Noto Sans"/>
+              </a:rPr>
+              <a:t/>
+            </a:r>
+            <a:r>
+              <a:rPr sz="810" b="0" lang="ja-JP" altLang="en-US">
+                <a:solidFill>
+                  <a:srgbClr val="626669"/>
+                </a:solidFill>
+                <a:latin typeface="Noto Sans"/>
+                <a:ea typeface="Noto Sans CJK JP"/>
+                <a:cs typeface="Noto Sans"/>
+              </a:rPr>
+              <a:t>Scale AI. MCP-Atlas / 公開train。課題689a373e148a49f91233e023。CC BY 4.0。</a:t>
+            </a:r>
+            <a:r>
+              <a:rPr sz="810" b="0" lang="ja-JP" altLang="en-US">
+                <a:solidFill>
+                  <a:srgbClr val="626669"/>
+                </a:solidFill>
+                <a:latin typeface="Noto Sans"/>
+                <a:ea typeface="Noto Sans CJK JP"/>
+                <a:cs typeface="Noto Sans"/>
+              </a:rPr>
+              <a:t>  </a:t>
+            </a:r>
+            <a:r>
+              <a:rPr sz="810" b="0" lang="ja-JP" altLang="en-US">
+                <a:solidFill>
+                  <a:srgbClr val="626669"/>
+                </a:solidFill>
+                <a:latin typeface="Noto Sans"/>
+                <a:ea typeface="Noto Sans CJK JP"/>
+                <a:cs typeface="Noto Sans"/>
+                <a:hlinkClick r:id="rId2"/>
+              </a:rPr>
+              <a:t>https://huggingface.co/datasets/ScaleAI/MCP-Atlas/viewer/default/train?row=76</a:t>
+            </a:r>
+          </a:p>
+        </p:txBody>
+      </p:sp>
+    </p:spTree>
+  </p:cSld>
+  <p:clrMapOvr>
+    <a:masterClrMapping/>
+  </p:clrMapOvr>
+</p:sld>
+</file>
+
+<file path=ppt/slides/slide48.xml><?xml version="1.0" encoding="utf-8"?>
+<p:sld xmlns:a="http://schemas.openxmlformats.org/drawingml/2006/main" xmlns:p="http://schemas.openxmlformats.org/presentationml/2006/main" xmlns:r="http://schemas.openxmlformats.org/officeDocument/2006/relationships">
+  <p:cSld>
+    <p:spTree>
+      <p:nvGrpSpPr>
+        <p:cNvPr id="1" name=""/>
+        <p:cNvGrpSpPr/>
+        <p:nvPr/>
+      </p:nvGrpSpPr>
+      <p:grpSpPr/>
+      <p:sp>
+        <p:nvSpPr>
+          <p:cNvPr id="2" name="Title 1"/>
+          <p:cNvSpPr>
+            <a:spLocks noGrp="1"/>
+          </p:cNvSpPr>
+          <p:nvPr>
+            <p:ph type="title"/>
+          </p:nvPr>
+        </p:nvSpPr>
+        <p:spPr>
+          <a:xfrm>
+            <a:off x="548640" y="786384"/>
+            <a:ext cx="8046720" cy="502920"/>
+          </a:xfrm>
+        </p:spPr>
+        <p:txBody>
+          <a:bodyPr wrap="square" lIns="0" rIns="0" tIns="0" bIns="0">
+            <a:noAutofit/>
+          </a:bodyPr>
+          <a:lstStyle/>
+          <a:p>
+            <a:pPr algn="l">
+              <a:lnSpc>
+                <a:spcPct val="110000"/>
+              </a:lnSpc>
+              <a:buNone/>
+              <a:defRPr sz="2800" b="0">
+                <a:solidFill>
+                  <a:srgbClr val="303437"/>
+                </a:solidFill>
+                <a:latin typeface="Noto Sans"/>
+              </a:defRPr>
+            </a:pPr>
+            <a:r>
+              <a:rPr sz="2800" b="1" lang="ja-JP" altLang="en-US">
+                <a:solidFill>
+                  <a:srgbClr val="303437"/>
+                </a:solidFill>
+                <a:latin typeface="Noto Sans"/>
+                <a:ea typeface="Noto Sans CJK JP"/>
+                <a:cs typeface="Noto Sans"/>
+              </a:rPr>
+              <a:t>追加例7：公園を絞り、近くの観測地点を調べる</a:t>
+            </a:r>
+          </a:p>
+        </p:txBody>
+      </p:sp>
+      <p:sp>
+        <p:nvSpPr>
+          <p:cNvPr id="3" name="Title 2"/>
+          <p:cNvSpPr>
+            <a:spLocks noGrp="1"/>
+          </p:cNvSpPr>
+          <p:nvPr>
+            <p:ph type="title" idx="2"/>
+          </p:nvPr>
+        </p:nvSpPr>
+        <p:spPr>
+          <a:xfrm>
+            <a:off x="75895" y="0"/>
+            <a:ext cx="8115300" cy="480060"/>
+          </a:xfrm>
+        </p:spPr>
+        <p:txBody>
+          <a:bodyPr wrap="square" lIns="0" rIns="0" tIns="0" bIns="0" anchor="ctr">
+            <a:noAutofit/>
+          </a:bodyPr>
+          <a:lstStyle/>
+          <a:p>
+            <a:pPr algn="l">
+              <a:lnSpc>
+                <a:spcPct val="110000"/>
+              </a:lnSpc>
+              <a:buNone/>
+              <a:defRPr sz="1400" b="0">
+                <a:solidFill>
+                  <a:srgbClr val="303437"/>
+                </a:solidFill>
+                <a:latin typeface="Noto Sans"/>
+              </a:defRPr>
+            </a:pPr>
+            <a:r>
+              <a:rPr sz="1400" b="1" lang="ja-JP" altLang="en-US">
+                <a:solidFill>
+                  <a:srgbClr val="FFFFFF"/>
+                </a:solidFill>
+                <a:latin typeface="Noto Sans"/>
+                <a:ea typeface="Noto Sans CJK JP"/>
+                <a:cs typeface="Noto Sans"/>
+              </a:rPr>
+              <a:t>Appendix: 1. 追加の課題と分布</a:t>
+            </a:r>
+          </a:p>
+        </p:txBody>
+      </p:sp>
+      <p:sp>
+        <p:nvSpPr>
+          <p:cNvPr id="4" name="TextBox 3"/>
+          <p:cNvSpPr txBox="1"/>
+          <p:nvPr/>
+        </p:nvSpPr>
+        <p:spPr>
+          <a:xfrm>
+            <a:off x="594360" y="1389888"/>
+            <a:ext cx="7955279" cy="228600"/>
+          </a:xfrm>
+          <a:prstGeom prst="rect">
+            <a:avLst/>
+          </a:prstGeom>
+          <a:noFill/>
+        </p:spPr>
+        <p:txBody>
+          <a:bodyPr wrap="square" lIns="0" rIns="0" tIns="0" bIns="0">
+            <a:noAutofit/>
+          </a:bodyPr>
+          <a:lstStyle/>
+          <a:p>
+            <a:pPr algn="l">
+              <a:lnSpc>
+                <a:spcPct val="117000"/>
+              </a:lnSpc>
+              <a:spcBef>
+                <a:spcPts val="0"/>
+              </a:spcBef>
+              <a:spcAft>
+                <a:spcPts val="0"/>
+              </a:spcAft>
+              <a:buNone/>
+              <a:defRPr sz="1200" b="0">
+                <a:solidFill>
+                  <a:srgbClr val="303437"/>
+                </a:solidFill>
+                <a:latin typeface="Noto Sans"/>
+              </a:defRPr>
+            </a:pPr>
+            <a:r>
+              <a:rPr sz="1200" b="0" lang="ja-JP" altLang="en-US">
+                <a:solidFill>
+                  <a:srgbClr val="626669"/>
+                </a:solidFill>
+                <a:latin typeface="Noto Sans"/>
+                <a:ea typeface="Noto Sans CJK JP"/>
+                <a:cs typeface="Noto Sans"/>
+              </a:rPr>
+              <a:t>公開課題（原文）</a:t>
+            </a:r>
+          </a:p>
+        </p:txBody>
+      </p:sp>
+      <p:sp>
+        <p:nvSpPr>
+          <p:cNvPr id="5" name="TextBox 4"/>
+          <p:cNvSpPr txBox="1"/>
+          <p:nvPr/>
+        </p:nvSpPr>
+        <p:spPr>
+          <a:xfrm>
+            <a:off x="594360" y="1737360"/>
+            <a:ext cx="7955279" cy="1691640"/>
+          </a:xfrm>
+          <a:prstGeom prst="rect">
+            <a:avLst/>
+          </a:prstGeom>
+          <a:noFill/>
+        </p:spPr>
+        <p:txBody>
+          <a:bodyPr wrap="square" lIns="0" rIns="0" tIns="0" bIns="0">
+            <a:noAutofit/>
+          </a:bodyPr>
+          <a:lstStyle/>
+          <a:p>
+            <a:pPr algn="l">
+              <a:lnSpc>
+                <a:spcPct val="120000"/>
+              </a:lnSpc>
+              <a:spcBef>
+                <a:spcPts val="0"/>
+              </a:spcBef>
+              <a:spcAft>
+                <a:spcPts val="0"/>
+              </a:spcAft>
+              <a:buNone/>
+              <a:defRPr sz="1800" b="0">
+                <a:solidFill>
+                  <a:srgbClr val="303437"/>
+                </a:solidFill>
+                <a:latin typeface="Noto Sans"/>
+              </a:defRPr>
+            </a:pPr>
+            <a:r>
+              <a:rPr sz="1800" b="0" lang="ja-JP" altLang="en-US">
+                <a:solidFill>
+                  <a:srgbClr val="303437"/>
+                </a:solidFill>
+                <a:latin typeface="Noto Sans"/>
+                <a:ea typeface="Noto Sans CJK JP"/>
+                <a:cs typeface="Noto Sans"/>
+              </a:rPr>
+              <a:t>What was the daily high temperature recording in celsius at the nearest location to the southern-most visitor station of the largest national park in terms of acreage in the state of florida on Aug 11, 2025?</a:t>
+            </a:r>
+          </a:p>
+        </p:txBody>
+      </p:sp>
+      <p:sp>
+        <p:nvSpPr>
+          <p:cNvPr id="6" name="TextBox 5"/>
+          <p:cNvSpPr txBox="1"/>
+          <p:nvPr/>
+        </p:nvSpPr>
+        <p:spPr>
+          <a:xfrm>
+            <a:off x="594360" y="3712463"/>
+            <a:ext cx="7955279" cy="777240"/>
+          </a:xfrm>
+          <a:prstGeom prst="rect">
+            <a:avLst/>
+          </a:prstGeom>
+          <a:noFill/>
+        </p:spPr>
+        <p:txBody>
+          <a:bodyPr wrap="square" lIns="0" rIns="0" tIns="0" bIns="0">
+            <a:noAutofit/>
+          </a:bodyPr>
+          <a:lstStyle/>
+          <a:p>
+            <a:pPr algn="l">
+              <a:lnSpc>
+                <a:spcPct val="120000"/>
+              </a:lnSpc>
+              <a:spcBef>
+                <a:spcPts val="0"/>
+              </a:spcBef>
+              <a:spcAft>
+                <a:spcPts val="0"/>
+              </a:spcAft>
+              <a:buNone/>
+              <a:defRPr sz="2000" b="0">
+                <a:solidFill>
+                  <a:srgbClr val="303437"/>
+                </a:solidFill>
+                <a:latin typeface="Noto Sans"/>
+              </a:defRPr>
+            </a:pPr>
+            <a:r>
+              <a:rPr sz="2000" b="0" lang="ja-JP" altLang="en-US">
+                <a:solidFill>
+                  <a:srgbClr val="303437"/>
+                </a:solidFill>
+                <a:latin typeface="Noto Sans"/>
+                <a:ea typeface="Noto Sans CJK JP"/>
+                <a:cs typeface="Noto Sans"/>
+              </a:rPr>
+              <a:t>フロリダ州最大の国立公園と最南端の案内所を特定し、近くの地点の日最高気温を調べる。</a:t>
+            </a:r>
+          </a:p>
+        </p:txBody>
+      </p:sp>
+      <p:sp>
+        <p:nvSpPr>
+          <p:cNvPr id="7" name="TextBox 6"/>
+          <p:cNvSpPr txBox="1"/>
+          <p:nvPr/>
+        </p:nvSpPr>
+        <p:spPr>
+          <a:xfrm>
+            <a:off x="502920" y="4690872"/>
+            <a:ext cx="8183879" cy="393192"/>
+          </a:xfrm>
+          <a:prstGeom prst="rect">
+            <a:avLst/>
+          </a:prstGeom>
+          <a:noFill/>
+        </p:spPr>
+        <p:txBody>
+          <a:bodyPr wrap="square" lIns="0" rIns="0" tIns="0" bIns="0">
+            <a:noAutofit/>
+          </a:bodyPr>
+          <a:lstStyle/>
+          <a:p>
+            <a:pPr algn="l">
+              <a:lnSpc>
+                <a:spcPct val="112000"/>
+              </a:lnSpc>
+              <a:spcBef>
+                <a:spcPts val="0"/>
+              </a:spcBef>
+              <a:spcAft>
+                <a:spcPts val="0"/>
+              </a:spcAft>
+              <a:buNone/>
+              <a:defRPr sz="810" b="0">
+                <a:solidFill>
+                  <a:srgbClr val="303437"/>
+                </a:solidFill>
+                <a:latin typeface="Noto Sans"/>
+              </a:defRPr>
+            </a:pPr>
+            <a:r>
+              <a:rPr sz="810" b="0" lang="ja-JP" altLang="en-US">
+                <a:solidFill>
+                  <a:srgbClr val="626669"/>
+                </a:solidFill>
+                <a:latin typeface="Noto Sans"/>
+                <a:ea typeface="Noto Sans CJK JP"/>
+                <a:cs typeface="Noto Sans"/>
+              </a:rPr>
+              <a:t/>
+            </a:r>
+            <a:r>
+              <a:rPr sz="810" b="0" lang="ja-JP" altLang="en-US">
+                <a:solidFill>
+                  <a:srgbClr val="626669"/>
+                </a:solidFill>
+                <a:latin typeface="Noto Sans"/>
+                <a:ea typeface="Noto Sans CJK JP"/>
+                <a:cs typeface="Noto Sans"/>
+              </a:rPr>
+              <a:t>Scale AI. MCP-Atlas / 公開train。課題689af4e653c3905e7b5b258e。CC BY 4.0。</a:t>
+            </a:r>
+            <a:r>
+              <a:rPr sz="810" b="0" lang="ja-JP" altLang="en-US">
+                <a:solidFill>
+                  <a:srgbClr val="626669"/>
+                </a:solidFill>
+                <a:latin typeface="Noto Sans"/>
+                <a:ea typeface="Noto Sans CJK JP"/>
+                <a:cs typeface="Noto Sans"/>
+              </a:rPr>
+              <a:t>  </a:t>
+            </a:r>
+            <a:r>
+              <a:rPr sz="810" b="0" lang="ja-JP" altLang="en-US">
+                <a:solidFill>
+                  <a:srgbClr val="626669"/>
+                </a:solidFill>
+                <a:latin typeface="Noto Sans"/>
+                <a:ea typeface="Noto Sans CJK JP"/>
+                <a:cs typeface="Noto Sans"/>
+                <a:hlinkClick r:id="rId2"/>
+              </a:rPr>
+              <a:t>https://huggingface.co/datasets/ScaleAI/MCP-Atlas/viewer/default/train?row=25</a:t>
+            </a:r>
+          </a:p>
+        </p:txBody>
+      </p:sp>
+    </p:spTree>
+  </p:cSld>
+  <p:clrMapOvr>
+    <a:masterClrMapping/>
+  </p:clrMapOvr>
+</p:sld>
+</file>
+
+<file path=ppt/slides/slide49.xml><?xml version="1.0" encoding="utf-8"?>
+<p:sld xmlns:a="http://schemas.openxmlformats.org/drawingml/2006/main" xmlns:p="http://schemas.openxmlformats.org/presentationml/2006/main" xmlns:r="http://schemas.openxmlformats.org/officeDocument/2006/relationships">
+  <p:cSld>
+    <p:spTree>
+      <p:nvGrpSpPr>
+        <p:cNvPr id="1" name=""/>
+        <p:cNvGrpSpPr/>
+        <p:nvPr/>
+      </p:nvGrpSpPr>
+      <p:grpSpPr/>
+      <p:sp>
+        <p:nvSpPr>
+          <p:cNvPr id="2" name="Title 1"/>
+          <p:cNvSpPr>
+            <a:spLocks noGrp="1"/>
+          </p:cNvSpPr>
+          <p:nvPr>
+            <p:ph type="title"/>
+          </p:nvPr>
+        </p:nvSpPr>
+        <p:spPr>
+          <a:xfrm>
+            <a:off x="548640" y="786384"/>
+            <a:ext cx="8046720" cy="502920"/>
+          </a:xfrm>
+        </p:spPr>
+        <p:txBody>
+          <a:bodyPr wrap="square" lIns="0" rIns="0" tIns="0" bIns="0">
+            <a:noAutofit/>
+          </a:bodyPr>
+          <a:lstStyle/>
+          <a:p>
+            <a:pPr algn="l">
+              <a:lnSpc>
+                <a:spcPct val="110000"/>
+              </a:lnSpc>
+              <a:buNone/>
+              <a:defRPr sz="2800" b="0">
+                <a:solidFill>
+                  <a:srgbClr val="303437"/>
+                </a:solidFill>
+                <a:latin typeface="Noto Sans"/>
+              </a:defRPr>
+            </a:pPr>
+            <a:r>
+              <a:rPr sz="2800" b="1" lang="ja-JP" altLang="en-US">
+                <a:solidFill>
+                  <a:srgbClr val="303437"/>
+                </a:solidFill>
+                <a:latin typeface="Noto Sans"/>
+                <a:ea typeface="Noto Sans CJK JP"/>
+                <a:cs typeface="Noto Sans"/>
+              </a:rPr>
+              <a:t>公園・案内所・観測地点を順に結び付ける</a:t>
+            </a:r>
+          </a:p>
+        </p:txBody>
+      </p:sp>
+      <p:sp>
+        <p:nvSpPr>
+          <p:cNvPr id="3" name="Text Placeholder 2"/>
+          <p:cNvSpPr>
+            <a:spLocks noGrp="1"/>
+          </p:cNvSpPr>
+          <p:nvPr>
+            <p:ph type="body" idx="1"/>
+          </p:nvPr>
+        </p:nvSpPr>
+        <p:spPr>
+          <a:xfrm>
+            <a:off x="594360" y="1463040"/>
+            <a:ext cx="7955279" cy="3090672"/>
+          </a:xfrm>
+        </p:spPr>
+        <p:txBody>
+          <a:bodyPr wrap="square" tIns="91440" bIns="91440">
+            <a:noAutofit/>
+          </a:bodyPr>
+          <a:lstStyle/>
+          <a:p>
+            <a:pPr marL="457200" indent="-355600">
+              <a:lnSpc>
+                <a:spcPts val="2760"/>
+              </a:lnSpc>
+              <a:spcAft>
+                <a:spcPts val="800"/>
+              </a:spcAft>
+              <a:buSzPct val="57826"/>
+              <a:buFont typeface="Noto Sans CJK JP"/>
+              <a:buChar char="●"/>
+              <a:defRPr sz="2300" b="0">
+                <a:solidFill>
+                  <a:srgbClr val="303437"/>
+                </a:solidFill>
+                <a:latin typeface="Noto Sans"/>
+              </a:defRPr>
+            </a:pPr>
+            <a:r>
+              <a:rPr sz="2300" b="0" lang="ja-JP" altLang="en-US">
+                <a:solidFill>
+                  <a:srgbClr val="303437"/>
+                </a:solidFill>
+                <a:latin typeface="Noto Sans"/>
+                <a:ea typeface="Noto Sans CJK JP"/>
+                <a:cs typeface="Noto Sans"/>
+              </a:rPr>
+              <a:t>面積が州内最大の国立公園はEverglades。最南端の案内所はGuy Bradley Visitor Centerで、観測地点は約25.140881°N、80.924102°W。</a:t>
+            </a:r>
+          </a:p>
+          <a:p>
+            <a:pPr marL="457200" indent="-355600">
+              <a:lnSpc>
+                <a:spcPts val="2760"/>
+              </a:lnSpc>
+              <a:spcAft>
+                <a:spcPts val="0"/>
+              </a:spcAft>
+              <a:buSzPct val="57826"/>
+              <a:buFont typeface="Noto Sans CJK JP"/>
+              <a:buChar char="●"/>
+              <a:defRPr sz="2300" b="0">
+                <a:solidFill>
+                  <a:srgbClr val="303437"/>
+                </a:solidFill>
+                <a:latin typeface="Noto Sans"/>
+              </a:defRPr>
+            </a:pPr>
+            <a:r>
+              <a:rPr sz="2300" b="0" lang="ja-JP" altLang="en-US">
+                <a:solidFill>
+                  <a:srgbClr val="303437"/>
+                </a:solidFill>
+                <a:latin typeface="Noto Sans"/>
+                <a:ea typeface="Noto Sans CJK JP"/>
+                <a:cs typeface="Noto Sans"/>
+              </a:rPr>
+              <a:t>2025年8月11日の日最高気温は30.6℃。参照履歴は、公園情報と案内所を検索してから、その地点の気象履歴を取得する。</a:t>
+            </a:r>
+          </a:p>
+        </p:txBody>
+      </p:sp>
+      <p:sp>
+        <p:nvSpPr>
+          <p:cNvPr id="4" name="Title 3"/>
+          <p:cNvSpPr>
+            <a:spLocks noGrp="1"/>
+          </p:cNvSpPr>
+          <p:nvPr>
+            <p:ph type="title" idx="2"/>
+          </p:nvPr>
+        </p:nvSpPr>
+        <p:spPr>
+          <a:xfrm>
+            <a:off x="75895" y="0"/>
+            <a:ext cx="8115300" cy="480060"/>
+          </a:xfrm>
+        </p:spPr>
+        <p:txBody>
+          <a:bodyPr wrap="square" lIns="0" rIns="0" tIns="0" bIns="0" anchor="ctr">
+            <a:noAutofit/>
+          </a:bodyPr>
+          <a:lstStyle/>
+          <a:p>
+            <a:pPr algn="l">
+              <a:lnSpc>
+                <a:spcPct val="110000"/>
+              </a:lnSpc>
+              <a:buNone/>
+              <a:defRPr sz="1400" b="0">
+                <a:solidFill>
+                  <a:srgbClr val="303437"/>
+                </a:solidFill>
+                <a:latin typeface="Noto Sans"/>
+              </a:defRPr>
+            </a:pPr>
+            <a:r>
+              <a:rPr sz="1400" b="1" lang="ja-JP" altLang="en-US">
+                <a:solidFill>
+                  <a:srgbClr val="FFFFFF"/>
+                </a:solidFill>
+                <a:latin typeface="Noto Sans"/>
+                <a:ea typeface="Noto Sans CJK JP"/>
+                <a:cs typeface="Noto Sans"/>
+              </a:rPr>
+              <a:t>Appendix: 1. 追加の課題と分布</a:t>
+            </a:r>
+          </a:p>
+        </p:txBody>
+      </p:sp>
+      <p:sp>
+        <p:nvSpPr>
+          <p:cNvPr id="5" name="TextBox 4"/>
+          <p:cNvSpPr txBox="1"/>
+          <p:nvPr/>
+        </p:nvSpPr>
+        <p:spPr>
+          <a:xfrm>
+            <a:off x="502920" y="4690872"/>
+            <a:ext cx="8183879" cy="393192"/>
+          </a:xfrm>
+          <a:prstGeom prst="rect">
+            <a:avLst/>
+          </a:prstGeom>
+          <a:noFill/>
+        </p:spPr>
+        <p:txBody>
+          <a:bodyPr wrap="square" lIns="0" rIns="0" tIns="0" bIns="0">
+            <a:noAutofit/>
+          </a:bodyPr>
+          <a:lstStyle/>
+          <a:p>
+            <a:pPr algn="l">
+              <a:lnSpc>
+                <a:spcPct val="112000"/>
+              </a:lnSpc>
+              <a:spcBef>
+                <a:spcPts val="0"/>
+              </a:spcBef>
+              <a:spcAft>
+                <a:spcPts val="0"/>
+              </a:spcAft>
+              <a:buNone/>
+              <a:defRPr sz="810" b="0">
+                <a:solidFill>
+                  <a:srgbClr val="303437"/>
+                </a:solidFill>
+                <a:latin typeface="Noto Sans"/>
+              </a:defRPr>
+            </a:pPr>
+            <a:r>
+              <a:rPr sz="810" b="0" lang="ja-JP" altLang="en-US">
+                <a:solidFill>
+                  <a:srgbClr val="626669"/>
+                </a:solidFill>
+                <a:latin typeface="Noto Sans"/>
+                <a:ea typeface="Noto Sans CJK JP"/>
+                <a:cs typeface="Noto Sans"/>
+              </a:rPr>
+              <a:t/>
+            </a:r>
+            <a:r>
+              <a:rPr sz="810" b="0" lang="ja-JP" altLang="en-US">
+                <a:solidFill>
+                  <a:srgbClr val="626669"/>
+                </a:solidFill>
+                <a:latin typeface="Noto Sans"/>
+                <a:ea typeface="Noto Sans CJK JP"/>
+                <a:cs typeface="Noto Sans"/>
+              </a:rPr>
+              <a:t>Scale AI. MCP-Atlas / 公開train。課題689af4e653c3905e7b5b258e。CC BY 4.0。</a:t>
+            </a:r>
+            <a:r>
+              <a:rPr sz="810" b="0" lang="ja-JP" altLang="en-US">
+                <a:solidFill>
+                  <a:srgbClr val="626669"/>
+                </a:solidFill>
+                <a:latin typeface="Noto Sans"/>
+                <a:ea typeface="Noto Sans CJK JP"/>
+                <a:cs typeface="Noto Sans"/>
+              </a:rPr>
+              <a:t>  </a:t>
+            </a:r>
+            <a:r>
+              <a:rPr sz="810" b="0" lang="ja-JP" altLang="en-US">
+                <a:solidFill>
+                  <a:srgbClr val="626669"/>
+                </a:solidFill>
+                <a:latin typeface="Noto Sans"/>
+                <a:ea typeface="Noto Sans CJK JP"/>
+                <a:cs typeface="Noto Sans"/>
+                <a:hlinkClick r:id="rId2"/>
+              </a:rPr>
+              <a:t>https://huggingface.co/datasets/ScaleAI/MCP-Atlas/viewer/default/train?row=25</a:t>
+            </a:r>
+          </a:p>
+        </p:txBody>
+      </p:sp>
+    </p:spTree>
+  </p:cSld>
+  <p:clrMapOvr>
+    <a:masterClrMapping/>
+  </p:clrMapOvr>
+</p:sld>
+</file>
+
+<file path=ppt/slides/slide5.xml><?xml version="1.0" encoding="utf-8"?>
+<p:sld xmlns:a="http://schemas.openxmlformats.org/drawingml/2006/main" xmlns:p="http://schemas.openxmlformats.org/presentationml/2006/main" xmlns:r="http://schemas.openxmlformats.org/officeDocument/2006/relationships">
+  <p:cSld>
+    <p:spTree>
+      <p:nvGrpSpPr>
+        <p:cNvPr id="1" name=""/>
+        <p:cNvGrpSpPr/>
+        <p:nvPr/>
+      </p:nvGrpSpPr>
+      <p:grpSpPr/>
+      <p:sp>
+        <p:nvSpPr>
+          <p:cNvPr id="2" name="Title 1"/>
+          <p:cNvSpPr>
+            <a:spLocks noGrp="1"/>
+          </p:cNvSpPr>
+          <p:nvPr>
+            <p:ph type="title"/>
+          </p:nvPr>
+        </p:nvSpPr>
+        <p:spPr>
+          <a:xfrm>
+            <a:off x="548640" y="786384"/>
+            <a:ext cx="8046720" cy="502920"/>
+          </a:xfrm>
+        </p:spPr>
+        <p:txBody>
+          <a:bodyPr wrap="square" lIns="0" rIns="0" tIns="0" bIns="0">
+            <a:noAutofit/>
+          </a:bodyPr>
+          <a:lstStyle/>
+          <a:p>
+            <a:pPr algn="l">
+              <a:lnSpc>
+                <a:spcPct val="110000"/>
+              </a:lnSpc>
+              <a:buNone/>
+              <a:defRPr sz="2800" b="0">
+                <a:solidFill>
+                  <a:srgbClr val="303437"/>
+                </a:solidFill>
+                <a:latin typeface="Noto Sans"/>
+              </a:defRPr>
+            </a:pPr>
+            <a:r>
+              <a:rPr sz="2800" b="1" lang="ja-JP" altLang="en-US">
+                <a:solidFill>
+                  <a:srgbClr val="303437"/>
+                </a:solidFill>
+                <a:latin typeface="Noto Sans"/>
+                <a:ea typeface="Noto Sans CJK JP"/>
+                <a:cs typeface="Noto Sans"/>
+              </a:rPr>
+              <a:t>仕事に必要なツールを選び、結果をつなぐ</a:t>
+            </a:r>
+          </a:p>
+        </p:txBody>
+      </p:sp>
+      <p:sp>
+        <p:nvSpPr>
+          <p:cNvPr id="3" name="Text Placeholder 2"/>
+          <p:cNvSpPr>
+            <a:spLocks noGrp="1"/>
+          </p:cNvSpPr>
+          <p:nvPr>
+            <p:ph type="body" idx="1"/>
+          </p:nvPr>
+        </p:nvSpPr>
+        <p:spPr>
+          <a:xfrm>
+            <a:off x="594360" y="1463040"/>
+            <a:ext cx="7955279" cy="3090672"/>
+          </a:xfrm>
+        </p:spPr>
+        <p:txBody>
+          <a:bodyPr wrap="square" tIns="91440" bIns="91440">
+            <a:noAutofit/>
+          </a:bodyPr>
+          <a:lstStyle/>
+          <a:p>
+            <a:pPr marL="457200" indent="-355600">
+              <a:lnSpc>
+                <a:spcPts val="2460"/>
+              </a:lnSpc>
+              <a:spcAft>
+                <a:spcPts val="800"/>
+              </a:spcAft>
+              <a:buSzPct val="64878"/>
+              <a:buFont typeface="Noto Sans CJK JP"/>
+              <a:buChar char="●"/>
+              <a:defRPr sz="2050" b="0">
+                <a:solidFill>
+                  <a:srgbClr val="303437"/>
+                </a:solidFill>
+                <a:latin typeface="Noto Sans"/>
+              </a:defRPr>
+            </a:pPr>
+            <a:r>
+              <a:rPr sz="2050" b="0" lang="ja-JP" altLang="en-US">
+                <a:solidFill>
+                  <a:srgbClr val="303437"/>
+                </a:solidFill>
+                <a:latin typeface="Noto Sans"/>
+                <a:ea typeface="Noto Sans CJK JP"/>
+                <a:cs typeface="Noto Sans"/>
+              </a:rPr>
+              <a:t>MCP Atlasは、自然言語で頼まれた仕事を、外部ツールを使って完了できるかを評価する。</a:t>
+            </a:r>
+          </a:p>
+          <a:p>
+            <a:pPr marL="457200" indent="-355600">
+              <a:lnSpc>
+                <a:spcPts val="2460"/>
+              </a:lnSpc>
+              <a:spcAft>
+                <a:spcPts val="800"/>
+              </a:spcAft>
+              <a:buSzPct val="64878"/>
+              <a:buFont typeface="Noto Sans CJK JP"/>
+              <a:buChar char="●"/>
+              <a:defRPr sz="2050" b="0">
+                <a:solidFill>
+                  <a:srgbClr val="303437"/>
+                </a:solidFill>
+                <a:latin typeface="Noto Sans"/>
+              </a:defRPr>
+            </a:pPr>
+            <a:r>
+              <a:rPr sz="2050" b="0" lang="ja-JP" altLang="en-US">
+                <a:solidFill>
+                  <a:srgbClr val="303437"/>
+                </a:solidFill>
+                <a:latin typeface="Noto Sans"/>
+                <a:ea typeface="Noto Sans CJK JP"/>
+                <a:cs typeface="Noto Sans"/>
+              </a:rPr>
+              <a:t>MCP（Model Context Protocol）は、モデルが外部のデータや機能へアクセスするための共通の接続方式。サーバーは検索・ファイル・データベースなどのツールを提供する。</a:t>
+            </a:r>
+          </a:p>
+          <a:p>
+            <a:pPr marL="457200" indent="-355600">
+              <a:lnSpc>
+                <a:spcPts val="2460"/>
+              </a:lnSpc>
+              <a:spcAft>
+                <a:spcPts val="0"/>
+              </a:spcAft>
+              <a:buSzPct val="64878"/>
+              <a:buFont typeface="Noto Sans CJK JP"/>
+              <a:buChar char="●"/>
+              <a:defRPr sz="2050" b="0">
+                <a:solidFill>
+                  <a:srgbClr val="303437"/>
+                </a:solidFill>
+                <a:latin typeface="Noto Sans"/>
+              </a:defRPr>
+            </a:pPr>
+            <a:r>
+              <a:rPr sz="2050" b="0" lang="ja-JP" altLang="en-US">
+                <a:solidFill>
+                  <a:srgbClr val="303437"/>
+                </a:solidFill>
+                <a:latin typeface="Noto Sans"/>
+                <a:ea typeface="Noto Sans CJK JP"/>
+                <a:cs typeface="Noto Sans"/>
+              </a:rPr>
+              <a:t>全1,000課題は36サーバー・220ツールにまたがる。問題文を読み、関連するツールを選んで呼び出し、回答をまとめる。</a:t>
+            </a:r>
+          </a:p>
+        </p:txBody>
+      </p:sp>
+      <p:sp>
+        <p:nvSpPr>
+          <p:cNvPr id="4" name="Title 3"/>
+          <p:cNvSpPr>
+            <a:spLocks noGrp="1"/>
+          </p:cNvSpPr>
+          <p:nvPr>
+            <p:ph type="title" idx="2"/>
+          </p:nvPr>
+        </p:nvSpPr>
+        <p:spPr>
+          <a:xfrm>
+            <a:off x="75895" y="0"/>
+            <a:ext cx="8115300" cy="480060"/>
+          </a:xfrm>
+        </p:spPr>
+        <p:txBody>
+          <a:bodyPr wrap="square" lIns="0" rIns="0" tIns="0" bIns="0" anchor="ctr">
+            <a:noAutofit/>
+          </a:bodyPr>
+          <a:lstStyle/>
+          <a:p>
+            <a:pPr algn="l">
+              <a:lnSpc>
+                <a:spcPct val="110000"/>
+              </a:lnSpc>
+              <a:buNone/>
+              <a:defRPr sz="1400" b="0">
+                <a:solidFill>
+                  <a:srgbClr val="303437"/>
+                </a:solidFill>
+                <a:latin typeface="Noto Sans"/>
+              </a:defRPr>
+            </a:pPr>
+            <a:r>
+              <a:rPr sz="1400" b="1" lang="ja-JP" altLang="en-US">
+                <a:solidFill>
+                  <a:srgbClr val="FFFFFF"/>
+                </a:solidFill>
+                <a:latin typeface="Noto Sans"/>
+                <a:ea typeface="Noto Sans CJK JP"/>
+                <a:cs typeface="Noto Sans"/>
+              </a:rPr>
+              <a:t>1. 複数ツールを使う仕事と実例</a:t>
+            </a:r>
+          </a:p>
+        </p:txBody>
+      </p:sp>
+      <p:sp>
+        <p:nvSpPr>
+          <p:cNvPr id="5" name="TextBox 4"/>
+          <p:cNvSpPr txBox="1"/>
+          <p:nvPr/>
+        </p:nvSpPr>
+        <p:spPr>
+          <a:xfrm>
+            <a:off x="502920" y="4690872"/>
+            <a:ext cx="8183879" cy="393192"/>
+          </a:xfrm>
+          <a:prstGeom prst="rect">
+            <a:avLst/>
+          </a:prstGeom>
+          <a:noFill/>
+        </p:spPr>
+        <p:txBody>
+          <a:bodyPr wrap="square" lIns="0" rIns="0" tIns="0" bIns="0">
+            <a:noAutofit/>
+          </a:bodyPr>
+          <a:lstStyle/>
+          <a:p>
+            <a:pPr algn="l">
+              <a:lnSpc>
+                <a:spcPct val="112000"/>
+              </a:lnSpc>
+              <a:spcBef>
+                <a:spcPts val="0"/>
+              </a:spcBef>
+              <a:spcAft>
+                <a:spcPts val="0"/>
+              </a:spcAft>
+              <a:buNone/>
+              <a:defRPr sz="810" b="0">
+                <a:solidFill>
+                  <a:srgbClr val="303437"/>
+                </a:solidFill>
+                <a:latin typeface="Noto Sans"/>
+              </a:defRPr>
+            </a:pPr>
+            <a:r>
+              <a:rPr sz="810" b="0" lang="ja-JP" altLang="en-US">
+                <a:solidFill>
+                  <a:srgbClr val="626669"/>
+                </a:solidFill>
+                <a:latin typeface="Noto Sans"/>
+                <a:ea typeface="Noto Sans CJK JP"/>
+                <a:cs typeface="Noto Sans"/>
+              </a:rPr>
+              <a:t/>
+            </a:r>
+            <a:r>
+              <a:rPr sz="810" b="0" lang="ja-JP" altLang="en-US">
+                <a:solidFill>
+                  <a:srgbClr val="626669"/>
+                </a:solidFill>
+                <a:latin typeface="Noto Sans"/>
+                <a:ea typeface="Noto Sans CJK JP"/>
+                <a:cs typeface="Noto Sans"/>
+              </a:rPr>
+              <a:t>Bandi, Dumitru et al. (2026). MCP-Atlas: A Large-Scale Benchmark for Tool-Use Competency with Real MCP Servers. 論文v3。</a:t>
+            </a:r>
+            <a:r>
+              <a:rPr sz="810" b="0" lang="ja-JP" altLang="en-US">
+                <a:solidFill>
+                  <a:srgbClr val="626669"/>
+                </a:solidFill>
+                <a:latin typeface="Noto Sans"/>
+                <a:ea typeface="Noto Sans CJK JP"/>
+                <a:cs typeface="Noto Sans"/>
+              </a:rPr>
+              <a:t>  </a:t>
+            </a:r>
+            <a:r>
+              <a:rPr sz="810" b="0" lang="ja-JP" altLang="en-US">
+                <a:solidFill>
+                  <a:srgbClr val="626669"/>
+                </a:solidFill>
+                <a:latin typeface="Noto Sans"/>
+                <a:ea typeface="Noto Sans CJK JP"/>
+                <a:cs typeface="Noto Sans"/>
+                <a:hlinkClick r:id="rId2"/>
+              </a:rPr>
+              <a:t>https://arxiv.org/abs/2602.00933v3</a:t>
+            </a:r>
+          </a:p>
+        </p:txBody>
+      </p:sp>
+    </p:spTree>
+  </p:cSld>
+  <p:clrMapOvr>
+    <a:masterClrMapping/>
+  </p:clrMapOvr>
+</p:sld>
+</file>
+
+<file path=ppt/slides/slide50.xml><?xml version="1.0" encoding="utf-8"?>
+<p:sld xmlns:a="http://schemas.openxmlformats.org/drawingml/2006/main" xmlns:p="http://schemas.openxmlformats.org/presentationml/2006/main" xmlns:r="http://schemas.openxmlformats.org/officeDocument/2006/relationships">
+  <p:cSld>
+    <p:spTree>
+      <p:nvGrpSpPr>
+        <p:cNvPr id="1" name=""/>
+        <p:cNvGrpSpPr/>
+        <p:nvPr/>
+      </p:nvGrpSpPr>
+      <p:grpSpPr/>
+      <p:sp>
+        <p:nvSpPr>
+          <p:cNvPr id="2" name="Title 1"/>
+          <p:cNvSpPr>
+            <a:spLocks noGrp="1"/>
+          </p:cNvSpPr>
+          <p:nvPr>
+            <p:ph type="title"/>
+          </p:nvPr>
+        </p:nvSpPr>
+        <p:spPr>
+          <a:xfrm>
+            <a:off x="548640" y="786384"/>
+            <a:ext cx="8046720" cy="502920"/>
+          </a:xfrm>
+        </p:spPr>
+        <p:txBody>
+          <a:bodyPr wrap="square" lIns="0" rIns="0" tIns="0" bIns="0">
+            <a:noAutofit/>
+          </a:bodyPr>
+          <a:lstStyle/>
+          <a:p>
+            <a:pPr algn="l">
+              <a:lnSpc>
+                <a:spcPct val="110000"/>
+              </a:lnSpc>
+              <a:buNone/>
+              <a:defRPr sz="2800" b="0">
+                <a:solidFill>
+                  <a:srgbClr val="303437"/>
+                </a:solidFill>
+                <a:latin typeface="Noto Sans"/>
+              </a:defRPr>
+            </a:pPr>
+            <a:r>
+              <a:rPr sz="2800" b="1" lang="ja-JP" altLang="en-US">
+                <a:solidFill>
+                  <a:srgbClr val="303437"/>
+                </a:solidFill>
+                <a:latin typeface="Noto Sans"/>
+                <a:ea typeface="Noto Sans CJK JP"/>
+                <a:cs typeface="Noto Sans"/>
+              </a:rPr>
+              <a:t>追加例8：美術品から工房の歴史をたどる</a:t>
+            </a:r>
+          </a:p>
+        </p:txBody>
+      </p:sp>
+      <p:sp>
+        <p:nvSpPr>
+          <p:cNvPr id="3" name="Title 2"/>
+          <p:cNvSpPr>
+            <a:spLocks noGrp="1"/>
+          </p:cNvSpPr>
+          <p:nvPr>
+            <p:ph type="title" idx="2"/>
+          </p:nvPr>
+        </p:nvSpPr>
+        <p:spPr>
+          <a:xfrm>
+            <a:off x="75895" y="0"/>
+            <a:ext cx="8115300" cy="480060"/>
+          </a:xfrm>
+        </p:spPr>
+        <p:txBody>
+          <a:bodyPr wrap="square" lIns="0" rIns="0" tIns="0" bIns="0" anchor="ctr">
+            <a:noAutofit/>
+          </a:bodyPr>
+          <a:lstStyle/>
+          <a:p>
+            <a:pPr algn="l">
+              <a:lnSpc>
+                <a:spcPct val="110000"/>
+              </a:lnSpc>
+              <a:buNone/>
+              <a:defRPr sz="1400" b="0">
+                <a:solidFill>
+                  <a:srgbClr val="303437"/>
+                </a:solidFill>
+                <a:latin typeface="Noto Sans"/>
+              </a:defRPr>
+            </a:pPr>
+            <a:r>
+              <a:rPr sz="1400" b="1" lang="ja-JP" altLang="en-US">
+                <a:solidFill>
+                  <a:srgbClr val="FFFFFF"/>
+                </a:solidFill>
+                <a:latin typeface="Noto Sans"/>
+                <a:ea typeface="Noto Sans CJK JP"/>
+                <a:cs typeface="Noto Sans"/>
+              </a:rPr>
+              <a:t>Appendix: 1. 追加の課題と分布</a:t>
+            </a:r>
+          </a:p>
+        </p:txBody>
+      </p:sp>
+      <p:sp>
+        <p:nvSpPr>
+          <p:cNvPr id="4" name="TextBox 3"/>
+          <p:cNvSpPr txBox="1"/>
+          <p:nvPr/>
+        </p:nvSpPr>
+        <p:spPr>
+          <a:xfrm>
+            <a:off x="594360" y="1389888"/>
+            <a:ext cx="7955279" cy="228600"/>
+          </a:xfrm>
+          <a:prstGeom prst="rect">
+            <a:avLst/>
+          </a:prstGeom>
+          <a:noFill/>
+        </p:spPr>
+        <p:txBody>
+          <a:bodyPr wrap="square" lIns="0" rIns="0" tIns="0" bIns="0">
+            <a:noAutofit/>
+          </a:bodyPr>
+          <a:lstStyle/>
+          <a:p>
+            <a:pPr algn="l">
+              <a:lnSpc>
+                <a:spcPct val="117000"/>
+              </a:lnSpc>
+              <a:spcBef>
+                <a:spcPts val="0"/>
+              </a:spcBef>
+              <a:spcAft>
+                <a:spcPts val="0"/>
+              </a:spcAft>
+              <a:buNone/>
+              <a:defRPr sz="1200" b="0">
+                <a:solidFill>
+                  <a:srgbClr val="303437"/>
+                </a:solidFill>
+                <a:latin typeface="Noto Sans"/>
+              </a:defRPr>
+            </a:pPr>
+            <a:r>
+              <a:rPr sz="1200" b="0" lang="ja-JP" altLang="en-US">
+                <a:solidFill>
+                  <a:srgbClr val="626669"/>
+                </a:solidFill>
+                <a:latin typeface="Noto Sans"/>
+                <a:ea typeface="Noto Sans CJK JP"/>
+                <a:cs typeface="Noto Sans"/>
+              </a:rPr>
+              <a:t>公開課題（原文）</a:t>
+            </a:r>
+          </a:p>
+        </p:txBody>
+      </p:sp>
+      <p:sp>
+        <p:nvSpPr>
+          <p:cNvPr id="5" name="TextBox 4"/>
+          <p:cNvSpPr txBox="1"/>
+          <p:nvPr/>
+        </p:nvSpPr>
+        <p:spPr>
+          <a:xfrm>
+            <a:off x="594360" y="1737360"/>
+            <a:ext cx="7955279" cy="1691640"/>
+          </a:xfrm>
+          <a:prstGeom prst="rect">
+            <a:avLst/>
+          </a:prstGeom>
+          <a:noFill/>
+        </p:spPr>
+        <p:txBody>
+          <a:bodyPr wrap="square" lIns="0" rIns="0" tIns="0" bIns="0">
+            <a:noAutofit/>
+          </a:bodyPr>
+          <a:lstStyle/>
+          <a:p>
+            <a:pPr algn="l">
+              <a:lnSpc>
+                <a:spcPct val="120000"/>
+              </a:lnSpc>
+              <a:spcBef>
+                <a:spcPts val="0"/>
+              </a:spcBef>
+              <a:spcAft>
+                <a:spcPts val="0"/>
+              </a:spcAft>
+              <a:buNone/>
+              <a:defRPr sz="1800" b="0">
+                <a:solidFill>
+                  <a:srgbClr val="303437"/>
+                </a:solidFill>
+                <a:latin typeface="Noto Sans"/>
+              </a:defRPr>
+            </a:pPr>
+            <a:r>
+              <a:rPr sz="1800" b="0" lang="ja-JP" altLang="en-US">
+                <a:solidFill>
+                  <a:srgbClr val="303437"/>
+                </a:solidFill>
+                <a:latin typeface="Noto Sans"/>
+                <a:ea typeface="Noto Sans CJK JP"/>
+                <a:cs typeface="Noto Sans"/>
+              </a:rPr>
+              <a:t>I am preparing a historical report on objects, and I need to know: In what year did the workshop where the tyg object was created begin producing ceramics? I also want to know the name of the workshop.</a:t>
+            </a:r>
+          </a:p>
+        </p:txBody>
+      </p:sp>
+      <p:sp>
+        <p:nvSpPr>
+          <p:cNvPr id="6" name="TextBox 5"/>
+          <p:cNvSpPr txBox="1"/>
+          <p:nvPr/>
+        </p:nvSpPr>
+        <p:spPr>
+          <a:xfrm>
+            <a:off x="594360" y="3712463"/>
+            <a:ext cx="7955279" cy="777240"/>
+          </a:xfrm>
+          <a:prstGeom prst="rect">
+            <a:avLst/>
+          </a:prstGeom>
+          <a:noFill/>
+        </p:spPr>
+        <p:txBody>
+          <a:bodyPr wrap="square" lIns="0" rIns="0" tIns="0" bIns="0">
+            <a:noAutofit/>
+          </a:bodyPr>
+          <a:lstStyle/>
+          <a:p>
+            <a:pPr algn="l">
+              <a:lnSpc>
+                <a:spcPct val="120000"/>
+              </a:lnSpc>
+              <a:spcBef>
+                <a:spcPts val="0"/>
+              </a:spcBef>
+              <a:spcAft>
+                <a:spcPts val="0"/>
+              </a:spcAft>
+              <a:buNone/>
+              <a:defRPr sz="2000" b="0">
+                <a:solidFill>
+                  <a:srgbClr val="303437"/>
+                </a:solidFill>
+                <a:latin typeface="Noto Sans"/>
+              </a:defRPr>
+            </a:pPr>
+            <a:r>
+              <a:rPr sz="2000" b="0" lang="ja-JP" altLang="en-US">
+                <a:solidFill>
+                  <a:srgbClr val="303437"/>
+                </a:solidFill>
+                <a:latin typeface="Noto Sans"/>
+                <a:ea typeface="Noto Sans CJK JP"/>
+                <a:cs typeface="Noto Sans"/>
+              </a:rPr>
+              <a:t>Tygという器の制作工房を美術館の所蔵品情報で調べ、その工房が陶器を作り始めた年を探す。</a:t>
+            </a:r>
+          </a:p>
+        </p:txBody>
+      </p:sp>
+      <p:sp>
+        <p:nvSpPr>
+          <p:cNvPr id="7" name="TextBox 6"/>
+          <p:cNvSpPr txBox="1"/>
+          <p:nvPr/>
+        </p:nvSpPr>
+        <p:spPr>
+          <a:xfrm>
+            <a:off x="502920" y="4690872"/>
+            <a:ext cx="8183879" cy="393192"/>
+          </a:xfrm>
+          <a:prstGeom prst="rect">
+            <a:avLst/>
+          </a:prstGeom>
+          <a:noFill/>
+        </p:spPr>
+        <p:txBody>
+          <a:bodyPr wrap="square" lIns="0" rIns="0" tIns="0" bIns="0">
+            <a:noAutofit/>
+          </a:bodyPr>
+          <a:lstStyle/>
+          <a:p>
+            <a:pPr algn="l">
+              <a:lnSpc>
+                <a:spcPct val="112000"/>
+              </a:lnSpc>
+              <a:spcBef>
+                <a:spcPts val="0"/>
+              </a:spcBef>
+              <a:spcAft>
+                <a:spcPts val="0"/>
+              </a:spcAft>
+              <a:buNone/>
+              <a:defRPr sz="810" b="0">
+                <a:solidFill>
+                  <a:srgbClr val="303437"/>
+                </a:solidFill>
+                <a:latin typeface="Noto Sans"/>
+              </a:defRPr>
+            </a:pPr>
+            <a:r>
+              <a:rPr sz="810" b="0" lang="ja-JP" altLang="en-US">
+                <a:solidFill>
+                  <a:srgbClr val="626669"/>
+                </a:solidFill>
+                <a:latin typeface="Noto Sans"/>
+                <a:ea typeface="Noto Sans CJK JP"/>
+                <a:cs typeface="Noto Sans"/>
+              </a:rPr>
+              <a:t/>
+            </a:r>
+            <a:r>
+              <a:rPr sz="810" b="0" lang="ja-JP" altLang="en-US">
+                <a:solidFill>
+                  <a:srgbClr val="626669"/>
+                </a:solidFill>
+                <a:latin typeface="Noto Sans"/>
+                <a:ea typeface="Noto Sans CJK JP"/>
+                <a:cs typeface="Noto Sans"/>
+              </a:rPr>
+              <a:t>Scale AI. MCP-Atlas / 公開train。課題6896416f7b30e5d8ccd7c8c2。CC BY 4.0。</a:t>
+            </a:r>
+            <a:r>
+              <a:rPr sz="810" b="0" lang="ja-JP" altLang="en-US">
+                <a:solidFill>
+                  <a:srgbClr val="626669"/>
+                </a:solidFill>
+                <a:latin typeface="Noto Sans"/>
+                <a:ea typeface="Noto Sans CJK JP"/>
+                <a:cs typeface="Noto Sans"/>
+              </a:rPr>
+              <a:t>  </a:t>
+            </a:r>
+            <a:r>
+              <a:rPr sz="810" b="0" lang="ja-JP" altLang="en-US">
+                <a:solidFill>
+                  <a:srgbClr val="626669"/>
+                </a:solidFill>
+                <a:latin typeface="Noto Sans"/>
+                <a:ea typeface="Noto Sans CJK JP"/>
+                <a:cs typeface="Noto Sans"/>
+                <a:hlinkClick r:id="rId2"/>
+              </a:rPr>
+              <a:t>https://huggingface.co/datasets/ScaleAI/MCP-Atlas/viewer/default/train?row=67</a:t>
+            </a:r>
+          </a:p>
+        </p:txBody>
+      </p:sp>
+    </p:spTree>
+  </p:cSld>
+  <p:clrMapOvr>
+    <a:masterClrMapping/>
+  </p:clrMapOvr>
+</p:sld>
+</file>
+
+<file path=ppt/slides/slide51.xml><?xml version="1.0" encoding="utf-8"?>
+<p:sld xmlns:a="http://schemas.openxmlformats.org/drawingml/2006/main" xmlns:p="http://schemas.openxmlformats.org/presentationml/2006/main" xmlns:r="http://schemas.openxmlformats.org/officeDocument/2006/relationships">
+  <p:cSld>
+    <p:spTree>
+      <p:nvGrpSpPr>
+        <p:cNvPr id="1" name=""/>
+        <p:cNvGrpSpPr/>
+        <p:nvPr/>
+      </p:nvGrpSpPr>
+      <p:grpSpPr/>
+      <p:sp>
+        <p:nvSpPr>
+          <p:cNvPr id="2" name="Title 1"/>
+          <p:cNvSpPr>
+            <a:spLocks noGrp="1"/>
+          </p:cNvSpPr>
+          <p:nvPr>
+            <p:ph type="title"/>
+          </p:nvPr>
+        </p:nvSpPr>
+        <p:spPr>
+          <a:xfrm>
+            <a:off x="548640" y="786384"/>
+            <a:ext cx="8046720" cy="502920"/>
+          </a:xfrm>
+        </p:spPr>
+        <p:txBody>
+          <a:bodyPr wrap="square" lIns="0" rIns="0" tIns="0" bIns="0">
+            <a:noAutofit/>
+          </a:bodyPr>
+          <a:lstStyle/>
+          <a:p>
+            <a:pPr algn="l">
+              <a:lnSpc>
+                <a:spcPct val="110000"/>
+              </a:lnSpc>
+              <a:buNone/>
+              <a:defRPr sz="2800" b="0">
+                <a:solidFill>
+                  <a:srgbClr val="303437"/>
+                </a:solidFill>
+                <a:latin typeface="Noto Sans"/>
+              </a:defRPr>
+            </a:pPr>
+            <a:r>
+              <a:rPr sz="2800" b="1" lang="ja-JP" altLang="en-US">
+                <a:solidFill>
+                  <a:srgbClr val="303437"/>
+                </a:solidFill>
+                <a:latin typeface="Noto Sans"/>
+                <a:ea typeface="Noto Sans CJK JP"/>
+                <a:cs typeface="Noto Sans"/>
+              </a:rPr>
+              <a:t>作品の制作者を、歴史情報の検索キーにする</a:t>
+            </a:r>
+          </a:p>
+        </p:txBody>
+      </p:sp>
+      <p:sp>
+        <p:nvSpPr>
+          <p:cNvPr id="3" name="Text Placeholder 2"/>
+          <p:cNvSpPr>
+            <a:spLocks noGrp="1"/>
+          </p:cNvSpPr>
+          <p:nvPr>
+            <p:ph type="body" idx="1"/>
+          </p:nvPr>
+        </p:nvSpPr>
+        <p:spPr>
+          <a:xfrm>
+            <a:off x="594360" y="1463040"/>
+            <a:ext cx="7955279" cy="3090672"/>
+          </a:xfrm>
+        </p:spPr>
+        <p:txBody>
+          <a:bodyPr wrap="square" tIns="91440" bIns="91440">
+            <a:noAutofit/>
+          </a:bodyPr>
+          <a:lstStyle/>
+          <a:p>
+            <a:pPr marL="457200" indent="-355600">
+              <a:lnSpc>
+                <a:spcPts val="2760"/>
+              </a:lnSpc>
+              <a:spcAft>
+                <a:spcPts val="800"/>
+              </a:spcAft>
+              <a:buSzPct val="57826"/>
+              <a:buFont typeface="Noto Sans CJK JP"/>
+              <a:buChar char="●"/>
+              <a:defRPr sz="2300" b="0">
+                <a:solidFill>
+                  <a:srgbClr val="303437"/>
+                </a:solidFill>
+                <a:latin typeface="Noto Sans"/>
+              </a:defRPr>
+            </a:pPr>
+            <a:r>
+              <a:rPr sz="2300" b="0" lang="ja-JP" altLang="en-US">
+                <a:solidFill>
+                  <a:srgbClr val="303437"/>
+                </a:solidFill>
+                <a:latin typeface="Noto Sans"/>
+                <a:ea typeface="Noto Sans CJK JP"/>
+                <a:cs typeface="Noto Sans"/>
+              </a:rPr>
+              <a:t>Tygを制作した工房はNewcomb Pottery。陶器の生産を開始した年は1895年。</a:t>
+            </a:r>
+          </a:p>
+          <a:p>
+            <a:pPr marL="457200" indent="-355600">
+              <a:lnSpc>
+                <a:spcPts val="2760"/>
+              </a:lnSpc>
+              <a:spcAft>
+                <a:spcPts val="0"/>
+              </a:spcAft>
+              <a:buSzPct val="57826"/>
+              <a:buFont typeface="Noto Sans CJK JP"/>
+              <a:buChar char="●"/>
+              <a:defRPr sz="2300" b="0">
+                <a:solidFill>
+                  <a:srgbClr val="303437"/>
+                </a:solidFill>
+                <a:latin typeface="Noto Sans"/>
+              </a:defRPr>
+            </a:pPr>
+            <a:r>
+              <a:rPr sz="2300" b="0" lang="ja-JP" altLang="en-US">
+                <a:solidFill>
+                  <a:srgbClr val="303437"/>
+                </a:solidFill>
+                <a:latin typeface="Noto Sans"/>
+                <a:ea typeface="Noto Sans CJK JP"/>
+                <a:cs typeface="Noto Sans"/>
+              </a:rPr>
+              <a:t>参照履歴は、Metの所蔵品検索で作品を見つけて詳細を読み、DuckDuckGoで工房の歴史を検索する。</a:t>
+            </a:r>
+          </a:p>
+        </p:txBody>
+      </p:sp>
+      <p:sp>
+        <p:nvSpPr>
+          <p:cNvPr id="4" name="Title 3"/>
+          <p:cNvSpPr>
+            <a:spLocks noGrp="1"/>
+          </p:cNvSpPr>
+          <p:nvPr>
+            <p:ph type="title" idx="2"/>
+          </p:nvPr>
+        </p:nvSpPr>
+        <p:spPr>
+          <a:xfrm>
+            <a:off x="75895" y="0"/>
+            <a:ext cx="8115300" cy="480060"/>
+          </a:xfrm>
+        </p:spPr>
+        <p:txBody>
+          <a:bodyPr wrap="square" lIns="0" rIns="0" tIns="0" bIns="0" anchor="ctr">
+            <a:noAutofit/>
+          </a:bodyPr>
+          <a:lstStyle/>
+          <a:p>
+            <a:pPr algn="l">
+              <a:lnSpc>
+                <a:spcPct val="110000"/>
+              </a:lnSpc>
+              <a:buNone/>
+              <a:defRPr sz="1400" b="0">
+                <a:solidFill>
+                  <a:srgbClr val="303437"/>
+                </a:solidFill>
+                <a:latin typeface="Noto Sans"/>
+              </a:defRPr>
+            </a:pPr>
+            <a:r>
+              <a:rPr sz="1400" b="1" lang="ja-JP" altLang="en-US">
+                <a:solidFill>
+                  <a:srgbClr val="FFFFFF"/>
+                </a:solidFill>
+                <a:latin typeface="Noto Sans"/>
+                <a:ea typeface="Noto Sans CJK JP"/>
+                <a:cs typeface="Noto Sans"/>
+              </a:rPr>
+              <a:t>Appendix: 1. 追加の課題と分布</a:t>
+            </a:r>
+          </a:p>
+        </p:txBody>
+      </p:sp>
+      <p:sp>
+        <p:nvSpPr>
+          <p:cNvPr id="5" name="TextBox 4"/>
+          <p:cNvSpPr txBox="1"/>
+          <p:nvPr/>
+        </p:nvSpPr>
+        <p:spPr>
+          <a:xfrm>
+            <a:off x="502920" y="4690872"/>
+            <a:ext cx="8183879" cy="393192"/>
+          </a:xfrm>
+          <a:prstGeom prst="rect">
+            <a:avLst/>
+          </a:prstGeom>
+          <a:noFill/>
+        </p:spPr>
+        <p:txBody>
+          <a:bodyPr wrap="square" lIns="0" rIns="0" tIns="0" bIns="0">
+            <a:noAutofit/>
+          </a:bodyPr>
+          <a:lstStyle/>
+          <a:p>
+            <a:pPr algn="l">
+              <a:lnSpc>
+                <a:spcPct val="112000"/>
+              </a:lnSpc>
+              <a:spcBef>
+                <a:spcPts val="0"/>
+              </a:spcBef>
+              <a:spcAft>
+                <a:spcPts val="0"/>
+              </a:spcAft>
+              <a:buNone/>
+              <a:defRPr sz="810" b="0">
+                <a:solidFill>
+                  <a:srgbClr val="303437"/>
+                </a:solidFill>
+                <a:latin typeface="Noto Sans"/>
+              </a:defRPr>
+            </a:pPr>
+            <a:r>
+              <a:rPr sz="810" b="0" lang="ja-JP" altLang="en-US">
+                <a:solidFill>
+                  <a:srgbClr val="626669"/>
+                </a:solidFill>
+                <a:latin typeface="Noto Sans"/>
+                <a:ea typeface="Noto Sans CJK JP"/>
+                <a:cs typeface="Noto Sans"/>
+              </a:rPr>
+              <a:t/>
+            </a:r>
+            <a:r>
+              <a:rPr sz="810" b="0" lang="ja-JP" altLang="en-US">
+                <a:solidFill>
+                  <a:srgbClr val="626669"/>
+                </a:solidFill>
+                <a:latin typeface="Noto Sans"/>
+                <a:ea typeface="Noto Sans CJK JP"/>
+                <a:cs typeface="Noto Sans"/>
+              </a:rPr>
+              <a:t>Scale AI. MCP-Atlas / 公開train。課題6896416f7b30e5d8ccd7c8c2。CC BY 4.0。</a:t>
+            </a:r>
+            <a:r>
+              <a:rPr sz="810" b="0" lang="ja-JP" altLang="en-US">
+                <a:solidFill>
+                  <a:srgbClr val="626669"/>
+                </a:solidFill>
+                <a:latin typeface="Noto Sans"/>
+                <a:ea typeface="Noto Sans CJK JP"/>
+                <a:cs typeface="Noto Sans"/>
+              </a:rPr>
+              <a:t>  </a:t>
+            </a:r>
+            <a:r>
+              <a:rPr sz="810" b="0" lang="ja-JP" altLang="en-US">
+                <a:solidFill>
+                  <a:srgbClr val="626669"/>
+                </a:solidFill>
+                <a:latin typeface="Noto Sans"/>
+                <a:ea typeface="Noto Sans CJK JP"/>
+                <a:cs typeface="Noto Sans"/>
+                <a:hlinkClick r:id="rId2"/>
+              </a:rPr>
+              <a:t>https://huggingface.co/datasets/ScaleAI/MCP-Atlas/viewer/default/train?row=67</a:t>
+            </a:r>
+          </a:p>
+        </p:txBody>
+      </p:sp>
+    </p:spTree>
+  </p:cSld>
+  <p:clrMapOvr>
+    <a:masterClrMapping/>
+  </p:clrMapOvr>
+</p:sld>
+</file>
+
+<file path=ppt/slides/slide52.xml><?xml version="1.0" encoding="utf-8"?>
+<p:sld xmlns:a="http://schemas.openxmlformats.org/drawingml/2006/main" xmlns:p="http://schemas.openxmlformats.org/presentationml/2006/main" xmlns:r="http://schemas.openxmlformats.org/officeDocument/2006/relationships">
+  <p:cSld>
+    <p:spTree>
+      <p:nvGrpSpPr>
+        <p:cNvPr id="1" name=""/>
+        <p:cNvGrpSpPr/>
+        <p:nvPr/>
+      </p:nvGrpSpPr>
+      <p:grpSpPr/>
+      <p:sp>
+        <p:nvSpPr>
+          <p:cNvPr id="2" name="Title 1"/>
+          <p:cNvSpPr>
+            <a:spLocks noGrp="1"/>
+          </p:cNvSpPr>
+          <p:nvPr>
+            <p:ph type="title"/>
+          </p:nvPr>
+        </p:nvSpPr>
+        <p:spPr>
+          <a:xfrm>
+            <a:off x="548640" y="786384"/>
+            <a:ext cx="8046720" cy="502920"/>
+          </a:xfrm>
+        </p:spPr>
+        <p:txBody>
+          <a:bodyPr wrap="square" lIns="0" rIns="0" tIns="0" bIns="0">
+            <a:noAutofit/>
+          </a:bodyPr>
+          <a:lstStyle/>
+          <a:p>
+            <a:pPr algn="l">
+              <a:lnSpc>
+                <a:spcPct val="110000"/>
+              </a:lnSpc>
+              <a:buNone/>
+              <a:defRPr sz="2800" b="0">
+                <a:solidFill>
+                  <a:srgbClr val="303437"/>
+                </a:solidFill>
+                <a:latin typeface="Noto Sans"/>
+              </a:defRPr>
+            </a:pPr>
+            <a:r>
+              <a:rPr sz="2800" b="1" lang="ja-JP" altLang="en-US">
+                <a:solidFill>
+                  <a:srgbClr val="303437"/>
+                </a:solidFill>
+                <a:latin typeface="Noto Sans"/>
+                <a:ea typeface="Noto Sans CJK JP"/>
+                <a:cs typeface="Noto Sans"/>
+              </a:rPr>
+              <a:t>追加例9：未鑑賞の映画と予定を一緒に調べる</a:t>
+            </a:r>
+          </a:p>
+        </p:txBody>
+      </p:sp>
+      <p:sp>
+        <p:nvSpPr>
+          <p:cNvPr id="3" name="Title 2"/>
+          <p:cNvSpPr>
+            <a:spLocks noGrp="1"/>
+          </p:cNvSpPr>
+          <p:nvPr>
+            <p:ph type="title" idx="2"/>
+          </p:nvPr>
+        </p:nvSpPr>
+        <p:spPr>
+          <a:xfrm>
+            <a:off x="75895" y="0"/>
+            <a:ext cx="8115300" cy="480060"/>
+          </a:xfrm>
+        </p:spPr>
+        <p:txBody>
+          <a:bodyPr wrap="square" lIns="0" rIns="0" tIns="0" bIns="0" anchor="ctr">
+            <a:noAutofit/>
+          </a:bodyPr>
+          <a:lstStyle/>
+          <a:p>
+            <a:pPr algn="l">
+              <a:lnSpc>
+                <a:spcPct val="110000"/>
+              </a:lnSpc>
+              <a:buNone/>
+              <a:defRPr sz="1400" b="0">
+                <a:solidFill>
+                  <a:srgbClr val="303437"/>
+                </a:solidFill>
+                <a:latin typeface="Noto Sans"/>
+              </a:defRPr>
+            </a:pPr>
+            <a:r>
+              <a:rPr sz="1400" b="1" lang="ja-JP" altLang="en-US">
+                <a:solidFill>
+                  <a:srgbClr val="FFFFFF"/>
+                </a:solidFill>
+                <a:latin typeface="Noto Sans"/>
+                <a:ea typeface="Noto Sans CJK JP"/>
+                <a:cs typeface="Noto Sans"/>
+              </a:rPr>
+              <a:t>Appendix: 1. 追加の課題と分布</a:t>
+            </a:r>
+          </a:p>
+        </p:txBody>
+      </p:sp>
+      <p:sp>
+        <p:nvSpPr>
+          <p:cNvPr id="4" name="TextBox 3"/>
+          <p:cNvSpPr txBox="1"/>
+          <p:nvPr/>
+        </p:nvSpPr>
+        <p:spPr>
+          <a:xfrm>
+            <a:off x="594360" y="1389888"/>
+            <a:ext cx="7955279" cy="228600"/>
+          </a:xfrm>
+          <a:prstGeom prst="rect">
+            <a:avLst/>
+          </a:prstGeom>
+          <a:noFill/>
+        </p:spPr>
+        <p:txBody>
+          <a:bodyPr wrap="square" lIns="0" rIns="0" tIns="0" bIns="0">
+            <a:noAutofit/>
+          </a:bodyPr>
+          <a:lstStyle/>
+          <a:p>
+            <a:pPr algn="l">
+              <a:lnSpc>
+                <a:spcPct val="117000"/>
+              </a:lnSpc>
+              <a:spcBef>
+                <a:spcPts val="0"/>
+              </a:spcBef>
+              <a:spcAft>
+                <a:spcPts val="0"/>
+              </a:spcAft>
+              <a:buNone/>
+              <a:defRPr sz="1200" b="0">
+                <a:solidFill>
+                  <a:srgbClr val="303437"/>
+                </a:solidFill>
+                <a:latin typeface="Noto Sans"/>
+              </a:defRPr>
+            </a:pPr>
+            <a:r>
+              <a:rPr sz="1200" b="0" lang="ja-JP" altLang="en-US">
+                <a:solidFill>
+                  <a:srgbClr val="626669"/>
+                </a:solidFill>
+                <a:latin typeface="Noto Sans"/>
+                <a:ea typeface="Noto Sans CJK JP"/>
+                <a:cs typeface="Noto Sans"/>
+              </a:rPr>
+              <a:t>公開課題（原文）</a:t>
+            </a:r>
+          </a:p>
+        </p:txBody>
+      </p:sp>
+      <p:sp>
+        <p:nvSpPr>
+          <p:cNvPr id="5" name="TextBox 4"/>
+          <p:cNvSpPr txBox="1"/>
+          <p:nvPr/>
+        </p:nvSpPr>
+        <p:spPr>
+          <a:xfrm>
+            <a:off x="594360" y="1737360"/>
+            <a:ext cx="7955279" cy="1691640"/>
+          </a:xfrm>
+          <a:prstGeom prst="rect">
+            <a:avLst/>
+          </a:prstGeom>
+          <a:noFill/>
+        </p:spPr>
+        <p:txBody>
+          <a:bodyPr wrap="square" lIns="0" rIns="0" tIns="0" bIns="0">
+            <a:noAutofit/>
+          </a:bodyPr>
+          <a:lstStyle/>
+          <a:p>
+            <a:pPr algn="l">
+              <a:lnSpc>
+                <a:spcPct val="120000"/>
+              </a:lnSpc>
+              <a:spcBef>
+                <a:spcPts val="0"/>
+              </a:spcBef>
+              <a:spcAft>
+                <a:spcPts val="0"/>
+              </a:spcAft>
+              <a:buNone/>
+              <a:defRPr sz="1800" b="0">
+                <a:solidFill>
+                  <a:srgbClr val="303437"/>
+                </a:solidFill>
+                <a:latin typeface="Noto Sans"/>
+              </a:defRPr>
+            </a:pPr>
+            <a:r>
+              <a:rPr sz="1800" b="0" lang="ja-JP" altLang="en-US">
+                <a:solidFill>
+                  <a:srgbClr val="303437"/>
+                </a:solidFill>
+                <a:latin typeface="Noto Sans"/>
+                <a:ea typeface="Noto Sans CJK JP"/>
+                <a:cs typeface="Noto Sans"/>
+              </a:rPr>
+              <a:t>From my local movie data, what's the highest-rated movie I haven't watched yet on imdb? I need it for my july 2025 family movie night, so please also remind me of the date and time it is scheduled.</a:t>
+            </a:r>
+          </a:p>
+        </p:txBody>
+      </p:sp>
+      <p:sp>
+        <p:nvSpPr>
+          <p:cNvPr id="6" name="TextBox 5"/>
+          <p:cNvSpPr txBox="1"/>
+          <p:nvPr/>
+        </p:nvSpPr>
+        <p:spPr>
+          <a:xfrm>
+            <a:off x="594360" y="3712463"/>
+            <a:ext cx="7955279" cy="777240"/>
+          </a:xfrm>
+          <a:prstGeom prst="rect">
+            <a:avLst/>
+          </a:prstGeom>
+          <a:noFill/>
+        </p:spPr>
+        <p:txBody>
+          <a:bodyPr wrap="square" lIns="0" rIns="0" tIns="0" bIns="0">
+            <a:noAutofit/>
+          </a:bodyPr>
+          <a:lstStyle/>
+          <a:p>
+            <a:pPr algn="l">
+              <a:lnSpc>
+                <a:spcPct val="120000"/>
+              </a:lnSpc>
+              <a:spcBef>
+                <a:spcPts val="0"/>
+              </a:spcBef>
+              <a:spcAft>
+                <a:spcPts val="0"/>
+              </a:spcAft>
+              <a:buNone/>
+              <a:defRPr sz="2000" b="0">
+                <a:solidFill>
+                  <a:srgbClr val="303437"/>
+                </a:solidFill>
+                <a:latin typeface="Noto Sans"/>
+              </a:defRPr>
+            </a:pPr>
+            <a:r>
+              <a:rPr sz="2000" b="0" lang="ja-JP" altLang="en-US">
+                <a:solidFill>
+                  <a:srgbClr val="303437"/>
+                </a:solidFill>
+                <a:latin typeface="Noto Sans"/>
+                <a:ea typeface="Noto Sans CJK JP"/>
+                <a:cs typeface="Noto Sans"/>
+              </a:rPr>
+              <a:t>ローカルの鑑賞記録から評価の高い未鑑賞映画を選び、家族の映画鑑賞会の日時を確認する。</a:t>
+            </a:r>
+          </a:p>
+        </p:txBody>
+      </p:sp>
+      <p:sp>
+        <p:nvSpPr>
+          <p:cNvPr id="7" name="TextBox 6"/>
+          <p:cNvSpPr txBox="1"/>
+          <p:nvPr/>
+        </p:nvSpPr>
+        <p:spPr>
+          <a:xfrm>
+            <a:off x="502920" y="4690872"/>
+            <a:ext cx="8183879" cy="393192"/>
+          </a:xfrm>
+          <a:prstGeom prst="rect">
+            <a:avLst/>
+          </a:prstGeom>
+          <a:noFill/>
+        </p:spPr>
+        <p:txBody>
+          <a:bodyPr wrap="square" lIns="0" rIns="0" tIns="0" bIns="0">
+            <a:noAutofit/>
+          </a:bodyPr>
+          <a:lstStyle/>
+          <a:p>
+            <a:pPr algn="l">
+              <a:lnSpc>
+                <a:spcPct val="112000"/>
+              </a:lnSpc>
+              <a:spcBef>
+                <a:spcPts val="0"/>
+              </a:spcBef>
+              <a:spcAft>
+                <a:spcPts val="0"/>
+              </a:spcAft>
+              <a:buNone/>
+              <a:defRPr sz="810" b="0">
+                <a:solidFill>
+                  <a:srgbClr val="303437"/>
+                </a:solidFill>
+                <a:latin typeface="Noto Sans"/>
+              </a:defRPr>
+            </a:pPr>
+            <a:r>
+              <a:rPr sz="810" b="0" lang="ja-JP" altLang="en-US">
+                <a:solidFill>
+                  <a:srgbClr val="626669"/>
+                </a:solidFill>
+                <a:latin typeface="Noto Sans"/>
+                <a:ea typeface="Noto Sans CJK JP"/>
+                <a:cs typeface="Noto Sans"/>
+              </a:rPr>
+              <a:t/>
+            </a:r>
+            <a:r>
+              <a:rPr sz="810" b="0" lang="ja-JP" altLang="en-US">
+                <a:solidFill>
+                  <a:srgbClr val="626669"/>
+                </a:solidFill>
+                <a:latin typeface="Noto Sans"/>
+                <a:ea typeface="Noto Sans CJK JP"/>
+                <a:cs typeface="Noto Sans"/>
+              </a:rPr>
+              <a:t>Scale AI. MCP-Atlas / 公開train。課題689bd255c0422b257e7dfcaf。CC BY 4.0。</a:t>
+            </a:r>
+            <a:r>
+              <a:rPr sz="810" b="0" lang="ja-JP" altLang="en-US">
+                <a:solidFill>
+                  <a:srgbClr val="626669"/>
+                </a:solidFill>
+                <a:latin typeface="Noto Sans"/>
+                <a:ea typeface="Noto Sans CJK JP"/>
+                <a:cs typeface="Noto Sans"/>
+              </a:rPr>
+              <a:t>  </a:t>
+            </a:r>
+            <a:r>
+              <a:rPr sz="810" b="0" lang="ja-JP" altLang="en-US">
+                <a:solidFill>
+                  <a:srgbClr val="626669"/>
+                </a:solidFill>
+                <a:latin typeface="Noto Sans"/>
+                <a:ea typeface="Noto Sans CJK JP"/>
+                <a:cs typeface="Noto Sans"/>
+                <a:hlinkClick r:id="rId2"/>
+              </a:rPr>
+              <a:t>https://huggingface.co/datasets/ScaleAI/MCP-Atlas/viewer/default/train?row=465</a:t>
+            </a:r>
+          </a:p>
+        </p:txBody>
+      </p:sp>
+    </p:spTree>
+  </p:cSld>
+  <p:clrMapOvr>
+    <a:masterClrMapping/>
+  </p:clrMapOvr>
+</p:sld>
+</file>
+
+<file path=ppt/slides/slide53.xml><?xml version="1.0" encoding="utf-8"?>
+<p:sld xmlns:a="http://schemas.openxmlformats.org/drawingml/2006/main" xmlns:p="http://schemas.openxmlformats.org/presentationml/2006/main" xmlns:r="http://schemas.openxmlformats.org/officeDocument/2006/relationships">
+  <p:cSld>
+    <p:spTree>
+      <p:nvGrpSpPr>
+        <p:cNvPr id="1" name=""/>
+        <p:cNvGrpSpPr/>
+        <p:nvPr/>
+      </p:nvGrpSpPr>
+      <p:grpSpPr/>
+      <p:sp>
+        <p:nvSpPr>
+          <p:cNvPr id="2" name="Title 1"/>
+          <p:cNvSpPr>
+            <a:spLocks noGrp="1"/>
+          </p:cNvSpPr>
+          <p:nvPr>
+            <p:ph type="title"/>
+          </p:nvPr>
+        </p:nvSpPr>
+        <p:spPr>
+          <a:xfrm>
+            <a:off x="548640" y="786384"/>
+            <a:ext cx="8046720" cy="502920"/>
+          </a:xfrm>
+        </p:spPr>
+        <p:txBody>
+          <a:bodyPr wrap="square" lIns="0" rIns="0" tIns="0" bIns="0">
+            <a:noAutofit/>
+          </a:bodyPr>
+          <a:lstStyle/>
+          <a:p>
+            <a:pPr algn="l">
+              <a:lnSpc>
+                <a:spcPct val="110000"/>
+              </a:lnSpc>
+              <a:buNone/>
+              <a:defRPr sz="2800" b="0">
+                <a:solidFill>
+                  <a:srgbClr val="303437"/>
+                </a:solidFill>
+                <a:latin typeface="Noto Sans"/>
+              </a:defRPr>
+            </a:pPr>
+            <a:r>
+              <a:rPr sz="2800" b="1" lang="ja-JP" altLang="en-US">
+                <a:solidFill>
+                  <a:srgbClr val="303437"/>
+                </a:solidFill>
+                <a:latin typeface="Noto Sans"/>
+                <a:ea typeface="Noto Sans CJK JP"/>
+                <a:cs typeface="Noto Sans"/>
+              </a:rPr>
+              <a:t>映画の条件と、鑑賞会の予定を照合する</a:t>
+            </a:r>
+          </a:p>
+        </p:txBody>
+      </p:sp>
+      <p:sp>
+        <p:nvSpPr>
+          <p:cNvPr id="3" name="Text Placeholder 2"/>
+          <p:cNvSpPr>
+            <a:spLocks noGrp="1"/>
+          </p:cNvSpPr>
+          <p:nvPr>
+            <p:ph type="body" idx="1"/>
+          </p:nvPr>
+        </p:nvSpPr>
+        <p:spPr>
+          <a:xfrm>
+            <a:off x="594360" y="1463040"/>
+            <a:ext cx="7955279" cy="3090672"/>
+          </a:xfrm>
+        </p:spPr>
+        <p:txBody>
+          <a:bodyPr wrap="square" tIns="91440" bIns="91440">
+            <a:noAutofit/>
+          </a:bodyPr>
+          <a:lstStyle/>
+          <a:p>
+            <a:pPr marL="457200" indent="-355600">
+              <a:lnSpc>
+                <a:spcPts val="2760"/>
+              </a:lnSpc>
+              <a:spcAft>
+                <a:spcPts val="800"/>
+              </a:spcAft>
+              <a:buSzPct val="57826"/>
+              <a:buFont typeface="Noto Sans CJK JP"/>
+              <a:buChar char="●"/>
+              <a:defRPr sz="2300" b="0">
+                <a:solidFill>
+                  <a:srgbClr val="303437"/>
+                </a:solidFill>
+                <a:latin typeface="Noto Sans"/>
+              </a:defRPr>
+            </a:pPr>
+            <a:r>
+              <a:rPr sz="2300" b="0" lang="ja-JP" altLang="en-US">
+                <a:solidFill>
+                  <a:srgbClr val="303437"/>
+                </a:solidFill>
+                <a:latin typeface="Noto Sans"/>
+                <a:ea typeface="Noto Sans CJK JP"/>
+                <a:cs typeface="Noto Sans"/>
+              </a:rPr>
+              <a:t>未鑑賞の中でIMDb評価が最も高い映画はThe Shawshank Redemption。</a:t>
+            </a:r>
+          </a:p>
+          <a:p>
+            <a:pPr marL="457200" indent="-355600">
+              <a:lnSpc>
+                <a:spcPts val="2760"/>
+              </a:lnSpc>
+              <a:spcAft>
+                <a:spcPts val="0"/>
+              </a:spcAft>
+              <a:buSzPct val="57826"/>
+              <a:buFont typeface="Noto Sans CJK JP"/>
+              <a:buChar char="●"/>
+              <a:defRPr sz="2300" b="0">
+                <a:solidFill>
+                  <a:srgbClr val="303437"/>
+                </a:solidFill>
+                <a:latin typeface="Noto Sans"/>
+              </a:defRPr>
+            </a:pPr>
+            <a:r>
+              <a:rPr sz="2300" b="0" lang="ja-JP" altLang="en-US">
+                <a:solidFill>
+                  <a:srgbClr val="303437"/>
+                </a:solidFill>
+                <a:latin typeface="Noto Sans"/>
+                <a:ea typeface="Noto Sans CJK JP"/>
+                <a:cs typeface="Noto Sans"/>
+              </a:rPr>
+              <a:t>家族の映画鑑賞会は2025年7月29日、20:00〜22:00（ET）。参照履歴は、ローカルの映画ファイルを読み、Google Workspaceの予定を取得する。</a:t>
+            </a:r>
+          </a:p>
+        </p:txBody>
+      </p:sp>
+      <p:sp>
+        <p:nvSpPr>
+          <p:cNvPr id="4" name="Title 3"/>
+          <p:cNvSpPr>
+            <a:spLocks noGrp="1"/>
+          </p:cNvSpPr>
+          <p:nvPr>
+            <p:ph type="title" idx="2"/>
+          </p:nvPr>
+        </p:nvSpPr>
+        <p:spPr>
+          <a:xfrm>
+            <a:off x="75895" y="0"/>
+            <a:ext cx="8115300" cy="480060"/>
+          </a:xfrm>
+        </p:spPr>
+        <p:txBody>
+          <a:bodyPr wrap="square" lIns="0" rIns="0" tIns="0" bIns="0" anchor="ctr">
+            <a:noAutofit/>
+          </a:bodyPr>
+          <a:lstStyle/>
+          <a:p>
+            <a:pPr algn="l">
+              <a:lnSpc>
+                <a:spcPct val="110000"/>
+              </a:lnSpc>
+              <a:buNone/>
+              <a:defRPr sz="1400" b="0">
+                <a:solidFill>
+                  <a:srgbClr val="303437"/>
+                </a:solidFill>
+                <a:latin typeface="Noto Sans"/>
+              </a:defRPr>
+            </a:pPr>
+            <a:r>
+              <a:rPr sz="1400" b="1" lang="ja-JP" altLang="en-US">
+                <a:solidFill>
+                  <a:srgbClr val="FFFFFF"/>
+                </a:solidFill>
+                <a:latin typeface="Noto Sans"/>
+                <a:ea typeface="Noto Sans CJK JP"/>
+                <a:cs typeface="Noto Sans"/>
+              </a:rPr>
+              <a:t>Appendix: 1. 追加の課題と分布</a:t>
+            </a:r>
+          </a:p>
+        </p:txBody>
+      </p:sp>
+      <p:sp>
+        <p:nvSpPr>
+          <p:cNvPr id="5" name="TextBox 4"/>
+          <p:cNvSpPr txBox="1"/>
+          <p:nvPr/>
+        </p:nvSpPr>
+        <p:spPr>
+          <a:xfrm>
+            <a:off x="502920" y="4690872"/>
+            <a:ext cx="8183879" cy="393192"/>
+          </a:xfrm>
+          <a:prstGeom prst="rect">
+            <a:avLst/>
+          </a:prstGeom>
+          <a:noFill/>
+        </p:spPr>
+        <p:txBody>
+          <a:bodyPr wrap="square" lIns="0" rIns="0" tIns="0" bIns="0">
+            <a:noAutofit/>
+          </a:bodyPr>
+          <a:lstStyle/>
+          <a:p>
+            <a:pPr algn="l">
+              <a:lnSpc>
+                <a:spcPct val="112000"/>
+              </a:lnSpc>
+              <a:spcBef>
+                <a:spcPts val="0"/>
+              </a:spcBef>
+              <a:spcAft>
+                <a:spcPts val="0"/>
+              </a:spcAft>
+              <a:buNone/>
+              <a:defRPr sz="810" b="0">
+                <a:solidFill>
+                  <a:srgbClr val="303437"/>
+                </a:solidFill>
+                <a:latin typeface="Noto Sans"/>
+              </a:defRPr>
+            </a:pPr>
+            <a:r>
+              <a:rPr sz="810" b="0" lang="ja-JP" altLang="en-US">
+                <a:solidFill>
+                  <a:srgbClr val="626669"/>
+                </a:solidFill>
+                <a:latin typeface="Noto Sans"/>
+                <a:ea typeface="Noto Sans CJK JP"/>
+                <a:cs typeface="Noto Sans"/>
+              </a:rPr>
+              <a:t/>
+            </a:r>
+            <a:r>
+              <a:rPr sz="810" b="0" lang="ja-JP" altLang="en-US">
+                <a:solidFill>
+                  <a:srgbClr val="626669"/>
+                </a:solidFill>
+                <a:latin typeface="Noto Sans"/>
+                <a:ea typeface="Noto Sans CJK JP"/>
+                <a:cs typeface="Noto Sans"/>
+              </a:rPr>
+              <a:t>Scale AI. MCP-Atlas / 公開train。課題689bd255c0422b257e7dfcaf。CC BY 4.0。</a:t>
+            </a:r>
+            <a:r>
+              <a:rPr sz="810" b="0" lang="ja-JP" altLang="en-US">
+                <a:solidFill>
+                  <a:srgbClr val="626669"/>
+                </a:solidFill>
+                <a:latin typeface="Noto Sans"/>
+                <a:ea typeface="Noto Sans CJK JP"/>
+                <a:cs typeface="Noto Sans"/>
+              </a:rPr>
+              <a:t>  </a:t>
+            </a:r>
+            <a:r>
+              <a:rPr sz="810" b="0" lang="ja-JP" altLang="en-US">
+                <a:solidFill>
+                  <a:srgbClr val="626669"/>
+                </a:solidFill>
+                <a:latin typeface="Noto Sans"/>
+                <a:ea typeface="Noto Sans CJK JP"/>
+                <a:cs typeface="Noto Sans"/>
+                <a:hlinkClick r:id="rId2"/>
+              </a:rPr>
+              <a:t>https://huggingface.co/datasets/ScaleAI/MCP-Atlas/viewer/default/train?row=465</a:t>
+            </a:r>
+          </a:p>
+        </p:txBody>
+      </p:sp>
+    </p:spTree>
+  </p:cSld>
+  <p:clrMapOvr>
+    <a:masterClrMapping/>
+  </p:clrMapOvr>
+</p:sld>
+</file>
+
+<file path=ppt/slides/slide54.xml><?xml version="1.0" encoding="utf-8"?>
+<p:sld xmlns:a="http://schemas.openxmlformats.org/drawingml/2006/main" xmlns:p="http://schemas.openxmlformats.org/presentationml/2006/main" xmlns:r="http://schemas.openxmlformats.org/officeDocument/2006/relationships">
+  <p:cSld>
+    <p:spTree>
+      <p:nvGrpSpPr>
+        <p:cNvPr id="1" name=""/>
+        <p:cNvGrpSpPr/>
+        <p:nvPr/>
+      </p:nvGrpSpPr>
+      <p:grpSpPr/>
+      <p:sp>
+        <p:nvSpPr>
+          <p:cNvPr id="2" name="Title 1"/>
+          <p:cNvSpPr>
+            <a:spLocks noGrp="1"/>
+          </p:cNvSpPr>
+          <p:nvPr>
+            <p:ph type="title"/>
+          </p:nvPr>
+        </p:nvSpPr>
+        <p:spPr>
+          <a:xfrm>
+            <a:off x="548640" y="786384"/>
+            <a:ext cx="8046720" cy="502920"/>
+          </a:xfrm>
+        </p:spPr>
+        <p:txBody>
+          <a:bodyPr wrap="square" lIns="0" rIns="0" tIns="0" bIns="0">
+            <a:noAutofit/>
+          </a:bodyPr>
+          <a:lstStyle/>
+          <a:p>
+            <a:pPr algn="l">
+              <a:lnSpc>
+                <a:spcPct val="110000"/>
+              </a:lnSpc>
+              <a:buNone/>
+              <a:defRPr sz="2800" b="0">
+                <a:solidFill>
+                  <a:srgbClr val="303437"/>
+                </a:solidFill>
+                <a:latin typeface="Noto Sans"/>
+              </a:defRPr>
+            </a:pPr>
+            <a:r>
+              <a:rPr sz="2800" b="1" lang="ja-JP" altLang="en-US">
+                <a:solidFill>
+                  <a:srgbClr val="303437"/>
+                </a:solidFill>
+                <a:latin typeface="Noto Sans"/>
+                <a:ea typeface="Noto Sans CJK JP"/>
+                <a:cs typeface="Noto Sans"/>
+              </a:rPr>
+              <a:t>追加例10：顧客満足度を担当者ごとに集計する</a:t>
+            </a:r>
+          </a:p>
+        </p:txBody>
+      </p:sp>
+      <p:sp>
+        <p:nvSpPr>
+          <p:cNvPr id="3" name="Title 2"/>
+          <p:cNvSpPr>
+            <a:spLocks noGrp="1"/>
+          </p:cNvSpPr>
+          <p:nvPr>
+            <p:ph type="title" idx="2"/>
+          </p:nvPr>
+        </p:nvSpPr>
+        <p:spPr>
+          <a:xfrm>
+            <a:off x="75895" y="0"/>
+            <a:ext cx="8115300" cy="480060"/>
+          </a:xfrm>
+        </p:spPr>
+        <p:txBody>
+          <a:bodyPr wrap="square" lIns="0" rIns="0" tIns="0" bIns="0" anchor="ctr">
+            <a:noAutofit/>
+          </a:bodyPr>
+          <a:lstStyle/>
+          <a:p>
+            <a:pPr algn="l">
+              <a:lnSpc>
+                <a:spcPct val="110000"/>
+              </a:lnSpc>
+              <a:buNone/>
+              <a:defRPr sz="1400" b="0">
+                <a:solidFill>
+                  <a:srgbClr val="303437"/>
+                </a:solidFill>
+                <a:latin typeface="Noto Sans"/>
+              </a:defRPr>
+            </a:pPr>
+            <a:r>
+              <a:rPr sz="1400" b="1" lang="ja-JP" altLang="en-US">
+                <a:solidFill>
+                  <a:srgbClr val="FFFFFF"/>
+                </a:solidFill>
+                <a:latin typeface="Noto Sans"/>
+                <a:ea typeface="Noto Sans CJK JP"/>
+                <a:cs typeface="Noto Sans"/>
+              </a:rPr>
+              <a:t>Appendix: 1. 追加の課題と分布</a:t>
+            </a:r>
+          </a:p>
+        </p:txBody>
+      </p:sp>
+      <p:sp>
+        <p:nvSpPr>
+          <p:cNvPr id="4" name="TextBox 3"/>
+          <p:cNvSpPr txBox="1"/>
+          <p:nvPr/>
+        </p:nvSpPr>
+        <p:spPr>
+          <a:xfrm>
+            <a:off x="594360" y="1389888"/>
+            <a:ext cx="7955279" cy="228600"/>
+          </a:xfrm>
+          <a:prstGeom prst="rect">
+            <a:avLst/>
+          </a:prstGeom>
+          <a:noFill/>
+        </p:spPr>
+        <p:txBody>
+          <a:bodyPr wrap="square" lIns="0" rIns="0" tIns="0" bIns="0">
+            <a:noAutofit/>
+          </a:bodyPr>
+          <a:lstStyle/>
+          <a:p>
+            <a:pPr algn="l">
+              <a:lnSpc>
+                <a:spcPct val="117000"/>
+              </a:lnSpc>
+              <a:spcBef>
+                <a:spcPts val="0"/>
+              </a:spcBef>
+              <a:spcAft>
+                <a:spcPts val="0"/>
+              </a:spcAft>
+              <a:buNone/>
+              <a:defRPr sz="1200" b="0">
+                <a:solidFill>
+                  <a:srgbClr val="303437"/>
+                </a:solidFill>
+                <a:latin typeface="Noto Sans"/>
+              </a:defRPr>
+            </a:pPr>
+            <a:r>
+              <a:rPr sz="1200" b="0" lang="ja-JP" altLang="en-US">
+                <a:solidFill>
+                  <a:srgbClr val="626669"/>
+                </a:solidFill>
+                <a:latin typeface="Noto Sans"/>
+                <a:ea typeface="Noto Sans CJK JP"/>
+                <a:cs typeface="Noto Sans"/>
+              </a:rPr>
+              <a:t>公開課題（原文）</a:t>
+            </a:r>
+          </a:p>
+        </p:txBody>
+      </p:sp>
+      <p:sp>
+        <p:nvSpPr>
+          <p:cNvPr id="5" name="TextBox 4"/>
+          <p:cNvSpPr txBox="1"/>
+          <p:nvPr/>
+        </p:nvSpPr>
+        <p:spPr>
+          <a:xfrm>
+            <a:off x="594360" y="1737360"/>
+            <a:ext cx="7955279" cy="1691640"/>
+          </a:xfrm>
+          <a:prstGeom prst="rect">
+            <a:avLst/>
+          </a:prstGeom>
+          <a:noFill/>
+        </p:spPr>
+        <p:txBody>
+          <a:bodyPr wrap="square" lIns="0" rIns="0" tIns="0" bIns="0">
+            <a:noAutofit/>
+          </a:bodyPr>
+          <a:lstStyle/>
+          <a:p>
+            <a:pPr algn="l">
+              <a:lnSpc>
+                <a:spcPct val="120000"/>
+              </a:lnSpc>
+              <a:spcBef>
+                <a:spcPts val="0"/>
+              </a:spcBef>
+              <a:spcAft>
+                <a:spcPts val="0"/>
+              </a:spcAft>
+              <a:buNone/>
+              <a:defRPr sz="1800" b="0">
+                <a:solidFill>
+                  <a:srgbClr val="303437"/>
+                </a:solidFill>
+                <a:latin typeface="Noto Sans"/>
+              </a:defRPr>
+            </a:pPr>
+            <a:r>
+              <a:rPr sz="1800" b="0" lang="ja-JP" altLang="en-US">
+                <a:solidFill>
+                  <a:srgbClr val="303437"/>
+                </a:solidFill>
+                <a:latin typeface="Noto Sans"/>
+                <a:ea typeface="Noto Sans CJK JP"/>
+                <a:cs typeface="Noto Sans"/>
+              </a:rPr>
+              <a:t>I'm trying to find out which which people had the best ratings, i do haircuts and I have a list about my business where i am known as barber 2, i compete with my partner to see who was better. My other partner, barber 3, is not interested in my competition</a:t>
+            </a:r>
+          </a:p>
+        </p:txBody>
+      </p:sp>
+      <p:sp>
+        <p:nvSpPr>
+          <p:cNvPr id="6" name="TextBox 5"/>
+          <p:cNvSpPr txBox="1"/>
+          <p:nvPr/>
+        </p:nvSpPr>
+        <p:spPr>
+          <a:xfrm>
+            <a:off x="594360" y="3712463"/>
+            <a:ext cx="7955279" cy="777240"/>
+          </a:xfrm>
+          <a:prstGeom prst="rect">
+            <a:avLst/>
+          </a:prstGeom>
+          <a:noFill/>
+        </p:spPr>
+        <p:txBody>
+          <a:bodyPr wrap="square" lIns="0" rIns="0" tIns="0" bIns="0">
+            <a:noAutofit/>
+          </a:bodyPr>
+          <a:lstStyle/>
+          <a:p>
+            <a:pPr algn="l">
+              <a:lnSpc>
+                <a:spcPct val="120000"/>
+              </a:lnSpc>
+              <a:spcBef>
+                <a:spcPts val="0"/>
+              </a:spcBef>
+              <a:spcAft>
+                <a:spcPts val="0"/>
+              </a:spcAft>
+              <a:buNone/>
+              <a:defRPr sz="2000" b="0">
+                <a:solidFill>
+                  <a:srgbClr val="303437"/>
+                </a:solidFill>
+                <a:latin typeface="Noto Sans"/>
+              </a:defRPr>
+            </a:pPr>
+            <a:r>
+              <a:rPr sz="2000" b="0" lang="ja-JP" altLang="en-US">
+                <a:solidFill>
+                  <a:srgbClr val="303437"/>
+                </a:solidFill>
+                <a:latin typeface="Noto Sans"/>
+                <a:ea typeface="Noto Sans CJK JP"/>
+                <a:cs typeface="Noto Sans"/>
+              </a:rPr>
+              <a:t>理髪店のローカルデータから、Barber 1とBarber 2の顧客満足度の平均を比較する。</a:t>
+            </a:r>
+          </a:p>
+        </p:txBody>
+      </p:sp>
+      <p:sp>
+        <p:nvSpPr>
+          <p:cNvPr id="7" name="TextBox 6"/>
+          <p:cNvSpPr txBox="1"/>
+          <p:nvPr/>
+        </p:nvSpPr>
+        <p:spPr>
+          <a:xfrm>
+            <a:off x="502920" y="4690872"/>
+            <a:ext cx="8183879" cy="393192"/>
+          </a:xfrm>
+          <a:prstGeom prst="rect">
+            <a:avLst/>
+          </a:prstGeom>
+          <a:noFill/>
+        </p:spPr>
+        <p:txBody>
+          <a:bodyPr wrap="square" lIns="0" rIns="0" tIns="0" bIns="0">
+            <a:noAutofit/>
+          </a:bodyPr>
+          <a:lstStyle/>
+          <a:p>
+            <a:pPr algn="l">
+              <a:lnSpc>
+                <a:spcPct val="112000"/>
+              </a:lnSpc>
+              <a:spcBef>
+                <a:spcPts val="0"/>
+              </a:spcBef>
+              <a:spcAft>
+                <a:spcPts val="0"/>
+              </a:spcAft>
+              <a:buNone/>
+              <a:defRPr sz="810" b="0">
+                <a:solidFill>
+                  <a:srgbClr val="303437"/>
+                </a:solidFill>
+                <a:latin typeface="Noto Sans"/>
+              </a:defRPr>
+            </a:pPr>
+            <a:r>
+              <a:rPr sz="810" b="0" lang="ja-JP" altLang="en-US">
+                <a:solidFill>
+                  <a:srgbClr val="626669"/>
+                </a:solidFill>
+                <a:latin typeface="Noto Sans"/>
+                <a:ea typeface="Noto Sans CJK JP"/>
+                <a:cs typeface="Noto Sans"/>
+              </a:rPr>
+              <a:t/>
+            </a:r>
+            <a:r>
+              <a:rPr sz="810" b="0" lang="ja-JP" altLang="en-US">
+                <a:solidFill>
+                  <a:srgbClr val="626669"/>
+                </a:solidFill>
+                <a:latin typeface="Noto Sans"/>
+                <a:ea typeface="Noto Sans CJK JP"/>
+                <a:cs typeface="Noto Sans"/>
+              </a:rPr>
+              <a:t>Scale AI. MCP-Atlas / 公開train。課題6886306b5ed4da6b2c381175。CC BY 4.0。</a:t>
+            </a:r>
+            <a:r>
+              <a:rPr sz="810" b="0" lang="ja-JP" altLang="en-US">
+                <a:solidFill>
+                  <a:srgbClr val="626669"/>
+                </a:solidFill>
+                <a:latin typeface="Noto Sans"/>
+                <a:ea typeface="Noto Sans CJK JP"/>
+                <a:cs typeface="Noto Sans"/>
+              </a:rPr>
+              <a:t>  </a:t>
+            </a:r>
+            <a:r>
+              <a:rPr sz="810" b="0" lang="ja-JP" altLang="en-US">
+                <a:solidFill>
+                  <a:srgbClr val="626669"/>
+                </a:solidFill>
+                <a:latin typeface="Noto Sans"/>
+                <a:ea typeface="Noto Sans CJK JP"/>
+                <a:cs typeface="Noto Sans"/>
+                <a:hlinkClick r:id="rId2"/>
+              </a:rPr>
+              <a:t>https://huggingface.co/datasets/ScaleAI/MCP-Atlas/viewer/default/train?row=477</a:t>
+            </a:r>
+          </a:p>
+        </p:txBody>
+      </p:sp>
+    </p:spTree>
+  </p:cSld>
+  <p:clrMapOvr>
+    <a:masterClrMapping/>
+  </p:clrMapOvr>
+</p:sld>
+</file>
+
+<file path=ppt/slides/slide55.xml><?xml version="1.0" encoding="utf-8"?>
+<p:sld xmlns:a="http://schemas.openxmlformats.org/drawingml/2006/main" xmlns:p="http://schemas.openxmlformats.org/presentationml/2006/main" xmlns:r="http://schemas.openxmlformats.org/officeDocument/2006/relationships">
+  <p:cSld>
+    <p:spTree>
+      <p:nvGrpSpPr>
+        <p:cNvPr id="1" name=""/>
+        <p:cNvGrpSpPr/>
+        <p:nvPr/>
+      </p:nvGrpSpPr>
+      <p:grpSpPr/>
+      <p:sp>
+        <p:nvSpPr>
+          <p:cNvPr id="2" name="Title 1"/>
+          <p:cNvSpPr>
+            <a:spLocks noGrp="1"/>
+          </p:cNvSpPr>
+          <p:nvPr>
+            <p:ph type="title"/>
+          </p:nvPr>
+        </p:nvSpPr>
+        <p:spPr>
+          <a:xfrm>
+            <a:off x="548640" y="786384"/>
+            <a:ext cx="8046720" cy="502920"/>
+          </a:xfrm>
+        </p:spPr>
+        <p:txBody>
+          <a:bodyPr wrap="square" lIns="0" rIns="0" tIns="0" bIns="0">
+            <a:noAutofit/>
+          </a:bodyPr>
+          <a:lstStyle/>
+          <a:p>
+            <a:pPr algn="l">
+              <a:lnSpc>
+                <a:spcPct val="110000"/>
+              </a:lnSpc>
+              <a:buNone/>
+              <a:defRPr sz="2800" b="0">
+                <a:solidFill>
+                  <a:srgbClr val="303437"/>
+                </a:solidFill>
+                <a:latin typeface="Noto Sans"/>
+              </a:defRPr>
+            </a:pPr>
+            <a:r>
+              <a:rPr sz="2800" b="1" lang="ja-JP" altLang="en-US">
+                <a:solidFill>
+                  <a:srgbClr val="303437"/>
+                </a:solidFill>
+                <a:latin typeface="Noto Sans"/>
+                <a:ea typeface="Noto Sans CJK JP"/>
+                <a:cs typeface="Noto Sans"/>
+              </a:rPr>
+              <a:t>担当者ごとに顧客満足度の平均を計算する</a:t>
+            </a:r>
+          </a:p>
+        </p:txBody>
+      </p:sp>
+      <p:sp>
+        <p:nvSpPr>
+          <p:cNvPr id="3" name="Text Placeholder 2"/>
+          <p:cNvSpPr>
+            <a:spLocks noGrp="1"/>
+          </p:cNvSpPr>
+          <p:nvPr>
+            <p:ph type="body" idx="1"/>
+          </p:nvPr>
+        </p:nvSpPr>
+        <p:spPr>
+          <a:xfrm>
+            <a:off x="594360" y="1463040"/>
+            <a:ext cx="7955279" cy="3090672"/>
+          </a:xfrm>
+        </p:spPr>
+        <p:txBody>
+          <a:bodyPr wrap="square" tIns="91440" bIns="91440">
+            <a:noAutofit/>
+          </a:bodyPr>
+          <a:lstStyle/>
+          <a:p>
+            <a:pPr marL="457200" indent="-355600">
+              <a:lnSpc>
+                <a:spcPts val="2760"/>
+              </a:lnSpc>
+              <a:spcAft>
+                <a:spcPts val="800"/>
+              </a:spcAft>
+              <a:buSzPct val="57826"/>
+              <a:buFont typeface="Noto Sans CJK JP"/>
+              <a:buChar char="●"/>
+              <a:defRPr sz="2300" b="0">
+                <a:solidFill>
+                  <a:srgbClr val="303437"/>
+                </a:solidFill>
+                <a:latin typeface="Noto Sans"/>
+              </a:defRPr>
+            </a:pPr>
+            <a:r>
+              <a:rPr sz="2300" b="0" lang="ja-JP" altLang="en-US">
+                <a:solidFill>
+                  <a:srgbClr val="303437"/>
+                </a:solidFill>
+                <a:latin typeface="Noto Sans"/>
+                <a:ea typeface="Noto Sans CJK JP"/>
+                <a:cs typeface="Noto Sans"/>
+              </a:rPr>
+              <a:t>顧客満足度の平均はBarber 1が4.31、Barber 2が4.78。比較ではBarber 2の方が高い。</a:t>
+            </a:r>
+          </a:p>
+          <a:p>
+            <a:pPr marL="457200" indent="-355600">
+              <a:lnSpc>
+                <a:spcPts val="2760"/>
+              </a:lnSpc>
+              <a:spcAft>
+                <a:spcPts val="0"/>
+              </a:spcAft>
+              <a:buSzPct val="57826"/>
+              <a:buFont typeface="Noto Sans CJK JP"/>
+              <a:buChar char="●"/>
+              <a:defRPr sz="2300" b="0">
+                <a:solidFill>
+                  <a:srgbClr val="303437"/>
+                </a:solidFill>
+                <a:latin typeface="Noto Sans"/>
+              </a:defRPr>
+            </a:pPr>
+            <a:r>
+              <a:rPr sz="2300" b="0" lang="ja-JP" altLang="en-US">
+                <a:solidFill>
+                  <a:srgbClr val="303437"/>
+                </a:solidFill>
+                <a:latin typeface="Noto Sans"/>
+                <a:ea typeface="Noto Sans CJK JP"/>
+                <a:cs typeface="Noto Sans"/>
+              </a:rPr>
+              <a:t>参照履歴は、端末でローカルファイルを探し、コード実行サーバーでCSVを集計する。依頼の対象でないBarber 3は比較に含めない。</a:t>
+            </a:r>
+          </a:p>
+        </p:txBody>
+      </p:sp>
+      <p:sp>
+        <p:nvSpPr>
+          <p:cNvPr id="4" name="Title 3"/>
+          <p:cNvSpPr>
+            <a:spLocks noGrp="1"/>
+          </p:cNvSpPr>
+          <p:nvPr>
+            <p:ph type="title" idx="2"/>
+          </p:nvPr>
+        </p:nvSpPr>
+        <p:spPr>
+          <a:xfrm>
+            <a:off x="75895" y="0"/>
+            <a:ext cx="8115300" cy="480060"/>
+          </a:xfrm>
+        </p:spPr>
+        <p:txBody>
+          <a:bodyPr wrap="square" lIns="0" rIns="0" tIns="0" bIns="0" anchor="ctr">
+            <a:noAutofit/>
+          </a:bodyPr>
+          <a:lstStyle/>
+          <a:p>
+            <a:pPr algn="l">
+              <a:lnSpc>
+                <a:spcPct val="110000"/>
+              </a:lnSpc>
+              <a:buNone/>
+              <a:defRPr sz="1400" b="0">
+                <a:solidFill>
+                  <a:srgbClr val="303437"/>
+                </a:solidFill>
+                <a:latin typeface="Noto Sans"/>
+              </a:defRPr>
+            </a:pPr>
+            <a:r>
+              <a:rPr sz="1400" b="1" lang="ja-JP" altLang="en-US">
+                <a:solidFill>
+                  <a:srgbClr val="FFFFFF"/>
+                </a:solidFill>
+                <a:latin typeface="Noto Sans"/>
+                <a:ea typeface="Noto Sans CJK JP"/>
+                <a:cs typeface="Noto Sans"/>
+              </a:rPr>
+              <a:t>Appendix: 1. 追加の課題と分布</a:t>
+            </a:r>
+          </a:p>
+        </p:txBody>
+      </p:sp>
+      <p:sp>
+        <p:nvSpPr>
+          <p:cNvPr id="5" name="TextBox 4"/>
+          <p:cNvSpPr txBox="1"/>
+          <p:nvPr/>
+        </p:nvSpPr>
+        <p:spPr>
+          <a:xfrm>
+            <a:off x="502920" y="4690872"/>
+            <a:ext cx="8183879" cy="393192"/>
+          </a:xfrm>
+          <a:prstGeom prst="rect">
+            <a:avLst/>
+          </a:prstGeom>
+          <a:noFill/>
+        </p:spPr>
+        <p:txBody>
+          <a:bodyPr wrap="square" lIns="0" rIns="0" tIns="0" bIns="0">
+            <a:noAutofit/>
+          </a:bodyPr>
+          <a:lstStyle/>
+          <a:p>
+            <a:pPr algn="l">
+              <a:lnSpc>
+                <a:spcPct val="112000"/>
+              </a:lnSpc>
+              <a:spcBef>
+                <a:spcPts val="0"/>
+              </a:spcBef>
+              <a:spcAft>
+                <a:spcPts val="0"/>
+              </a:spcAft>
+              <a:buNone/>
+              <a:defRPr sz="810" b="0">
+                <a:solidFill>
+                  <a:srgbClr val="303437"/>
+                </a:solidFill>
+                <a:latin typeface="Noto Sans"/>
+              </a:defRPr>
+            </a:pPr>
+            <a:r>
+              <a:rPr sz="810" b="0" lang="ja-JP" altLang="en-US">
+                <a:solidFill>
+                  <a:srgbClr val="626669"/>
+                </a:solidFill>
+                <a:latin typeface="Noto Sans"/>
+                <a:ea typeface="Noto Sans CJK JP"/>
+                <a:cs typeface="Noto Sans"/>
+              </a:rPr>
+              <a:t/>
+            </a:r>
+            <a:r>
+              <a:rPr sz="810" b="0" lang="ja-JP" altLang="en-US">
+                <a:solidFill>
+                  <a:srgbClr val="626669"/>
+                </a:solidFill>
+                <a:latin typeface="Noto Sans"/>
+                <a:ea typeface="Noto Sans CJK JP"/>
+                <a:cs typeface="Noto Sans"/>
+              </a:rPr>
+              <a:t>Scale AI. MCP-Atlas / 公開train。課題6886306b5ed4da6b2c381175。CC BY 4.0。</a:t>
+            </a:r>
+            <a:r>
+              <a:rPr sz="810" b="0" lang="ja-JP" altLang="en-US">
+                <a:solidFill>
+                  <a:srgbClr val="626669"/>
+                </a:solidFill>
+                <a:latin typeface="Noto Sans"/>
+                <a:ea typeface="Noto Sans CJK JP"/>
+                <a:cs typeface="Noto Sans"/>
+              </a:rPr>
+              <a:t>  </a:t>
+            </a:r>
+            <a:r>
+              <a:rPr sz="810" b="0" lang="ja-JP" altLang="en-US">
+                <a:solidFill>
+                  <a:srgbClr val="626669"/>
+                </a:solidFill>
+                <a:latin typeface="Noto Sans"/>
+                <a:ea typeface="Noto Sans CJK JP"/>
+                <a:cs typeface="Noto Sans"/>
+                <a:hlinkClick r:id="rId2"/>
+              </a:rPr>
+              <a:t>https://huggingface.co/datasets/ScaleAI/MCP-Atlas/viewer/default/train?row=477</a:t>
+            </a:r>
+          </a:p>
+        </p:txBody>
+      </p:sp>
+    </p:spTree>
+  </p:cSld>
+  <p:clrMapOvr>
+    <a:masterClrMapping/>
+  </p:clrMapOvr>
+</p:sld>
+</file>
+
+<file path=ppt/slides/slide56.xml><?xml version="1.0" encoding="utf-8"?>
+<p:sld xmlns:a="http://schemas.openxmlformats.org/drawingml/2006/main" xmlns:p="http://schemas.openxmlformats.org/presentationml/2006/main" xmlns:r="http://schemas.openxmlformats.org/officeDocument/2006/relationships">
+  <p:cSld>
+    <p:spTree>
+      <p:nvGrpSpPr>
+        <p:cNvPr id="1" name=""/>
+        <p:cNvGrpSpPr/>
+        <p:nvPr/>
+      </p:nvGrpSpPr>
+      <p:grpSpPr/>
+      <p:sp>
+        <p:nvSpPr>
+          <p:cNvPr id="2" name="Title 1"/>
+          <p:cNvSpPr>
+            <a:spLocks noGrp="1"/>
+          </p:cNvSpPr>
+          <p:nvPr>
+            <p:ph type="title"/>
+          </p:nvPr>
+        </p:nvSpPr>
+        <p:spPr>
+          <a:xfrm>
+            <a:off x="548640" y="786384"/>
+            <a:ext cx="8046720" cy="502920"/>
+          </a:xfrm>
+        </p:spPr>
+        <p:txBody>
+          <a:bodyPr wrap="square" lIns="0" rIns="0" tIns="0" bIns="0">
+            <a:noAutofit/>
+          </a:bodyPr>
+          <a:lstStyle/>
+          <a:p>
+            <a:pPr algn="l">
+              <a:lnSpc>
+                <a:spcPct val="110000"/>
+              </a:lnSpc>
+              <a:buNone/>
+              <a:defRPr sz="2800" b="0">
+                <a:solidFill>
+                  <a:srgbClr val="303437"/>
+                </a:solidFill>
+                <a:latin typeface="Noto Sans"/>
+              </a:defRPr>
+            </a:pPr>
+            <a:r>
+              <a:rPr sz="2800" b="1" lang="ja-JP" altLang="en-US">
+                <a:solidFill>
+                  <a:srgbClr val="303437"/>
+                </a:solidFill>
+                <a:latin typeface="Noto Sans"/>
+                <a:ea typeface="Noto Sans CJK JP"/>
+                <a:cs typeface="Noto Sans"/>
+              </a:rPr>
               <a:t>36サーバーのうち、検索系は多くの課題で使う</a:t>
             </a:r>
           </a:p>
@@ -20968,7 +27256,7 @@
 </p:sld>
 </file>
 
-<file path=ppt/slides/slide39.xml><?xml version="1.0" encoding="utf-8"?>
+<file path=ppt/slides/slide57.xml><?xml version="1.0" encoding="utf-8"?>
 <p:sld xmlns:a="http://schemas.openxmlformats.org/drawingml/2006/main" xmlns:p="http://schemas.openxmlformats.org/presentationml/2006/main" xmlns:r="http://schemas.openxmlformats.org/officeDocument/2006/relationships">
   <p:cSld>
     <p:spTree>
@@ -21965,121 +28253,7 @@
 </p:sld>
 </file>
 
-<file path=ppt/slides/slide4.xml><?xml version="1.0" encoding="utf-8"?>
-<p:sld xmlns:a="http://schemas.openxmlformats.org/drawingml/2006/main" xmlns:p="http://schemas.openxmlformats.org/presentationml/2006/main" xmlns:r="http://schemas.openxmlformats.org/officeDocument/2006/relationships">
-  <p:cSld>
-    <p:spTree>
-      <p:nvGrpSpPr>
-        <p:cNvPr id="1" name=""/>
-        <p:cNvGrpSpPr/>
-        <p:nvPr/>
-      </p:nvGrpSpPr>
-      <p:grpSpPr/>
-      <p:sp>
-        <p:nvSpPr>
-          <p:cNvPr id="2" name="Title 1"/>
-          <p:cNvSpPr>
-            <a:spLocks noGrp="1"/>
-          </p:cNvSpPr>
-          <p:nvPr>
-            <p:ph type="title"/>
-          </p:nvPr>
-        </p:nvSpPr>
-        <p:spPr>
-          <a:xfrm>
-            <a:off x="548640" y="2388106"/>
-            <a:ext cx="8046720" cy="822960"/>
-          </a:xfrm>
-        </p:spPr>
-        <p:txBody>
-          <a:bodyPr wrap="square" lIns="0" rIns="0" tIns="0" bIns="0" anchor="ctr">
-            <a:noAutofit/>
-          </a:bodyPr>
-          <a:lstStyle/>
-          <a:p>
-            <a:pPr algn="ctr">
-              <a:lnSpc>
-                <a:spcPct val="110000"/>
-              </a:lnSpc>
-              <a:buNone/>
-              <a:defRPr sz="3100" b="0">
-                <a:solidFill>
-                  <a:srgbClr val="303437"/>
-                </a:solidFill>
-                <a:latin typeface="Noto Sans"/>
-              </a:defRPr>
-            </a:pPr>
-            <a:r>
-              <a:rPr sz="3100" b="1" lang="ja-JP" altLang="en-US">
-                <a:solidFill>
-                  <a:srgbClr val="303437"/>
-                </a:solidFill>
-                <a:latin typeface="Noto Sans"/>
-                <a:ea typeface="Noto Sans CJK JP"/>
-                <a:cs typeface="Noto Sans"/>
-              </a:rPr>
-              <a:t>1. 複数ツールを使う仕事と実例</a:t>
-            </a:r>
-          </a:p>
-        </p:txBody>
-      </p:sp>
-      <p:sp>
-        <p:nvSpPr>
-          <p:cNvPr id="3" name="Title 2"/>
-          <p:cNvSpPr>
-            <a:spLocks noGrp="1"/>
-          </p:cNvSpPr>
-          <p:nvPr>
-            <p:ph type="title" idx="2"/>
-          </p:nvPr>
-        </p:nvSpPr>
-        <p:spPr>
-          <a:xfrm>
-            <a:off x="75895" y="0"/>
-            <a:ext cx="8115300" cy="480060"/>
-          </a:xfrm>
-        </p:spPr>
-        <p:txBody>
-          <a:bodyPr wrap="square" lIns="0" rIns="0" tIns="0" bIns="0" anchor="ctr">
-            <a:noAutofit/>
-          </a:bodyPr>
-          <a:lstStyle/>
-          <a:p>
-            <a:pPr algn="l">
-              <a:lnSpc>
-                <a:spcPct val="110000"/>
-              </a:lnSpc>
-              <a:buNone/>
-              <a:defRPr sz="1400" b="0">
-                <a:solidFill>
-                  <a:srgbClr val="303437"/>
-                </a:solidFill>
-                <a:latin typeface="Noto Sans"/>
-              </a:defRPr>
-            </a:pPr>
-            <a:r>
-              <a:rPr sz="1400" b="1" lang="ja-JP" altLang="en-US">
-                <a:solidFill>
-                  <a:srgbClr val="FFFFFF"/>
-                </a:solidFill>
-                <a:latin typeface="Noto Sans"/>
-                <a:ea typeface="Noto Sans CJK JP"/>
-                <a:cs typeface="Noto Sans"/>
-              </a:rPr>
-              <a:t>1. 複数ツールを使う仕事と実例</a:t>
-            </a:r>
-          </a:p>
-        </p:txBody>
-      </p:sp>
-    </p:spTree>
-  </p:cSld>
-  <p:clrMapOvr>
-    <a:masterClrMapping/>
-  </p:clrMapOvr>
-</p:sld>
-</file>
-
-<file path=ppt/slides/slide40.xml><?xml version="1.0" encoding="utf-8"?>
+<file path=ppt/slides/slide58.xml><?xml version="1.0" encoding="utf-8"?>
 <p:sld xmlns:a="http://schemas.openxmlformats.org/drawingml/2006/main" xmlns:p="http://schemas.openxmlformats.org/presentationml/2006/main" xmlns:r="http://schemas.openxmlformats.org/officeDocument/2006/relationships">
   <p:cSld>
     <p:spTree>
@@ -22839,7 +29013,7 @@
 </p:sld>
 </file>
 
-<file path=ppt/slides/slide41.xml><?xml version="1.0" encoding="utf-8"?>
+<file path=ppt/slides/slide59.xml><?xml version="1.0" encoding="utf-8"?>
 <p:sld xmlns:a="http://schemas.openxmlformats.org/drawingml/2006/main" xmlns:p="http://schemas.openxmlformats.org/presentationml/2006/main" xmlns:r="http://schemas.openxmlformats.org/officeDocument/2006/relationships">
   <p:cSld>
     <p:spTree>
@@ -23905,7 +30079,750 @@
 </p:sld>
 </file>
 
-<file path=ppt/slides/slide42.xml><?xml version="1.0" encoding="utf-8"?>
+<file path=ppt/slides/slide6.xml><?xml version="1.0" encoding="utf-8"?>
+<p:sld xmlns:a="http://schemas.openxmlformats.org/drawingml/2006/main" xmlns:p="http://schemas.openxmlformats.org/presentationml/2006/main" xmlns:r="http://schemas.openxmlformats.org/officeDocument/2006/relationships">
+  <p:cSld>
+    <p:spTree>
+      <p:nvGrpSpPr>
+        <p:cNvPr id="1" name=""/>
+        <p:cNvGrpSpPr/>
+        <p:nvPr/>
+      </p:nvGrpSpPr>
+      <p:grpSpPr/>
+      <p:sp>
+        <p:nvSpPr>
+          <p:cNvPr id="2" name="Title 1"/>
+          <p:cNvSpPr>
+            <a:spLocks noGrp="1"/>
+          </p:cNvSpPr>
+          <p:nvPr>
+            <p:ph type="title"/>
+          </p:nvPr>
+        </p:nvSpPr>
+        <p:spPr>
+          <a:xfrm>
+            <a:off x="548640" y="786384"/>
+            <a:ext cx="8046720" cy="502920"/>
+          </a:xfrm>
+        </p:spPr>
+        <p:txBody>
+          <a:bodyPr wrap="square" lIns="0" rIns="0" tIns="0" bIns="0">
+            <a:noAutofit/>
+          </a:bodyPr>
+          <a:lstStyle/>
+          <a:p>
+            <a:pPr algn="l">
+              <a:lnSpc>
+                <a:spcPct val="110000"/>
+              </a:lnSpc>
+              <a:buNone/>
+              <a:defRPr sz="2800" b="0">
+                <a:solidFill>
+                  <a:srgbClr val="303437"/>
+                </a:solidFill>
+                <a:latin typeface="Noto Sans"/>
+              </a:defRPr>
+            </a:pPr>
+            <a:r>
+              <a:rPr sz="2800" b="1" lang="ja-JP" altLang="en-US">
+                <a:solidFill>
+                  <a:srgbClr val="303437"/>
+                </a:solidFill>
+                <a:latin typeface="Noto Sans"/>
+                <a:ea typeface="Noto Sans CJK JP"/>
+                <a:cs typeface="Noto Sans"/>
+              </a:rPr>
+              <a:t>一つの依頼から、ツールを使って回答を作る</a:t>
+            </a:r>
+          </a:p>
+        </p:txBody>
+      </p:sp>
+      <p:sp>
+        <p:nvSpPr>
+          <p:cNvPr id="3" name="Title 2"/>
+          <p:cNvSpPr>
+            <a:spLocks noGrp="1"/>
+          </p:cNvSpPr>
+          <p:nvPr>
+            <p:ph type="title" idx="2"/>
+          </p:nvPr>
+        </p:nvSpPr>
+        <p:spPr>
+          <a:xfrm>
+            <a:off x="75895" y="0"/>
+            <a:ext cx="8115300" cy="480060"/>
+          </a:xfrm>
+        </p:spPr>
+        <p:txBody>
+          <a:bodyPr wrap="square" lIns="0" rIns="0" tIns="0" bIns="0" anchor="ctr">
+            <a:noAutofit/>
+          </a:bodyPr>
+          <a:lstStyle/>
+          <a:p>
+            <a:pPr algn="l">
+              <a:lnSpc>
+                <a:spcPct val="110000"/>
+              </a:lnSpc>
+              <a:buNone/>
+              <a:defRPr sz="1400" b="0">
+                <a:solidFill>
+                  <a:srgbClr val="303437"/>
+                </a:solidFill>
+                <a:latin typeface="Noto Sans"/>
+              </a:defRPr>
+            </a:pPr>
+            <a:r>
+              <a:rPr sz="1400" b="1" lang="ja-JP" altLang="en-US">
+                <a:solidFill>
+                  <a:srgbClr val="FFFFFF"/>
+                </a:solidFill>
+                <a:latin typeface="Noto Sans"/>
+                <a:ea typeface="Noto Sans CJK JP"/>
+                <a:cs typeface="Noto Sans"/>
+              </a:rPr>
+              <a:t>1. 複数ツールを使う仕事と実例</a:t>
+            </a:r>
+          </a:p>
+        </p:txBody>
+      </p:sp>
+      <p:graphicFrame>
+        <p:nvGraphicFramePr>
+          <p:cNvPr id="4" name="Table 3"/>
+          <p:cNvGraphicFramePr>
+            <a:graphicFrameLocks noGrp="1"/>
+          </p:cNvGraphicFramePr>
+          <p:nvPr/>
+        </p:nvGraphicFramePr>
+        <p:xfrm>
+          <a:off x="548640" y="1508760"/>
+          <a:ext cx="8046720" cy="1901952"/>
+        </p:xfrm>
+        <a:graphic>
+          <a:graphicData uri="http://schemas.openxmlformats.org/drawingml/2006/table">
+            <a:tbl>
+              <a:tblPr firstRow="0" bandRow="0"/>
+              <a:tblGrid>
+                <a:gridCol w="1280160"/>
+                <a:gridCol w="6766560"/>
+              </a:tblGrid>
+              <a:tr h="475488">
+                <a:tc>
+                  <a:txBody>
+                    <a:bodyPr wrap="square">
+                      <a:noAutofit/>
+                    </a:bodyPr>
+                    <a:lstStyle/>
+                    <a:p>
+                      <a:pPr algn="l">
+                        <a:lnSpc>
+                          <a:spcPts val="2300"/>
+                        </a:lnSpc>
+                        <a:buNone/>
+                        <a:defRPr sz="2000" b="0">
+                          <a:solidFill>
+                            <a:srgbClr val="303437"/>
+                          </a:solidFill>
+                          <a:latin typeface="Noto Sans"/>
+                        </a:defRPr>
+                      </a:pPr>
+                      <a:r>
+                        <a:rPr sz="2000" b="0" lang="ja-JP" altLang="en-US">
+                          <a:solidFill>
+                            <a:srgbClr val="303437"/>
+                          </a:solidFill>
+                          <a:latin typeface="Noto Sans"/>
+                          <a:ea typeface="Noto Sans CJK JP"/>
+                          <a:cs typeface="Noto Sans"/>
+                        </a:rPr>
+                        <a:t>段階</a:t>
+                      </a:r>
+                    </a:p>
+                  </a:txBody>
+                  <a:tcPr marL="63500" marR="63500" marT="38100" marB="38100" anchor="ctr">
+                    <a:lnL w="7620">
+                      <a:noFill/>
+                    </a:lnL>
+                    <a:lnR w="7620">
+                      <a:noFill/>
+                    </a:lnR>
+                    <a:lnT w="15240">
+                      <a:solidFill>
+                        <a:srgbClr val="626669"/>
+                      </a:solidFill>
+                      <a:prstDash val="solid"/>
+                    </a:lnT>
+                    <a:lnB w="7620">
+                      <a:solidFill>
+                        <a:srgbClr val="626669"/>
+                      </a:solidFill>
+                      <a:prstDash val="solid"/>
+                    </a:lnB>
+                    <a:solidFill>
+                      <a:srgbClr val="FFFEF8"/>
+                    </a:solidFill>
+                  </a:tcPr>
+                </a:tc>
+                <a:tc>
+                  <a:txBody>
+                    <a:bodyPr wrap="square">
+                      <a:noAutofit/>
+                    </a:bodyPr>
+                    <a:lstStyle/>
+                    <a:p>
+                      <a:pPr algn="l">
+                        <a:lnSpc>
+                          <a:spcPts val="2300"/>
+                        </a:lnSpc>
+                        <a:buNone/>
+                        <a:defRPr sz="2000" b="0">
+                          <a:solidFill>
+                            <a:srgbClr val="303437"/>
+                          </a:solidFill>
+                          <a:latin typeface="Noto Sans"/>
+                        </a:defRPr>
+                      </a:pPr>
+                      <a:r>
+                        <a:rPr sz="2000" b="0" lang="ja-JP" altLang="en-US">
+                          <a:solidFill>
+                            <a:srgbClr val="303437"/>
+                          </a:solidFill>
+                          <a:latin typeface="Noto Sans"/>
+                          <a:ea typeface="Noto Sans CJK JP"/>
+                          <a:cs typeface="Noto Sans"/>
+                        </a:rPr>
+                        <a:t>エージェントが扱うもの</a:t>
+                      </a:r>
+                    </a:p>
+                  </a:txBody>
+                  <a:tcPr marL="63500" marR="63500" marT="38100" marB="38100" anchor="ctr">
+                    <a:lnL w="7620">
+                      <a:noFill/>
+                    </a:lnL>
+                    <a:lnR w="7620">
+                      <a:noFill/>
+                    </a:lnR>
+                    <a:lnT w="15240">
+                      <a:solidFill>
+                        <a:srgbClr val="626669"/>
+                      </a:solidFill>
+                      <a:prstDash val="solid"/>
+                    </a:lnT>
+                    <a:lnB w="7620">
+                      <a:solidFill>
+                        <a:srgbClr val="626669"/>
+                      </a:solidFill>
+                      <a:prstDash val="solid"/>
+                    </a:lnB>
+                    <a:solidFill>
+                      <a:srgbClr val="FFFEF8"/>
+                    </a:solidFill>
+                  </a:tcPr>
+                </a:tc>
+              </a:tr>
+              <a:tr h="475488">
+                <a:tc>
+                  <a:txBody>
+                    <a:bodyPr wrap="square">
+                      <a:noAutofit/>
+                    </a:bodyPr>
+                    <a:lstStyle/>
+                    <a:p>
+                      <a:pPr algn="l">
+                        <a:lnSpc>
+                          <a:spcPts val="2300"/>
+                        </a:lnSpc>
+                        <a:buNone/>
+                        <a:defRPr sz="2000" b="0">
+                          <a:solidFill>
+                            <a:srgbClr val="303437"/>
+                          </a:solidFill>
+                          <a:latin typeface="Noto Sans"/>
+                        </a:defRPr>
+                      </a:pPr>
+                      <a:r>
+                        <a:rPr sz="2000" b="0" lang="ja-JP" altLang="en-US">
+                          <a:solidFill>
+                            <a:srgbClr val="303437"/>
+                          </a:solidFill>
+                          <a:latin typeface="Noto Sans"/>
+                          <a:ea typeface="Noto Sans CJK JP"/>
+                          <a:cs typeface="Noto Sans"/>
+                        </a:rPr>
+                        <a:t>入力</a:t>
+                      </a:r>
+                    </a:p>
+                  </a:txBody>
+                  <a:tcPr marL="63500" marR="63500" marT="38100" marB="38100" anchor="ctr">
+                    <a:lnL w="7620">
+                      <a:noFill/>
+                    </a:lnL>
+                    <a:lnR w="7620">
+                      <a:noFill/>
+                    </a:lnR>
+                    <a:lnT w="7620">
+                      <a:solidFill>
+                        <a:srgbClr val="626669"/>
+                      </a:solidFill>
+                      <a:prstDash val="solid"/>
+                    </a:lnT>
+                    <a:lnB w="7620">
+                      <a:noFill/>
+                    </a:lnB>
+                    <a:solidFill>
+                      <a:srgbClr val="FFFEF8"/>
+                    </a:solidFill>
+                  </a:tcPr>
+                </a:tc>
+                <a:tc>
+                  <a:txBody>
+                    <a:bodyPr wrap="square">
+                      <a:noAutofit/>
+                    </a:bodyPr>
+                    <a:lstStyle/>
+                    <a:p>
+                      <a:pPr algn="l">
+                        <a:lnSpc>
+                          <a:spcPts val="2300"/>
+                        </a:lnSpc>
+                        <a:buNone/>
+                        <a:defRPr sz="2000" b="0">
+                          <a:solidFill>
+                            <a:srgbClr val="303437"/>
+                          </a:solidFill>
+                          <a:latin typeface="Noto Sans"/>
+                        </a:defRPr>
+                      </a:pPr>
+                      <a:r>
+                        <a:rPr sz="2000" b="0" lang="ja-JP" altLang="en-US">
+                          <a:solidFill>
+                            <a:srgbClr val="303437"/>
+                          </a:solidFill>
+                          <a:latin typeface="Noto Sans"/>
+                          <a:ea typeface="Noto Sans CJK JP"/>
+                          <a:cs typeface="Noto Sans"/>
+                        </a:rPr>
+                        <a:t>利用者の依頼と、使えるツールの説明</a:t>
+                      </a:r>
+                    </a:p>
+                  </a:txBody>
+                  <a:tcPr marL="63500" marR="63500" marT="38100" marB="38100" anchor="ctr">
+                    <a:lnL w="7620">
+                      <a:noFill/>
+                    </a:lnL>
+                    <a:lnR w="7620">
+                      <a:noFill/>
+                    </a:lnR>
+                    <a:lnT w="7620">
+                      <a:solidFill>
+                        <a:srgbClr val="626669"/>
+                      </a:solidFill>
+                      <a:prstDash val="solid"/>
+                    </a:lnT>
+                    <a:lnB w="7620">
+                      <a:noFill/>
+                    </a:lnB>
+                    <a:solidFill>
+                      <a:srgbClr val="FFFEF8"/>
+                    </a:solidFill>
+                  </a:tcPr>
+                </a:tc>
+              </a:tr>
+              <a:tr h="475488">
+                <a:tc>
+                  <a:txBody>
+                    <a:bodyPr wrap="square">
+                      <a:noAutofit/>
+                    </a:bodyPr>
+                    <a:lstStyle/>
+                    <a:p>
+                      <a:pPr algn="l">
+                        <a:lnSpc>
+                          <a:spcPts val="2300"/>
+                        </a:lnSpc>
+                        <a:buNone/>
+                        <a:defRPr sz="2000" b="0">
+                          <a:solidFill>
+                            <a:srgbClr val="303437"/>
+                          </a:solidFill>
+                          <a:latin typeface="Noto Sans"/>
+                        </a:defRPr>
+                      </a:pPr>
+                      <a:r>
+                        <a:rPr sz="2000" b="0" lang="ja-JP" altLang="en-US">
+                          <a:solidFill>
+                            <a:srgbClr val="303437"/>
+                          </a:solidFill>
+                          <a:latin typeface="Noto Sans"/>
+                          <a:ea typeface="Noto Sans CJK JP"/>
+                          <a:cs typeface="Noto Sans"/>
+                        </a:rPr>
+                        <a:t>実行</a:t>
+                      </a:r>
+                    </a:p>
+                  </a:txBody>
+                  <a:tcPr marL="63500" marR="63500" marT="38100" marB="38100" anchor="ctr">
+                    <a:lnL w="7620">
+                      <a:noFill/>
+                    </a:lnL>
+                    <a:lnR w="7620">
+                      <a:noFill/>
+                    </a:lnR>
+                    <a:lnT w="7620">
+                      <a:noFill/>
+                    </a:lnT>
+                    <a:lnB w="7620">
+                      <a:noFill/>
+                    </a:lnB>
+                    <a:solidFill>
+                      <a:srgbClr val="FFFEF8"/>
+                    </a:solidFill>
+                  </a:tcPr>
+                </a:tc>
+                <a:tc>
+                  <a:txBody>
+                    <a:bodyPr wrap="square">
+                      <a:noAutofit/>
+                    </a:bodyPr>
+                    <a:lstStyle/>
+                    <a:p>
+                      <a:pPr algn="l">
+                        <a:lnSpc>
+                          <a:spcPts val="2300"/>
+                        </a:lnSpc>
+                        <a:buNone/>
+                        <a:defRPr sz="2000" b="0">
+                          <a:solidFill>
+                            <a:srgbClr val="303437"/>
+                          </a:solidFill>
+                          <a:latin typeface="Noto Sans"/>
+                        </a:defRPr>
+                      </a:pPr>
+                      <a:r>
+                        <a:rPr sz="2000" b="0" lang="ja-JP" altLang="en-US">
+                          <a:solidFill>
+                            <a:srgbClr val="303437"/>
+                          </a:solidFill>
+                          <a:latin typeface="Noto Sans"/>
+                          <a:ea typeface="Noto Sans CJK JP"/>
+                          <a:cs typeface="Noto Sans"/>
+                        </a:rPr>
+                        <a:t>ツール名・引数を選び、返った情報を次の操作に使う</a:t>
+                      </a:r>
+                    </a:p>
+                  </a:txBody>
+                  <a:tcPr marL="63500" marR="63500" marT="38100" marB="38100" anchor="ctr">
+                    <a:lnL w="7620">
+                      <a:noFill/>
+                    </a:lnL>
+                    <a:lnR w="7620">
+                      <a:noFill/>
+                    </a:lnR>
+                    <a:lnT w="7620">
+                      <a:noFill/>
+                    </a:lnT>
+                    <a:lnB w="7620">
+                      <a:noFill/>
+                    </a:lnB>
+                    <a:solidFill>
+                      <a:srgbClr val="FFFEF8"/>
+                    </a:solidFill>
+                  </a:tcPr>
+                </a:tc>
+              </a:tr>
+              <a:tr h="475488">
+                <a:tc>
+                  <a:txBody>
+                    <a:bodyPr wrap="square">
+                      <a:noAutofit/>
+                    </a:bodyPr>
+                    <a:lstStyle/>
+                    <a:p>
+                      <a:pPr algn="l">
+                        <a:lnSpc>
+                          <a:spcPts val="2300"/>
+                        </a:lnSpc>
+                        <a:buNone/>
+                        <a:defRPr sz="2000" b="0">
+                          <a:solidFill>
+                            <a:srgbClr val="303437"/>
+                          </a:solidFill>
+                          <a:latin typeface="Noto Sans"/>
+                        </a:defRPr>
+                      </a:pPr>
+                      <a:r>
+                        <a:rPr sz="2000" b="0" lang="ja-JP" altLang="en-US">
+                          <a:solidFill>
+                            <a:srgbClr val="303437"/>
+                          </a:solidFill>
+                          <a:latin typeface="Noto Sans"/>
+                          <a:ea typeface="Noto Sans CJK JP"/>
+                          <a:cs typeface="Noto Sans"/>
+                        </a:rPr>
+                        <a:t>出力</a:t>
+                      </a:r>
+                    </a:p>
+                  </a:txBody>
+                  <a:tcPr marL="63500" marR="63500" marT="38100" marB="38100" anchor="ctr">
+                    <a:lnL w="7620">
+                      <a:noFill/>
+                    </a:lnL>
+                    <a:lnR w="7620">
+                      <a:noFill/>
+                    </a:lnR>
+                    <a:lnT w="7620">
+                      <a:noFill/>
+                    </a:lnT>
+                    <a:lnB w="15240">
+                      <a:solidFill>
+                        <a:srgbClr val="626669"/>
+                      </a:solidFill>
+                      <a:prstDash val="solid"/>
+                    </a:lnB>
+                    <a:solidFill>
+                      <a:srgbClr val="FFFEF8"/>
+                    </a:solidFill>
+                  </a:tcPr>
+                </a:tc>
+                <a:tc>
+                  <a:txBody>
+                    <a:bodyPr wrap="square">
+                      <a:noAutofit/>
+                    </a:bodyPr>
+                    <a:lstStyle/>
+                    <a:p>
+                      <a:pPr algn="l">
+                        <a:lnSpc>
+                          <a:spcPts val="2300"/>
+                        </a:lnSpc>
+                        <a:buNone/>
+                        <a:defRPr sz="2000" b="0">
+                          <a:solidFill>
+                            <a:srgbClr val="303437"/>
+                          </a:solidFill>
+                          <a:latin typeface="Noto Sans"/>
+                        </a:defRPr>
+                      </a:pPr>
+                      <a:r>
+                        <a:rPr sz="2000" b="0" lang="ja-JP" altLang="en-US">
+                          <a:solidFill>
+                            <a:srgbClr val="303437"/>
+                          </a:solidFill>
+                          <a:latin typeface="Noto Sans"/>
+                          <a:ea typeface="Noto Sans CJK JP"/>
+                          <a:cs typeface="Noto Sans"/>
+                        </a:rPr>
+                        <a:t>依頼に必要な事実を含む最終回答</a:t>
+                      </a:r>
+                    </a:p>
+                  </a:txBody>
+                  <a:tcPr marL="63500" marR="63500" marT="38100" marB="38100" anchor="ctr">
+                    <a:lnL w="7620">
+                      <a:noFill/>
+                    </a:lnL>
+                    <a:lnR w="7620">
+                      <a:noFill/>
+                    </a:lnR>
+                    <a:lnT w="7620">
+                      <a:noFill/>
+                    </a:lnT>
+                    <a:lnB w="15240">
+                      <a:solidFill>
+                        <a:srgbClr val="626669"/>
+                      </a:solidFill>
+                      <a:prstDash val="solid"/>
+                    </a:lnB>
+                    <a:solidFill>
+                      <a:srgbClr val="FFFEF8"/>
+                    </a:solidFill>
+                  </a:tcPr>
+                </a:tc>
+              </a:tr>
+            </a:tbl>
+          </a:graphicData>
+        </a:graphic>
+      </p:graphicFrame>
+      <p:sp>
+        <p:nvSpPr>
+          <p:cNvPr id="5" name="TextBox 4"/>
+          <p:cNvSpPr txBox="1"/>
+          <p:nvPr/>
+        </p:nvSpPr>
+        <p:spPr>
+          <a:xfrm>
+            <a:off x="594360" y="3602736"/>
+            <a:ext cx="7955279" cy="685800"/>
+          </a:xfrm>
+          <a:prstGeom prst="rect">
+            <a:avLst/>
+          </a:prstGeom>
+          <a:noFill/>
+        </p:spPr>
+        <p:txBody>
+          <a:bodyPr wrap="square" lIns="0" rIns="0" tIns="0" bIns="0">
+            <a:noAutofit/>
+          </a:bodyPr>
+          <a:lstStyle/>
+          <a:p>
+            <a:pPr algn="l">
+              <a:lnSpc>
+                <a:spcPts val="2160"/>
+              </a:lnSpc>
+              <a:spcBef>
+                <a:spcPts val="0"/>
+              </a:spcBef>
+              <a:spcAft>
+                <a:spcPts val="0"/>
+              </a:spcAft>
+              <a:buNone/>
+              <a:defRPr sz="1800" b="0">
+                <a:solidFill>
+                  <a:srgbClr val="303437"/>
+                </a:solidFill>
+                <a:latin typeface="Noto Sans"/>
+              </a:defRPr>
+            </a:pPr>
+            <a:r>
+              <a:rPr sz="1800" b="0" lang="ja-JP" altLang="en-US">
+                <a:solidFill>
+                  <a:srgbClr val="303437"/>
+                </a:solidFill>
+                <a:latin typeface="Noto Sans"/>
+                <a:ea typeface="Noto Sans CJK JP"/>
+                <a:cs typeface="Noto Sans"/>
+              </a:rPr>
+              <a:t>各課題には6〜37のツールを提示する。</a:t>
+            </a:r>
+          </a:p>
+          <a:p>
+            <a:pPr algn="l">
+              <a:lnSpc>
+                <a:spcPts val="2160"/>
+              </a:lnSpc>
+              <a:spcBef>
+                <a:spcPts val="0"/>
+              </a:spcBef>
+              <a:spcAft>
+                <a:spcPts val="0"/>
+              </a:spcAft>
+              <a:buNone/>
+              <a:defRPr sz="1800" b="0">
+                <a:solidFill>
+                  <a:srgbClr val="303437"/>
+                </a:solidFill>
+                <a:latin typeface="Noto Sans"/>
+              </a:defRPr>
+            </a:pPr>
+            <a:r>
+              <a:rPr sz="1800" b="0" lang="ja-JP" altLang="en-US">
+                <a:solidFill>
+                  <a:srgbClr val="303437"/>
+                </a:solidFill>
+                <a:latin typeface="Noto Sans"/>
+                <a:ea typeface="Noto Sans CJK JP"/>
+                <a:cs typeface="Noto Sans"/>
+              </a:rPr>
+              <a:t>正解に必要なものは2〜8で、似た用途の候補も混ぜる。</a:t>
+            </a:r>
+          </a:p>
+        </p:txBody>
+      </p:sp>
+      <p:sp>
+        <p:nvSpPr>
+          <p:cNvPr id="6" name="TextBox 5"/>
+          <p:cNvSpPr txBox="1"/>
+          <p:nvPr/>
+        </p:nvSpPr>
+        <p:spPr>
+          <a:xfrm>
+            <a:off x="502920" y="4690872"/>
+            <a:ext cx="8183879" cy="393192"/>
+          </a:xfrm>
+          <a:prstGeom prst="rect">
+            <a:avLst/>
+          </a:prstGeom>
+          <a:noFill/>
+        </p:spPr>
+        <p:txBody>
+          <a:bodyPr wrap="square" lIns="0" rIns="0" tIns="0" bIns="0">
+            <a:noAutofit/>
+          </a:bodyPr>
+          <a:lstStyle/>
+          <a:p>
+            <a:pPr algn="l">
+              <a:lnSpc>
+                <a:spcPct val="112000"/>
+              </a:lnSpc>
+              <a:spcBef>
+                <a:spcPts val="0"/>
+              </a:spcBef>
+              <a:spcAft>
+                <a:spcPts val="0"/>
+              </a:spcAft>
+              <a:buNone/>
+              <a:defRPr sz="810" b="0">
+                <a:solidFill>
+                  <a:srgbClr val="303437"/>
+                </a:solidFill>
+                <a:latin typeface="Noto Sans"/>
+              </a:defRPr>
+            </a:pPr>
+            <a:r>
+              <a:rPr sz="810" b="0" lang="ja-JP" altLang="en-US">
+                <a:solidFill>
+                  <a:srgbClr val="626669"/>
+                </a:solidFill>
+                <a:latin typeface="Noto Sans"/>
+                <a:ea typeface="Noto Sans CJK JP"/>
+                <a:cs typeface="Noto Sans"/>
+              </a:rPr>
+              <a:t/>
+            </a:r>
+            <a:r>
+              <a:rPr sz="810" b="0" lang="ja-JP" altLang="en-US">
+                <a:solidFill>
+                  <a:srgbClr val="626669"/>
+                </a:solidFill>
+                <a:latin typeface="Noto Sans"/>
+                <a:ea typeface="Noto Sans CJK JP"/>
+                <a:cs typeface="Noto Sans"/>
+              </a:rPr>
+              <a:t>Bandi, Dumitru et al. (2026). MCP-Atlas: A Large-Scale Benchmark for Tool-Use Competency with Real MCP Servers. 論文v3。</a:t>
+            </a:r>
+            <a:r>
+              <a:rPr sz="810" b="0" lang="ja-JP" altLang="en-US">
+                <a:solidFill>
+                  <a:srgbClr val="626669"/>
+                </a:solidFill>
+                <a:latin typeface="Noto Sans"/>
+                <a:ea typeface="Noto Sans CJK JP"/>
+                <a:cs typeface="Noto Sans"/>
+              </a:rPr>
+              <a:t>  </a:t>
+            </a:r>
+            <a:r>
+              <a:rPr sz="810" b="0" lang="ja-JP" altLang="en-US">
+                <a:solidFill>
+                  <a:srgbClr val="626669"/>
+                </a:solidFill>
+                <a:latin typeface="Noto Sans"/>
+                <a:ea typeface="Noto Sans CJK JP"/>
+                <a:cs typeface="Noto Sans"/>
+                <a:hlinkClick r:id="rId2"/>
+              </a:rPr>
+              <a:t>https://arxiv.org/abs/2602.00933v3</a:t>
+            </a:r>
+          </a:p>
+        </p:txBody>
+      </p:sp>
+    </p:spTree>
+  </p:cSld>
+  <p:clrMapOvr>
+    <a:masterClrMapping/>
+  </p:clrMapOvr>
+</p:sld>
+</file>
+
+<file path=ppt/slides/slide60.xml><?xml version="1.0" encoding="utf-8"?>
 <p:sld xmlns:a="http://schemas.openxmlformats.org/drawingml/2006/main" xmlns:p="http://schemas.openxmlformats.org/presentationml/2006/main" xmlns:r="http://schemas.openxmlformats.org/officeDocument/2006/relationships">
   <p:cSld>
     <p:spTree>
@@ -24019,7 +30936,7 @@
 </p:sld>
 </file>
 
-<file path=ppt/slides/slide43.xml><?xml version="1.0" encoding="utf-8"?>
+<file path=ppt/slides/slide61.xml><?xml version="1.0" encoding="utf-8"?>
 <p:sld xmlns:a="http://schemas.openxmlformats.org/drawingml/2006/main" xmlns:p="http://schemas.openxmlformats.org/presentationml/2006/main" xmlns:r="http://schemas.openxmlformats.org/officeDocument/2006/relationships">
   <p:cSld>
     <p:spTree>
@@ -25188,7 +32105,7 @@
 </p:sld>
 </file>
 
-<file path=ppt/slides/slide44.xml><?xml version="1.0" encoding="utf-8"?>
+<file path=ppt/slides/slide62.xml><?xml version="1.0" encoding="utf-8"?>
 <p:sld xmlns:a="http://schemas.openxmlformats.org/drawingml/2006/main" xmlns:p="http://schemas.openxmlformats.org/presentationml/2006/main" xmlns:r="http://schemas.openxmlformats.org/officeDocument/2006/relationships">
   <p:cSld>
     <p:spTree>
@@ -26357,7 +33274,7 @@
 </p:sld>
 </file>
 
-<file path=ppt/slides/slide45.xml><?xml version="1.0" encoding="utf-8"?>
+<file path=ppt/slides/slide63.xml><?xml version="1.0" encoding="utf-8"?>
 <p:sld xmlns:a="http://schemas.openxmlformats.org/drawingml/2006/main" xmlns:p="http://schemas.openxmlformats.org/presentationml/2006/main" xmlns:r="http://schemas.openxmlformats.org/officeDocument/2006/relationships">
   <p:cSld>
     <p:spTree>
@@ -26672,7 +33589,7 @@
 </p:sld>
 </file>
 
-<file path=ppt/slides/slide46.xml><?xml version="1.0" encoding="utf-8"?>
+<file path=ppt/slides/slide64.xml><?xml version="1.0" encoding="utf-8"?>
 <p:sld xmlns:a="http://schemas.openxmlformats.org/drawingml/2006/main" xmlns:p="http://schemas.openxmlformats.org/presentationml/2006/main" xmlns:r="http://schemas.openxmlformats.org/officeDocument/2006/relationships">
   <p:cSld>
     <p:spTree>
@@ -26786,7 +33703,7 @@
 </p:sld>
 </file>
 
-<file path=ppt/slides/slide47.xml><?xml version="1.0" encoding="utf-8"?>
+<file path=ppt/slides/slide65.xml><?xml version="1.0" encoding="utf-8"?>
 <p:sld xmlns:a="http://schemas.openxmlformats.org/drawingml/2006/main" xmlns:p="http://schemas.openxmlformats.org/presentationml/2006/main" xmlns:r="http://schemas.openxmlformats.org/officeDocument/2006/relationships">
   <p:cSld>
     <p:spTree>
@@ -27101,7 +34018,7 @@
 </p:sld>
 </file>
 
-<file path=ppt/slides/slide48.xml><?xml version="1.0" encoding="utf-8"?>
+<file path=ppt/slides/slide66.xml><?xml version="1.0" encoding="utf-8"?>
 <p:sld xmlns:a="http://schemas.openxmlformats.org/drawingml/2006/main" xmlns:p="http://schemas.openxmlformats.org/presentationml/2006/main" xmlns:r="http://schemas.openxmlformats.org/officeDocument/2006/relationships">
   <p:cSld>
     <p:spTree>
@@ -27515,7 +34432,7 @@
 </p:sld>
 </file>
 
-<file path=ppt/slides/slide49.xml><?xml version="1.0" encoding="utf-8"?>
+<file path=ppt/slides/slide67.xml><?xml version="1.0" encoding="utf-8"?>
 <p:sld xmlns:a="http://schemas.openxmlformats.org/drawingml/2006/main" xmlns:p="http://schemas.openxmlformats.org/presentationml/2006/main" xmlns:r="http://schemas.openxmlformats.org/officeDocument/2006/relationships">
   <p:cSld>
     <p:spTree>
@@ -27929,7 +34846,7 @@
 </p:sld>
 </file>
 
-<file path=ppt/slides/slide5.xml><?xml version="1.0" encoding="utf-8"?>
+<file path=ppt/slides/slide68.xml><?xml version="1.0" encoding="utf-8"?>
 <p:sld xmlns:a="http://schemas.openxmlformats.org/drawingml/2006/main" xmlns:p="http://schemas.openxmlformats.org/presentationml/2006/main" xmlns:r="http://schemas.openxmlformats.org/officeDocument/2006/relationships">
   <p:cSld>
     <p:spTree>
@@ -27982,321 +34899,6 @@
                 <a:ea typeface="Noto Sans CJK JP"/>
                 <a:cs typeface="Noto Sans"/>
               </a:rPr>
-              <a:t>仕事に必要なツールを選び、結果をつなぐ</a:t>
-            </a:r>
-          </a:p>
-        </p:txBody>
-      </p:sp>
-      <p:sp>
-        <p:nvSpPr>
-          <p:cNvPr id="3" name="Text Placeholder 2"/>
-          <p:cNvSpPr>
-            <a:spLocks noGrp="1"/>
-          </p:cNvSpPr>
-          <p:nvPr>
-            <p:ph type="body" idx="1"/>
-          </p:nvPr>
-        </p:nvSpPr>
-        <p:spPr>
-          <a:xfrm>
-            <a:off x="594360" y="1463040"/>
-            <a:ext cx="7955279" cy="3090672"/>
-          </a:xfrm>
-        </p:spPr>
-        <p:txBody>
-          <a:bodyPr wrap="square" tIns="91440" bIns="91440">
-            <a:noAutofit/>
-          </a:bodyPr>
-          <a:lstStyle/>
-          <a:p>
-            <a:pPr marL="457200" indent="-355600">
-              <a:lnSpc>
-                <a:spcPts val="2460"/>
-              </a:lnSpc>
-              <a:spcAft>
-                <a:spcPts val="800"/>
-              </a:spcAft>
-              <a:buSzPct val="64878"/>
-              <a:buFont typeface="Noto Sans CJK JP"/>
-              <a:buChar char="●"/>
-              <a:defRPr sz="2050" b="0">
-                <a:solidFill>
-                  <a:srgbClr val="303437"/>
-                </a:solidFill>
-                <a:latin typeface="Noto Sans"/>
-              </a:defRPr>
-            </a:pPr>
-            <a:r>
-              <a:rPr sz="2050" b="0" lang="ja-JP" altLang="en-US">
-                <a:solidFill>
-                  <a:srgbClr val="303437"/>
-                </a:solidFill>
-                <a:latin typeface="Noto Sans"/>
-                <a:ea typeface="Noto Sans CJK JP"/>
-                <a:cs typeface="Noto Sans"/>
-              </a:rPr>
-              <a:t>MCP Atlasは、自然言語で頼まれた仕事を、外部ツールを使って完了できるかを評価する。</a:t>
-            </a:r>
-          </a:p>
-          <a:p>
-            <a:pPr marL="457200" indent="-355600">
-              <a:lnSpc>
-                <a:spcPts val="2460"/>
-              </a:lnSpc>
-              <a:spcAft>
-                <a:spcPts val="800"/>
-              </a:spcAft>
-              <a:buSzPct val="64878"/>
-              <a:buFont typeface="Noto Sans CJK JP"/>
-              <a:buChar char="●"/>
-              <a:defRPr sz="2050" b="0">
-                <a:solidFill>
-                  <a:srgbClr val="303437"/>
-                </a:solidFill>
-                <a:latin typeface="Noto Sans"/>
-              </a:defRPr>
-            </a:pPr>
-            <a:r>
-              <a:rPr sz="2050" b="0" lang="ja-JP" altLang="en-US">
-                <a:solidFill>
-                  <a:srgbClr val="303437"/>
-                </a:solidFill>
-                <a:latin typeface="Noto Sans"/>
-                <a:ea typeface="Noto Sans CJK JP"/>
-                <a:cs typeface="Noto Sans"/>
-              </a:rPr>
-              <a:t>MCP（Model Context Protocol）は、モデルが外部のデータや機能へアクセスするための共通の接続方式。サーバーは検索・ファイル・データベースなどのツールを提供する。</a:t>
-            </a:r>
-          </a:p>
-          <a:p>
-            <a:pPr marL="457200" indent="-355600">
-              <a:lnSpc>
-                <a:spcPts val="2460"/>
-              </a:lnSpc>
-              <a:spcAft>
-                <a:spcPts val="0"/>
-              </a:spcAft>
-              <a:buSzPct val="64878"/>
-              <a:buFont typeface="Noto Sans CJK JP"/>
-              <a:buChar char="●"/>
-              <a:defRPr sz="2050" b="0">
-                <a:solidFill>
-                  <a:srgbClr val="303437"/>
-                </a:solidFill>
-                <a:latin typeface="Noto Sans"/>
-              </a:defRPr>
-            </a:pPr>
-            <a:r>
-              <a:rPr sz="2050" b="0" lang="ja-JP" altLang="en-US">
-                <a:solidFill>
-                  <a:srgbClr val="303437"/>
-                </a:solidFill>
-                <a:latin typeface="Noto Sans"/>
-                <a:ea typeface="Noto Sans CJK JP"/>
-                <a:cs typeface="Noto Sans"/>
-              </a:rPr>
-              <a:t>全1,000課題は36サーバー・220ツールにまたがる。問題文を読み、関連するツールを選んで呼び出し、回答をまとめる。</a:t>
-            </a:r>
-          </a:p>
-        </p:txBody>
-      </p:sp>
-      <p:sp>
-        <p:nvSpPr>
-          <p:cNvPr id="4" name="Title 3"/>
-          <p:cNvSpPr>
-            <a:spLocks noGrp="1"/>
-          </p:cNvSpPr>
-          <p:nvPr>
-            <p:ph type="title" idx="2"/>
-          </p:nvPr>
-        </p:nvSpPr>
-        <p:spPr>
-          <a:xfrm>
-            <a:off x="75895" y="0"/>
-            <a:ext cx="8115300" cy="480060"/>
-          </a:xfrm>
-        </p:spPr>
-        <p:txBody>
-          <a:bodyPr wrap="square" lIns="0" rIns="0" tIns="0" bIns="0" anchor="ctr">
-            <a:noAutofit/>
-          </a:bodyPr>
-          <a:lstStyle/>
-          <a:p>
-            <a:pPr algn="l">
-              <a:lnSpc>
-                <a:spcPct val="110000"/>
-              </a:lnSpc>
-              <a:buNone/>
-              <a:defRPr sz="1400" b="0">
-                <a:solidFill>
-                  <a:srgbClr val="303437"/>
-                </a:solidFill>
-                <a:latin typeface="Noto Sans"/>
-              </a:defRPr>
-            </a:pPr>
-            <a:r>
-              <a:rPr sz="1400" b="1" lang="ja-JP" altLang="en-US">
-                <a:solidFill>
-                  <a:srgbClr val="FFFFFF"/>
-                </a:solidFill>
-                <a:latin typeface="Noto Sans"/>
-                <a:ea typeface="Noto Sans CJK JP"/>
-                <a:cs typeface="Noto Sans"/>
-              </a:rPr>
-              <a:t>1. 複数ツールを使う仕事と実例</a:t>
-            </a:r>
-          </a:p>
-        </p:txBody>
-      </p:sp>
-      <p:sp>
-        <p:nvSpPr>
-          <p:cNvPr id="5" name="TextBox 4"/>
-          <p:cNvSpPr txBox="1"/>
-          <p:nvPr/>
-        </p:nvSpPr>
-        <p:spPr>
-          <a:xfrm>
-            <a:off x="502920" y="4690872"/>
-            <a:ext cx="8183879" cy="393192"/>
-          </a:xfrm>
-          <a:prstGeom prst="rect">
-            <a:avLst/>
-          </a:prstGeom>
-          <a:noFill/>
-        </p:spPr>
-        <p:txBody>
-          <a:bodyPr wrap="square" lIns="0" rIns="0" tIns="0" bIns="0">
-            <a:noAutofit/>
-          </a:bodyPr>
-          <a:lstStyle/>
-          <a:p>
-            <a:pPr algn="l">
-              <a:lnSpc>
-                <a:spcPct val="112000"/>
-              </a:lnSpc>
-              <a:spcBef>
-                <a:spcPts val="0"/>
-              </a:spcBef>
-              <a:spcAft>
-                <a:spcPts val="0"/>
-              </a:spcAft>
-              <a:buNone/>
-              <a:defRPr sz="810" b="0">
-                <a:solidFill>
-                  <a:srgbClr val="303437"/>
-                </a:solidFill>
-                <a:latin typeface="Noto Sans"/>
-              </a:defRPr>
-            </a:pPr>
-            <a:r>
-              <a:rPr sz="810" b="0" lang="ja-JP" altLang="en-US">
-                <a:solidFill>
-                  <a:srgbClr val="626669"/>
-                </a:solidFill>
-                <a:latin typeface="Noto Sans"/>
-                <a:ea typeface="Noto Sans CJK JP"/>
-                <a:cs typeface="Noto Sans"/>
-              </a:rPr>
-              <a:t/>
-            </a:r>
-            <a:r>
-              <a:rPr sz="810" b="0" lang="ja-JP" altLang="en-US">
-                <a:solidFill>
-                  <a:srgbClr val="626669"/>
-                </a:solidFill>
-                <a:latin typeface="Noto Sans"/>
-                <a:ea typeface="Noto Sans CJK JP"/>
-                <a:cs typeface="Noto Sans"/>
-              </a:rPr>
-              <a:t>Bandi, Dumitru et al. (2026). MCP-Atlas: A Large-Scale Benchmark for Tool-Use Competency with Real MCP Servers. 論文v3。</a:t>
-            </a:r>
-            <a:r>
-              <a:rPr sz="810" b="0" lang="ja-JP" altLang="en-US">
-                <a:solidFill>
-                  <a:srgbClr val="626669"/>
-                </a:solidFill>
-                <a:latin typeface="Noto Sans"/>
-                <a:ea typeface="Noto Sans CJK JP"/>
-                <a:cs typeface="Noto Sans"/>
-              </a:rPr>
-              <a:t>  </a:t>
-            </a:r>
-            <a:r>
-              <a:rPr sz="810" b="0" lang="ja-JP" altLang="en-US">
-                <a:solidFill>
-                  <a:srgbClr val="626669"/>
-                </a:solidFill>
-                <a:latin typeface="Noto Sans"/>
-                <a:ea typeface="Noto Sans CJK JP"/>
-                <a:cs typeface="Noto Sans"/>
-                <a:hlinkClick r:id="rId2"/>
-              </a:rPr>
-              <a:t>https://arxiv.org/abs/2602.00933v3</a:t>
-            </a:r>
-          </a:p>
-        </p:txBody>
-      </p:sp>
-    </p:spTree>
-  </p:cSld>
-  <p:clrMapOvr>
-    <a:masterClrMapping/>
-  </p:clrMapOvr>
-</p:sld>
-</file>
-
-<file path=ppt/slides/slide50.xml><?xml version="1.0" encoding="utf-8"?>
-<p:sld xmlns:a="http://schemas.openxmlformats.org/drawingml/2006/main" xmlns:p="http://schemas.openxmlformats.org/presentationml/2006/main" xmlns:r="http://schemas.openxmlformats.org/officeDocument/2006/relationships">
-  <p:cSld>
-    <p:spTree>
-      <p:nvGrpSpPr>
-        <p:cNvPr id="1" name=""/>
-        <p:cNvGrpSpPr/>
-        <p:nvPr/>
-      </p:nvGrpSpPr>
-      <p:grpSpPr/>
-      <p:sp>
-        <p:nvSpPr>
-          <p:cNvPr id="2" name="Title 1"/>
-          <p:cNvSpPr>
-            <a:spLocks noGrp="1"/>
-          </p:cNvSpPr>
-          <p:nvPr>
-            <p:ph type="title"/>
-          </p:nvPr>
-        </p:nvSpPr>
-        <p:spPr>
-          <a:xfrm>
-            <a:off x="548640" y="786384"/>
-            <a:ext cx="8046720" cy="502920"/>
-          </a:xfrm>
-        </p:spPr>
-        <p:txBody>
-          <a:bodyPr wrap="square" lIns="0" rIns="0" tIns="0" bIns="0">
-            <a:noAutofit/>
-          </a:bodyPr>
-          <a:lstStyle/>
-          <a:p>
-            <a:pPr algn="l">
-              <a:lnSpc>
-                <a:spcPct val="110000"/>
-              </a:lnSpc>
-              <a:buNone/>
-              <a:defRPr sz="2800" b="0">
-                <a:solidFill>
-                  <a:srgbClr val="303437"/>
-                </a:solidFill>
-                <a:latin typeface="Noto Sans"/>
-              </a:defRPr>
-            </a:pPr>
-            <a:r>
-              <a:rPr sz="2800" b="1" lang="ja-JP" altLang="en-US">
-                <a:solidFill>
-                  <a:srgbClr val="303437"/>
-                </a:solidFill>
-                <a:latin typeface="Noto Sans"/>
-                <a:ea typeface="Noto Sans CJK JP"/>
-                <a:cs typeface="Noto Sans"/>
-              </a:rPr>
               <a:t>参考文献</a:t>
             </a:r>
           </a:p>
@@ -28646,749 +35248,6 @@
                 <a:hlinkClick r:id="rId3"/>
               </a:rPr>
               <a:t>https://deepmind.google/models/gemini/pro/</a:t>
-            </a:r>
-          </a:p>
-        </p:txBody>
-      </p:sp>
-    </p:spTree>
-  </p:cSld>
-  <p:clrMapOvr>
-    <a:masterClrMapping/>
-  </p:clrMapOvr>
-</p:sld>
-</file>
-
-<file path=ppt/slides/slide6.xml><?xml version="1.0" encoding="utf-8"?>
-<p:sld xmlns:a="http://schemas.openxmlformats.org/drawingml/2006/main" xmlns:p="http://schemas.openxmlformats.org/presentationml/2006/main" xmlns:r="http://schemas.openxmlformats.org/officeDocument/2006/relationships">
-  <p:cSld>
-    <p:spTree>
-      <p:nvGrpSpPr>
-        <p:cNvPr id="1" name=""/>
-        <p:cNvGrpSpPr/>
-        <p:nvPr/>
-      </p:nvGrpSpPr>
-      <p:grpSpPr/>
-      <p:sp>
-        <p:nvSpPr>
-          <p:cNvPr id="2" name="Title 1"/>
-          <p:cNvSpPr>
-            <a:spLocks noGrp="1"/>
-          </p:cNvSpPr>
-          <p:nvPr>
-            <p:ph type="title"/>
-          </p:nvPr>
-        </p:nvSpPr>
-        <p:spPr>
-          <a:xfrm>
-            <a:off x="548640" y="786384"/>
-            <a:ext cx="8046720" cy="502920"/>
-          </a:xfrm>
-        </p:spPr>
-        <p:txBody>
-          <a:bodyPr wrap="square" lIns="0" rIns="0" tIns="0" bIns="0">
-            <a:noAutofit/>
-          </a:bodyPr>
-          <a:lstStyle/>
-          <a:p>
-            <a:pPr algn="l">
-              <a:lnSpc>
-                <a:spcPct val="110000"/>
-              </a:lnSpc>
-              <a:buNone/>
-              <a:defRPr sz="2800" b="0">
-                <a:solidFill>
-                  <a:srgbClr val="303437"/>
-                </a:solidFill>
-                <a:latin typeface="Noto Sans"/>
-              </a:defRPr>
-            </a:pPr>
-            <a:r>
-              <a:rPr sz="2800" b="1" lang="ja-JP" altLang="en-US">
-                <a:solidFill>
-                  <a:srgbClr val="303437"/>
-                </a:solidFill>
-                <a:latin typeface="Noto Sans"/>
-                <a:ea typeface="Noto Sans CJK JP"/>
-                <a:cs typeface="Noto Sans"/>
-              </a:rPr>
-              <a:t>一つの依頼から、ツールを使って回答を作る</a:t>
-            </a:r>
-          </a:p>
-        </p:txBody>
-      </p:sp>
-      <p:sp>
-        <p:nvSpPr>
-          <p:cNvPr id="3" name="Title 2"/>
-          <p:cNvSpPr>
-            <a:spLocks noGrp="1"/>
-          </p:cNvSpPr>
-          <p:nvPr>
-            <p:ph type="title" idx="2"/>
-          </p:nvPr>
-        </p:nvSpPr>
-        <p:spPr>
-          <a:xfrm>
-            <a:off x="75895" y="0"/>
-            <a:ext cx="8115300" cy="480060"/>
-          </a:xfrm>
-        </p:spPr>
-        <p:txBody>
-          <a:bodyPr wrap="square" lIns="0" rIns="0" tIns="0" bIns="0" anchor="ctr">
-            <a:noAutofit/>
-          </a:bodyPr>
-          <a:lstStyle/>
-          <a:p>
-            <a:pPr algn="l">
-              <a:lnSpc>
-                <a:spcPct val="110000"/>
-              </a:lnSpc>
-              <a:buNone/>
-              <a:defRPr sz="1400" b="0">
-                <a:solidFill>
-                  <a:srgbClr val="303437"/>
-                </a:solidFill>
-                <a:latin typeface="Noto Sans"/>
-              </a:defRPr>
-            </a:pPr>
-            <a:r>
-              <a:rPr sz="1400" b="1" lang="ja-JP" altLang="en-US">
-                <a:solidFill>
-                  <a:srgbClr val="FFFFFF"/>
-                </a:solidFill>
-                <a:latin typeface="Noto Sans"/>
-                <a:ea typeface="Noto Sans CJK JP"/>
-                <a:cs typeface="Noto Sans"/>
-              </a:rPr>
-              <a:t>1. 複数ツールを使う仕事と実例</a:t>
-            </a:r>
-          </a:p>
-        </p:txBody>
-      </p:sp>
-      <p:graphicFrame>
-        <p:nvGraphicFramePr>
-          <p:cNvPr id="4" name="Table 3"/>
-          <p:cNvGraphicFramePr>
-            <a:graphicFrameLocks noGrp="1"/>
-          </p:cNvGraphicFramePr>
-          <p:nvPr/>
-        </p:nvGraphicFramePr>
-        <p:xfrm>
-          <a:off x="548640" y="1508760"/>
-          <a:ext cx="8046720" cy="1901952"/>
-        </p:xfrm>
-        <a:graphic>
-          <a:graphicData uri="http://schemas.openxmlformats.org/drawingml/2006/table">
-            <a:tbl>
-              <a:tblPr firstRow="0" bandRow="0"/>
-              <a:tblGrid>
-                <a:gridCol w="1280160"/>
-                <a:gridCol w="6766560"/>
-              </a:tblGrid>
-              <a:tr h="475488">
-                <a:tc>
-                  <a:txBody>
-                    <a:bodyPr wrap="square">
-                      <a:noAutofit/>
-                    </a:bodyPr>
-                    <a:lstStyle/>
-                    <a:p>
-                      <a:pPr algn="l">
-                        <a:lnSpc>
-                          <a:spcPts val="2300"/>
-                        </a:lnSpc>
-                        <a:buNone/>
-                        <a:defRPr sz="2000" b="0">
-                          <a:solidFill>
-                            <a:srgbClr val="303437"/>
-                          </a:solidFill>
-                          <a:latin typeface="Noto Sans"/>
-                        </a:defRPr>
-                      </a:pPr>
-                      <a:r>
-                        <a:rPr sz="2000" b="0" lang="ja-JP" altLang="en-US">
-                          <a:solidFill>
-                            <a:srgbClr val="303437"/>
-                          </a:solidFill>
-                          <a:latin typeface="Noto Sans"/>
-                          <a:ea typeface="Noto Sans CJK JP"/>
-                          <a:cs typeface="Noto Sans"/>
-                        </a:rPr>
-                        <a:t>段階</a:t>
-                      </a:r>
-                    </a:p>
-                  </a:txBody>
-                  <a:tcPr marL="63500" marR="63500" marT="38100" marB="38100" anchor="ctr">
-                    <a:lnL w="7620">
-                      <a:noFill/>
-                    </a:lnL>
-                    <a:lnR w="7620">
-                      <a:noFill/>
-                    </a:lnR>
-                    <a:lnT w="15240">
-                      <a:solidFill>
-                        <a:srgbClr val="626669"/>
-                      </a:solidFill>
-                      <a:prstDash val="solid"/>
-                    </a:lnT>
-                    <a:lnB w="7620">
-                      <a:solidFill>
-                        <a:srgbClr val="626669"/>
-                      </a:solidFill>
-                      <a:prstDash val="solid"/>
-                    </a:lnB>
-                    <a:solidFill>
-                      <a:srgbClr val="FFFEF8"/>
-                    </a:solidFill>
-                  </a:tcPr>
-                </a:tc>
-                <a:tc>
-                  <a:txBody>
-                    <a:bodyPr wrap="square">
-                      <a:noAutofit/>
-                    </a:bodyPr>
-                    <a:lstStyle/>
-                    <a:p>
-                      <a:pPr algn="l">
-                        <a:lnSpc>
-                          <a:spcPts val="2300"/>
-                        </a:lnSpc>
-                        <a:buNone/>
-                        <a:defRPr sz="2000" b="0">
-                          <a:solidFill>
-                            <a:srgbClr val="303437"/>
-                          </a:solidFill>
-                          <a:latin typeface="Noto Sans"/>
-                        </a:defRPr>
-                      </a:pPr>
-                      <a:r>
-                        <a:rPr sz="2000" b="0" lang="ja-JP" altLang="en-US">
-                          <a:solidFill>
-                            <a:srgbClr val="303437"/>
-                          </a:solidFill>
-                          <a:latin typeface="Noto Sans"/>
-                          <a:ea typeface="Noto Sans CJK JP"/>
-                          <a:cs typeface="Noto Sans"/>
-                        </a:rPr>
-                        <a:t>エージェントが扱うもの</a:t>
-                      </a:r>
-                    </a:p>
-                  </a:txBody>
-                  <a:tcPr marL="63500" marR="63500" marT="38100" marB="38100" anchor="ctr">
-                    <a:lnL w="7620">
-                      <a:noFill/>
-                    </a:lnL>
-                    <a:lnR w="7620">
-                      <a:noFill/>
-                    </a:lnR>
-                    <a:lnT w="15240">
-                      <a:solidFill>
-                        <a:srgbClr val="626669"/>
-                      </a:solidFill>
-                      <a:prstDash val="solid"/>
-                    </a:lnT>
-                    <a:lnB w="7620">
-                      <a:solidFill>
-                        <a:srgbClr val="626669"/>
-                      </a:solidFill>
-                      <a:prstDash val="solid"/>
-                    </a:lnB>
-                    <a:solidFill>
-                      <a:srgbClr val="FFFEF8"/>
-                    </a:solidFill>
-                  </a:tcPr>
-                </a:tc>
-              </a:tr>
-              <a:tr h="475488">
-                <a:tc>
-                  <a:txBody>
-                    <a:bodyPr wrap="square">
-                      <a:noAutofit/>
-                    </a:bodyPr>
-                    <a:lstStyle/>
-                    <a:p>
-                      <a:pPr algn="l">
-                        <a:lnSpc>
-                          <a:spcPts val="2300"/>
-                        </a:lnSpc>
-                        <a:buNone/>
-                        <a:defRPr sz="2000" b="0">
-                          <a:solidFill>
-                            <a:srgbClr val="303437"/>
-                          </a:solidFill>
-                          <a:latin typeface="Noto Sans"/>
-                        </a:defRPr>
-                      </a:pPr>
-                      <a:r>
-                        <a:rPr sz="2000" b="0" lang="ja-JP" altLang="en-US">
-                          <a:solidFill>
-                            <a:srgbClr val="303437"/>
-                          </a:solidFill>
-                          <a:latin typeface="Noto Sans"/>
-                          <a:ea typeface="Noto Sans CJK JP"/>
-                          <a:cs typeface="Noto Sans"/>
-                        </a:rPr>
-                        <a:t>入力</a:t>
-                      </a:r>
-                    </a:p>
-                  </a:txBody>
-                  <a:tcPr marL="63500" marR="63500" marT="38100" marB="38100" anchor="ctr">
-                    <a:lnL w="7620">
-                      <a:noFill/>
-                    </a:lnL>
-                    <a:lnR w="7620">
-                      <a:noFill/>
-                    </a:lnR>
-                    <a:lnT w="7620">
-                      <a:solidFill>
-                        <a:srgbClr val="626669"/>
-                      </a:solidFill>
-                      <a:prstDash val="solid"/>
-                    </a:lnT>
-                    <a:lnB w="7620">
-                      <a:noFill/>
-                    </a:lnB>
-                    <a:solidFill>
-                      <a:srgbClr val="FFFEF8"/>
-                    </a:solidFill>
-                  </a:tcPr>
-                </a:tc>
-                <a:tc>
-                  <a:txBody>
-                    <a:bodyPr wrap="square">
-                      <a:noAutofit/>
-                    </a:bodyPr>
-                    <a:lstStyle/>
-                    <a:p>
-                      <a:pPr algn="l">
-                        <a:lnSpc>
-                          <a:spcPts val="2300"/>
-                        </a:lnSpc>
-                        <a:buNone/>
-                        <a:defRPr sz="2000" b="0">
-                          <a:solidFill>
-                            <a:srgbClr val="303437"/>
-                          </a:solidFill>
-                          <a:latin typeface="Noto Sans"/>
-                        </a:defRPr>
-                      </a:pPr>
-                      <a:r>
-                        <a:rPr sz="2000" b="0" lang="ja-JP" altLang="en-US">
-                          <a:solidFill>
-                            <a:srgbClr val="303437"/>
-                          </a:solidFill>
-                          <a:latin typeface="Noto Sans"/>
-                          <a:ea typeface="Noto Sans CJK JP"/>
-                          <a:cs typeface="Noto Sans"/>
-                        </a:rPr>
-                        <a:t>利用者の依頼と、使えるツールの説明</a:t>
-                      </a:r>
-                    </a:p>
-                  </a:txBody>
-                  <a:tcPr marL="63500" marR="63500" marT="38100" marB="38100" anchor="ctr">
-                    <a:lnL w="7620">
-                      <a:noFill/>
-                    </a:lnL>
-                    <a:lnR w="7620">
-                      <a:noFill/>
-                    </a:lnR>
-                    <a:lnT w="7620">
-                      <a:solidFill>
-                        <a:srgbClr val="626669"/>
-                      </a:solidFill>
-                      <a:prstDash val="solid"/>
-                    </a:lnT>
-                    <a:lnB w="7620">
-                      <a:noFill/>
-                    </a:lnB>
-                    <a:solidFill>
-                      <a:srgbClr val="FFFEF8"/>
-                    </a:solidFill>
-                  </a:tcPr>
-                </a:tc>
-              </a:tr>
-              <a:tr h="475488">
-                <a:tc>
-                  <a:txBody>
-                    <a:bodyPr wrap="square">
-                      <a:noAutofit/>
-                    </a:bodyPr>
-                    <a:lstStyle/>
-                    <a:p>
-                      <a:pPr algn="l">
-                        <a:lnSpc>
-                          <a:spcPts val="2300"/>
-                        </a:lnSpc>
-                        <a:buNone/>
-                        <a:defRPr sz="2000" b="0">
-                          <a:solidFill>
-                            <a:srgbClr val="303437"/>
-                          </a:solidFill>
-                          <a:latin typeface="Noto Sans"/>
-                        </a:defRPr>
-                      </a:pPr>
-                      <a:r>
-                        <a:rPr sz="2000" b="0" lang="ja-JP" altLang="en-US">
-                          <a:solidFill>
-                            <a:srgbClr val="303437"/>
-                          </a:solidFill>
-                          <a:latin typeface="Noto Sans"/>
-                          <a:ea typeface="Noto Sans CJK JP"/>
-                          <a:cs typeface="Noto Sans"/>
-                        </a:rPr>
-                        <a:t>実行</a:t>
-                      </a:r>
-                    </a:p>
-                  </a:txBody>
-                  <a:tcPr marL="63500" marR="63500" marT="38100" marB="38100" anchor="ctr">
-                    <a:lnL w="7620">
-                      <a:noFill/>
-                    </a:lnL>
-                    <a:lnR w="7620">
-                      <a:noFill/>
-                    </a:lnR>
-                    <a:lnT w="7620">
-                      <a:noFill/>
-                    </a:lnT>
-                    <a:lnB w="7620">
-                      <a:noFill/>
-                    </a:lnB>
-                    <a:solidFill>
-                      <a:srgbClr val="FFFEF8"/>
-                    </a:solidFill>
-                  </a:tcPr>
-                </a:tc>
-                <a:tc>
-                  <a:txBody>
-                    <a:bodyPr wrap="square">
-                      <a:noAutofit/>
-                    </a:bodyPr>
-                    <a:lstStyle/>
-                    <a:p>
-                      <a:pPr algn="l">
-                        <a:lnSpc>
-                          <a:spcPts val="2300"/>
-                        </a:lnSpc>
-                        <a:buNone/>
-                        <a:defRPr sz="2000" b="0">
-                          <a:solidFill>
-                            <a:srgbClr val="303437"/>
-                          </a:solidFill>
-                          <a:latin typeface="Noto Sans"/>
-                        </a:defRPr>
-                      </a:pPr>
-                      <a:r>
-                        <a:rPr sz="2000" b="0" lang="ja-JP" altLang="en-US">
-                          <a:solidFill>
-                            <a:srgbClr val="303437"/>
-                          </a:solidFill>
-                          <a:latin typeface="Noto Sans"/>
-                          <a:ea typeface="Noto Sans CJK JP"/>
-                          <a:cs typeface="Noto Sans"/>
-                        </a:rPr>
-                        <a:t>ツール名・引数を選び、返った情報を次の操作に使う</a:t>
-                      </a:r>
-                    </a:p>
-                  </a:txBody>
-                  <a:tcPr marL="63500" marR="63500" marT="38100" marB="38100" anchor="ctr">
-                    <a:lnL w="7620">
-                      <a:noFill/>
-                    </a:lnL>
-                    <a:lnR w="7620">
-                      <a:noFill/>
-                    </a:lnR>
-                    <a:lnT w="7620">
-                      <a:noFill/>
-                    </a:lnT>
-                    <a:lnB w="7620">
-                      <a:noFill/>
-                    </a:lnB>
-                    <a:solidFill>
-                      <a:srgbClr val="FFFEF8"/>
-                    </a:solidFill>
-                  </a:tcPr>
-                </a:tc>
-              </a:tr>
-              <a:tr h="475488">
-                <a:tc>
-                  <a:txBody>
-                    <a:bodyPr wrap="square">
-                      <a:noAutofit/>
-                    </a:bodyPr>
-                    <a:lstStyle/>
-                    <a:p>
-                      <a:pPr algn="l">
-                        <a:lnSpc>
-                          <a:spcPts val="2300"/>
-                        </a:lnSpc>
-                        <a:buNone/>
-                        <a:defRPr sz="2000" b="0">
-                          <a:solidFill>
-                            <a:srgbClr val="303437"/>
-                          </a:solidFill>
-                          <a:latin typeface="Noto Sans"/>
-                        </a:defRPr>
-                      </a:pPr>
-                      <a:r>
-                        <a:rPr sz="2000" b="0" lang="ja-JP" altLang="en-US">
-                          <a:solidFill>
-                            <a:srgbClr val="303437"/>
-                          </a:solidFill>
-                          <a:latin typeface="Noto Sans"/>
-                          <a:ea typeface="Noto Sans CJK JP"/>
-                          <a:cs typeface="Noto Sans"/>
-                        </a:rPr>
-                        <a:t>出力</a:t>
-                      </a:r>
-                    </a:p>
-                  </a:txBody>
-                  <a:tcPr marL="63500" marR="63500" marT="38100" marB="38100" anchor="ctr">
-                    <a:lnL w="7620">
-                      <a:noFill/>
-                    </a:lnL>
-                    <a:lnR w="7620">
-                      <a:noFill/>
-                    </a:lnR>
-                    <a:lnT w="7620">
-                      <a:noFill/>
-                    </a:lnT>
-                    <a:lnB w="15240">
-                      <a:solidFill>
-                        <a:srgbClr val="626669"/>
-                      </a:solidFill>
-                      <a:prstDash val="solid"/>
-                    </a:lnB>
-                    <a:solidFill>
-                      <a:srgbClr val="FFFEF8"/>
-                    </a:solidFill>
-                  </a:tcPr>
-                </a:tc>
-                <a:tc>
-                  <a:txBody>
-                    <a:bodyPr wrap="square">
-                      <a:noAutofit/>
-                    </a:bodyPr>
-                    <a:lstStyle/>
-                    <a:p>
-                      <a:pPr algn="l">
-                        <a:lnSpc>
-                          <a:spcPts val="2300"/>
-                        </a:lnSpc>
-                        <a:buNone/>
-                        <a:defRPr sz="2000" b="0">
-                          <a:solidFill>
-                            <a:srgbClr val="303437"/>
-                          </a:solidFill>
-                          <a:latin typeface="Noto Sans"/>
-                        </a:defRPr>
-                      </a:pPr>
-                      <a:r>
-                        <a:rPr sz="2000" b="0" lang="ja-JP" altLang="en-US">
-                          <a:solidFill>
-                            <a:srgbClr val="303437"/>
-                          </a:solidFill>
-                          <a:latin typeface="Noto Sans"/>
-                          <a:ea typeface="Noto Sans CJK JP"/>
-                          <a:cs typeface="Noto Sans"/>
-                        </a:rPr>
-                        <a:t>依頼に必要な事実を含む最終回答</a:t>
-                      </a:r>
-                    </a:p>
-                  </a:txBody>
-                  <a:tcPr marL="63500" marR="63500" marT="38100" marB="38100" anchor="ctr">
-                    <a:lnL w="7620">
-                      <a:noFill/>
-                    </a:lnL>
-                    <a:lnR w="7620">
-                      <a:noFill/>
-                    </a:lnR>
-                    <a:lnT w="7620">
-                      <a:noFill/>
-                    </a:lnT>
-                    <a:lnB w="15240">
-                      <a:solidFill>
-                        <a:srgbClr val="626669"/>
-                      </a:solidFill>
-                      <a:prstDash val="solid"/>
-                    </a:lnB>
-                    <a:solidFill>
-                      <a:srgbClr val="FFFEF8"/>
-                    </a:solidFill>
-                  </a:tcPr>
-                </a:tc>
-              </a:tr>
-            </a:tbl>
-          </a:graphicData>
-        </a:graphic>
-      </p:graphicFrame>
-      <p:sp>
-        <p:nvSpPr>
-          <p:cNvPr id="5" name="TextBox 4"/>
-          <p:cNvSpPr txBox="1"/>
-          <p:nvPr/>
-        </p:nvSpPr>
-        <p:spPr>
-          <a:xfrm>
-            <a:off x="594360" y="3602736"/>
-            <a:ext cx="7955279" cy="685800"/>
-          </a:xfrm>
-          <a:prstGeom prst="rect">
-            <a:avLst/>
-          </a:prstGeom>
-          <a:noFill/>
-        </p:spPr>
-        <p:txBody>
-          <a:bodyPr wrap="square" lIns="0" rIns="0" tIns="0" bIns="0">
-            <a:noAutofit/>
-          </a:bodyPr>
-          <a:lstStyle/>
-          <a:p>
-            <a:pPr algn="l">
-              <a:lnSpc>
-                <a:spcPts val="2160"/>
-              </a:lnSpc>
-              <a:spcBef>
-                <a:spcPts val="0"/>
-              </a:spcBef>
-              <a:spcAft>
-                <a:spcPts val="0"/>
-              </a:spcAft>
-              <a:buNone/>
-              <a:defRPr sz="1800" b="0">
-                <a:solidFill>
-                  <a:srgbClr val="303437"/>
-                </a:solidFill>
-                <a:latin typeface="Noto Sans"/>
-              </a:defRPr>
-            </a:pPr>
-            <a:r>
-              <a:rPr sz="1800" b="0" lang="ja-JP" altLang="en-US">
-                <a:solidFill>
-                  <a:srgbClr val="303437"/>
-                </a:solidFill>
-                <a:latin typeface="Noto Sans"/>
-                <a:ea typeface="Noto Sans CJK JP"/>
-                <a:cs typeface="Noto Sans"/>
-              </a:rPr>
-              <a:t>各課題には6〜37のツールを提示する。</a:t>
-            </a:r>
-          </a:p>
-          <a:p>
-            <a:pPr algn="l">
-              <a:lnSpc>
-                <a:spcPts val="2160"/>
-              </a:lnSpc>
-              <a:spcBef>
-                <a:spcPts val="0"/>
-              </a:spcBef>
-              <a:spcAft>
-                <a:spcPts val="0"/>
-              </a:spcAft>
-              <a:buNone/>
-              <a:defRPr sz="1800" b="0">
-                <a:solidFill>
-                  <a:srgbClr val="303437"/>
-                </a:solidFill>
-                <a:latin typeface="Noto Sans"/>
-              </a:defRPr>
-            </a:pPr>
-            <a:r>
-              <a:rPr sz="1800" b="0" lang="ja-JP" altLang="en-US">
-                <a:solidFill>
-                  <a:srgbClr val="303437"/>
-                </a:solidFill>
-                <a:latin typeface="Noto Sans"/>
-                <a:ea typeface="Noto Sans CJK JP"/>
-                <a:cs typeface="Noto Sans"/>
-              </a:rPr>
-              <a:t>正解に必要なものは2〜8で、似た用途の候補も混ぜる。</a:t>
-            </a:r>
-          </a:p>
-        </p:txBody>
-      </p:sp>
-      <p:sp>
-        <p:nvSpPr>
-          <p:cNvPr id="6" name="TextBox 5"/>
-          <p:cNvSpPr txBox="1"/>
-          <p:nvPr/>
-        </p:nvSpPr>
-        <p:spPr>
-          <a:xfrm>
-            <a:off x="502920" y="4690872"/>
-            <a:ext cx="8183879" cy="393192"/>
-          </a:xfrm>
-          <a:prstGeom prst="rect">
-            <a:avLst/>
-          </a:prstGeom>
-          <a:noFill/>
-        </p:spPr>
-        <p:txBody>
-          <a:bodyPr wrap="square" lIns="0" rIns="0" tIns="0" bIns="0">
-            <a:noAutofit/>
-          </a:bodyPr>
-          <a:lstStyle/>
-          <a:p>
-            <a:pPr algn="l">
-              <a:lnSpc>
-                <a:spcPct val="112000"/>
-              </a:lnSpc>
-              <a:spcBef>
-                <a:spcPts val="0"/>
-              </a:spcBef>
-              <a:spcAft>
-                <a:spcPts val="0"/>
-              </a:spcAft>
-              <a:buNone/>
-              <a:defRPr sz="810" b="0">
-                <a:solidFill>
-                  <a:srgbClr val="303437"/>
-                </a:solidFill>
-                <a:latin typeface="Noto Sans"/>
-              </a:defRPr>
-            </a:pPr>
-            <a:r>
-              <a:rPr sz="810" b="0" lang="ja-JP" altLang="en-US">
-                <a:solidFill>
-                  <a:srgbClr val="626669"/>
-                </a:solidFill>
-                <a:latin typeface="Noto Sans"/>
-                <a:ea typeface="Noto Sans CJK JP"/>
-                <a:cs typeface="Noto Sans"/>
-              </a:rPr>
-              <a:t/>
-            </a:r>
-            <a:r>
-              <a:rPr sz="810" b="0" lang="ja-JP" altLang="en-US">
-                <a:solidFill>
-                  <a:srgbClr val="626669"/>
-                </a:solidFill>
-                <a:latin typeface="Noto Sans"/>
-                <a:ea typeface="Noto Sans CJK JP"/>
-                <a:cs typeface="Noto Sans"/>
-              </a:rPr>
-              <a:t>Bandi, Dumitru et al. (2026). MCP-Atlas: A Large-Scale Benchmark for Tool-Use Competency with Real MCP Servers. 論文v3。</a:t>
-            </a:r>
-            <a:r>
-              <a:rPr sz="810" b="0" lang="ja-JP" altLang="en-US">
-                <a:solidFill>
-                  <a:srgbClr val="626669"/>
-                </a:solidFill>
-                <a:latin typeface="Noto Sans"/>
-                <a:ea typeface="Noto Sans CJK JP"/>
-                <a:cs typeface="Noto Sans"/>
-              </a:rPr>
-              <a:t>  </a:t>
-            </a:r>
-            <a:r>
-              <a:rPr sz="810" b="0" lang="ja-JP" altLang="en-US">
-                <a:solidFill>
-                  <a:srgbClr val="626669"/>
-                </a:solidFill>
-                <a:latin typeface="Noto Sans"/>
-                <a:ea typeface="Noto Sans CJK JP"/>
-                <a:cs typeface="Noto Sans"/>
-                <a:hlinkClick r:id="rId2"/>
-              </a:rPr>
-              <a:t>https://arxiv.org/abs/2602.00933v3</a:t>
             </a:r>
           </a:p>
         </p:txBody>
@@ -29507,7 +35366,7 @@
                 <a:ea typeface="Noto Sans CJK JP"/>
                 <a:cs typeface="Noto Sans"/>
               </a:rPr>
-              <a:t>全体は公開500課題・非公開500課題に分かれる。公開側には問題文、使えるツール、回答に必要な事実、参照の操作履歴がある。</a:t>
+              <a:t>公開500課題・非公開500課題。公開側は依頼文・提示ツール・正解条件・参照履歴を配布する。</a:t>
             </a:r>
           </a:p>
           <a:p>
@@ -29537,7 +35396,7 @@
                 <a:ea typeface="Noto Sans CJK JP"/>
                 <a:cs typeface="Noto Sans"/>
               </a:rPr>
-              <a:t>ここでは、公式配布ページで全文を確認できた公開課題から、ゲームの履歴、製品の売上、医学論文の3件を紹介する。</a:t>
+              <a:t>本編はゲームの履歴・製品の売上・医学論文の3課題。Appendixは公開データ9課題と論文の1課題を追加する。</a:t>
             </a:r>
           </a:p>
           <a:p>
@@ -29567,7 +35426,7 @@
                 <a:ea typeface="Noto Sans CJK JP"/>
                 <a:cs typeface="Noto Sans"/>
               </a:rPr>
-              <a:t>入力は英語の依頼。採点には、回答が満たすべき事実を列挙した正解条件を使う。</a:t>
+              <a:t>英語の依頼に、日本語の要約・正解条件・参照履歴の説明を添える。</a:t>
             </a:r>
           </a:p>
         </p:txBody>

--- a/slides/datasets-in-10-minutes-mcp-atlas.pptx
+++ b/slides/datasets-in-10-minutes-mcp-atlas.pptx
@@ -7796,8 +7796,8 @@
         </p:nvSpPr>
         <p:spPr>
           <a:xfrm>
-            <a:off x="548640" y="2066543"/>
-            <a:ext cx="8046720" cy="685800"/>
+            <a:off x="457200" y="1649730"/>
+            <a:ext cx="8229600" cy="863600"/>
           </a:xfrm>
         </p:spPr>
         <p:txBody>
@@ -7844,8 +7844,8 @@
         </p:nvSpPr>
         <p:spPr>
           <a:xfrm>
-            <a:off x="640080" y="2944368"/>
-            <a:ext cx="7863840" cy="822960"/>
+            <a:off x="457200" y="3186430"/>
+            <a:ext cx="8229600" cy="812800"/>
           </a:xfrm>
         </p:spPr>
         <p:txBody>
@@ -7973,6 +7973,53 @@
                 <a:cs typeface="Noto Sans"/>
               </a:rPr>
               <a:t>datasets in 10 minutes (2026-10-16)</a:t>
+            </a:r>
+          </a:p>
+        </p:txBody>
+      </p:sp>
+      <p:sp>
+        <p:nvSpPr>
+          <p:cNvPr id="7" name="正式名称・略語の展開"/>
+          <p:cNvSpPr txBox="1"/>
+          <p:nvPr/>
+        </p:nvSpPr>
+        <p:spPr>
+          <a:xfrm>
+            <a:off x="457200" y="2678430"/>
+            <a:ext cx="8229600" cy="406400"/>
+          </a:xfrm>
+          <a:prstGeom prst="rect">
+            <a:avLst/>
+          </a:prstGeom>
+          <a:noFill/>
+        </p:spPr>
+        <p:txBody>
+          <a:bodyPr wrap="square" lIns="0" rIns="0" tIns="0" bIns="0">
+            <a:noAutofit/>
+          </a:bodyPr>
+          <a:lstStyle/>
+          <a:p>
+            <a:pPr algn="ctr">
+              <a:lnSpc>
+                <a:spcPct val="115000"/>
+              </a:lnSpc>
+              <a:spcBef>
+                <a:spcPts val="0"/>
+              </a:spcBef>
+              <a:spcAft>
+                <a:spcPts val="0"/>
+              </a:spcAft>
+            </a:pPr>
+            <a:r>
+              <a:rPr sz="2100" b="0">
+                <a:solidFill>
+                  <a:srgbClr val="626669"/>
+                </a:solidFill>
+                <a:latin typeface="Noto Sans"/>
+                <a:ea typeface="Noto Sans CJK JP"/>
+                <a:cs typeface="Noto Sans"/>
+              </a:rPr>
+              <a:t>MCP = Model Context Protocol</a:t>
             </a:r>
           </a:p>
         </p:txBody>

--- a/slides/datasets-in-10-minutes-mcp-atlas.pptx
+++ b/slides/datasets-in-10-minutes-mcp-atlas.pptx
@@ -7796,7 +7796,7 @@
         </p:nvSpPr>
         <p:spPr>
           <a:xfrm>
-            <a:off x="457200" y="1649730"/>
+            <a:off x="457200" y="1836991"/>
             <a:ext cx="8229600" cy="863600"/>
           </a:xfrm>
         </p:spPr>
@@ -7844,7 +7844,7 @@
         </p:nvSpPr>
         <p:spPr>
           <a:xfrm>
-            <a:off x="457200" y="3186430"/>
+            <a:off x="457200" y="2998279"/>
             <a:ext cx="8229600" cy="812800"/>
           </a:xfrm>
         </p:spPr>
@@ -7973,53 +7973,6 @@
                 <a:cs typeface="Noto Sans"/>
               </a:rPr>
               <a:t>datasets in 10 minutes (2026-10-16)</a:t>
-            </a:r>
-          </a:p>
-        </p:txBody>
-      </p:sp>
-      <p:sp>
-        <p:nvSpPr>
-          <p:cNvPr id="7" name="正式名称・略語の展開"/>
-          <p:cNvSpPr txBox="1"/>
-          <p:nvPr/>
-        </p:nvSpPr>
-        <p:spPr>
-          <a:xfrm>
-            <a:off x="457200" y="2678430"/>
-            <a:ext cx="8229600" cy="406400"/>
-          </a:xfrm>
-          <a:prstGeom prst="rect">
-            <a:avLst/>
-          </a:prstGeom>
-          <a:noFill/>
-        </p:spPr>
-        <p:txBody>
-          <a:bodyPr wrap="square" lIns="0" rIns="0" tIns="0" bIns="0">
-            <a:noAutofit/>
-          </a:bodyPr>
-          <a:lstStyle/>
-          <a:p>
-            <a:pPr algn="ctr">
-              <a:lnSpc>
-                <a:spcPct val="115000"/>
-              </a:lnSpc>
-              <a:spcBef>
-                <a:spcPts val="0"/>
-              </a:spcBef>
-              <a:spcAft>
-                <a:spcPts val="0"/>
-              </a:spcAft>
-            </a:pPr>
-            <a:r>
-              <a:rPr sz="2100" b="0">
-                <a:solidFill>
-                  <a:srgbClr val="626669"/>
-                </a:solidFill>
-                <a:latin typeface="Noto Sans"/>
-                <a:ea typeface="Noto Sans CJK JP"/>
-                <a:cs typeface="Noto Sans"/>
-              </a:rPr>
-              <a:t>MCP = Model Context Protocol</a:t>
             </a:r>
           </a:p>
         </p:txBody>
@@ -24903,7 +24856,7 @@
                 <a:ea typeface="Noto Sans CJK JP"/>
                 <a:cs typeface="Noto Sans"/>
               </a:rPr>
-              <a:t>MCP（Model Context Protocol）は、モデルが外部のデータや機能へアクセスするための共通の接続方式。サーバーは検索・ファイル・データベースなどのツールを提供する。</a:t>
+              <a:t>MCPは、モデルが外部のデータや機能へアクセスするための共通の接続方式。サーバーは検索・ファイル・データベースなどのツールを提供する。</a:t>
             </a:r>
           </a:p>
           <a:p>

--- a/slides/datasets-in-10-minutes-mcp-atlas.pptx
+++ b/slides/datasets-in-10-minutes-mcp-atlas.pptx
@@ -8099,7 +8099,7 @@
         </p:nvSpPr>
         <p:spPr>
           <a:xfrm>
-            <a:off x="594360" y="1389888"/>
+            <a:off x="594360" y="1534534"/>
             <a:ext cx="7955279" cy="228600"/>
           </a:xfrm>
           <a:prstGeom prst="rect">
@@ -8153,7 +8153,7 @@
         </p:nvSpPr>
         <p:spPr>
           <a:xfrm>
-            <a:off x="594360" y="1737360"/>
+            <a:off x="594360" y="1824353"/>
             <a:ext cx="7955279" cy="1691640"/>
           </a:xfrm>
           <a:prstGeom prst="rect">
@@ -8207,7 +8207,7 @@
         </p:nvSpPr>
         <p:spPr>
           <a:xfrm>
-            <a:off x="594360" y="3712463"/>
+            <a:off x="594360" y="3648582"/>
             <a:ext cx="7955279" cy="777240"/>
           </a:xfrm>
           <a:prstGeom prst="rect">
@@ -9206,7 +9206,7 @@
         </p:nvSpPr>
         <p:spPr>
           <a:xfrm>
-            <a:off x="594360" y="1389888"/>
+            <a:off x="594360" y="1661286"/>
             <a:ext cx="7955279" cy="228600"/>
           </a:xfrm>
           <a:prstGeom prst="rect">
@@ -9260,7 +9260,7 @@
         </p:nvSpPr>
         <p:spPr>
           <a:xfrm>
-            <a:off x="594360" y="1737360"/>
+            <a:off x="594360" y="1951105"/>
             <a:ext cx="7955279" cy="1691640"/>
           </a:xfrm>
           <a:prstGeom prst="rect">
@@ -13588,7 +13588,7 @@
                 <a:ea typeface="Noto Sans CJK JP"/>
                 <a:cs typeface="Noto Sans"/>
               </a:rPr>
-              <a:t>MCP Atlasの公式配布ページ</a:t>
+              <a:t>MCP-Atlasの公式サイト</a:t>
             </a:r>
           </a:p>
         </p:txBody>
@@ -13636,35 +13636,11 @@
                 <a:ea typeface="Noto Sans CJK JP"/>
                 <a:cs typeface="Noto Sans"/>
               </a:rPr>
-              <a:t>MCP Atlas: 公開データ</a:t>
+              <a:t>MCP-Atlas: 公式サイト</a:t>
             </a:r>
           </a:p>
         </p:txBody>
       </p:sp>
-      <p:pic>
-        <p:nvPicPr>
-          <p:cNvPr id="4" name="Picture 3" descr="dataset-page.png"/>
-          <p:cNvPicPr>
-            <a:picLocks noChangeAspect="1"/>
-          </p:cNvPicPr>
-          <p:nvPr/>
-        </p:nvPicPr>
-        <p:blipFill>
-          <a:blip r:embed="rId2"/>
-          <a:stretch>
-            <a:fillRect/>
-          </a:stretch>
-        </p:blipFill>
-        <p:spPr>
-          <a:xfrm>
-            <a:off x="2274570" y="1481328"/>
-            <a:ext cx="4594859" cy="3063240"/>
-          </a:xfrm>
-          <a:prstGeom prst="rect">
-            <a:avLst/>
-          </a:prstGeom>
-        </p:spPr>
-      </p:pic>
       <p:sp>
         <p:nvSpPr>
           <p:cNvPr id="5" name="TextBox 4"/>
@@ -13689,7 +13665,7 @@
           <a:p>
             <a:pPr algn="l">
               <a:lnSpc>
-                <a:spcPct val="112000"/>
+                <a:spcPct val="110000"/>
               </a:lnSpc>
               <a:spcBef>
                 <a:spcPts val="0"/>
@@ -13706,53 +13682,42 @@
               </a:defRPr>
             </a:pPr>
             <a:r>
-              <a:rPr sz="810" b="0" lang="ja-JP" altLang="en-US">
+              <a:rPr sz="1000">
                 <a:solidFill>
                   <a:srgbClr val="626669"/>
                 </a:solidFill>
                 <a:latin typeface="Noto Sans"/>
-                <a:ea typeface="Noto Sans CJK JP"/>
-                <a:cs typeface="Noto Sans"/>
-              </a:rPr>
-              <a:t/>
-            </a:r>
-            <a:r>
-              <a:rPr sz="810" b="0" lang="ja-JP" altLang="en-US">
-                <a:solidFill>
-                  <a:srgbClr val="626669"/>
-                </a:solidFill>
-                <a:latin typeface="Noto Sans"/>
-                <a:ea typeface="Noto Sans CJK JP"/>
-                <a:cs typeface="Noto Sans"/>
-              </a:rPr>
-              <a:t>Scale AI. MCP-Atlas. CC BY 4.0。改訂8c563b5。2026-10-16参照。</a:t>
-            </a:r>
-            <a:r>
-              <a:rPr sz="810" b="0" lang="ja-JP" altLang="en-US">
-                <a:solidFill>
-                  <a:srgbClr val="626669"/>
-                </a:solidFill>
-                <a:latin typeface="Noto Sans"/>
-                <a:ea typeface="Noto Sans CJK JP"/>
-                <a:cs typeface="Noto Sans"/>
-              </a:rPr>
-              <a:t>  </a:t>
-            </a:r>
-            <a:r>
-              <a:rPr sz="810" b="0" lang="ja-JP" altLang="en-US">
-                <a:solidFill>
-                  <a:srgbClr val="626669"/>
-                </a:solidFill>
-                <a:latin typeface="Noto Sans"/>
-                <a:ea typeface="Noto Sans CJK JP"/>
-                <a:cs typeface="Noto Sans"/>
-                <a:hlinkClick r:id="rId3"/>
-              </a:rPr>
-              <a:t>https://huggingface.co/datasets/ScaleAI/MCP-Atlas</a:t>
+                <a:hlinkClick r:id="rId5"/>
+              </a:rPr>
+              <a:t>https://labs.scale.com/papers/mcp-atlas</a:t>
             </a:r>
           </a:p>
         </p:txBody>
       </p:sp>
+      <p:pic>
+        <p:nvPicPr>
+          <p:cNvPr id="6" name="公式サイトの画面" descr="image.png"/>
+          <p:cNvPicPr>
+            <a:picLocks noChangeAspect="1"/>
+          </p:cNvPicPr>
+          <p:nvPr/>
+        </p:nvPicPr>
+        <p:blipFill>
+          <a:blip r:embed="rId4"/>
+          <a:stretch>
+            <a:fillRect/>
+          </a:stretch>
+        </p:blipFill>
+        <p:spPr>
+          <a:xfrm>
+            <a:off x="2274570" y="1481328"/>
+            <a:ext cx="4594858" cy="3063239"/>
+          </a:xfrm>
+          <a:prstGeom prst="rect">
+            <a:avLst/>
+          </a:prstGeom>
+        </p:spPr>
+      </p:pic>
     </p:spTree>
   </p:cSld>
   <p:clrMapOvr>
@@ -20826,7 +20791,7 @@
         </p:nvSpPr>
         <p:spPr>
           <a:xfrm>
-            <a:off x="594360" y="1389888"/>
+            <a:off x="594360" y="1863572"/>
             <a:ext cx="7955279" cy="228600"/>
           </a:xfrm>
           <a:prstGeom prst="rect">
@@ -20880,7 +20845,7 @@
         </p:nvSpPr>
         <p:spPr>
           <a:xfrm>
-            <a:off x="594360" y="1737360"/>
+            <a:off x="594360" y="2153391"/>
             <a:ext cx="7955279" cy="1691640"/>
           </a:xfrm>
           <a:prstGeom prst="rect">
@@ -20934,7 +20899,7 @@
         </p:nvSpPr>
         <p:spPr>
           <a:xfrm>
-            <a:off x="594360" y="3712463"/>
+            <a:off x="594360" y="3319545"/>
             <a:ext cx="7955279" cy="777240"/>
           </a:xfrm>
           <a:prstGeom prst="rect">
@@ -21589,7 +21554,7 @@
         </p:nvSpPr>
         <p:spPr>
           <a:xfrm>
-            <a:off x="594360" y="1389888"/>
+            <a:off x="594360" y="1863572"/>
             <a:ext cx="7955279" cy="228600"/>
           </a:xfrm>
           <a:prstGeom prst="rect">
@@ -21643,7 +21608,7 @@
         </p:nvSpPr>
         <p:spPr>
           <a:xfrm>
-            <a:off x="594360" y="1737360"/>
+            <a:off x="594360" y="2153391"/>
             <a:ext cx="7955279" cy="1691640"/>
           </a:xfrm>
           <a:prstGeom prst="rect">
@@ -21697,7 +21662,7 @@
         </p:nvSpPr>
         <p:spPr>
           <a:xfrm>
-            <a:off x="594360" y="3712463"/>
+            <a:off x="594360" y="3319545"/>
             <a:ext cx="7955279" cy="777240"/>
           </a:xfrm>
           <a:prstGeom prst="rect">
@@ -22238,7 +22203,7 @@
         </p:nvSpPr>
         <p:spPr>
           <a:xfrm>
-            <a:off x="594360" y="1389888"/>
+            <a:off x="594360" y="2028094"/>
             <a:ext cx="7955279" cy="228600"/>
           </a:xfrm>
           <a:prstGeom prst="rect">
@@ -22292,7 +22257,7 @@
         </p:nvSpPr>
         <p:spPr>
           <a:xfrm>
-            <a:off x="594360" y="1737360"/>
+            <a:off x="594360" y="2317913"/>
             <a:ext cx="7955279" cy="1691640"/>
           </a:xfrm>
           <a:prstGeom prst="rect">
@@ -22346,7 +22311,7 @@
         </p:nvSpPr>
         <p:spPr>
           <a:xfrm>
-            <a:off x="594360" y="3712463"/>
+            <a:off x="594360" y="3155022"/>
             <a:ext cx="7955279" cy="777240"/>
           </a:xfrm>
           <a:prstGeom prst="rect">
@@ -22887,7 +22852,7 @@
         </p:nvSpPr>
         <p:spPr>
           <a:xfrm>
-            <a:off x="594360" y="1389888"/>
+            <a:off x="594360" y="1699050"/>
             <a:ext cx="7955279" cy="228600"/>
           </a:xfrm>
           <a:prstGeom prst="rect">
@@ -22941,7 +22906,7 @@
         </p:nvSpPr>
         <p:spPr>
           <a:xfrm>
-            <a:off x="594360" y="1737360"/>
+            <a:off x="594360" y="1988869"/>
             <a:ext cx="7955279" cy="1691640"/>
           </a:xfrm>
           <a:prstGeom prst="rect">
@@ -22995,7 +22960,7 @@
         </p:nvSpPr>
         <p:spPr>
           <a:xfrm>
-            <a:off x="594360" y="3712463"/>
+            <a:off x="594360" y="3484067"/>
             <a:ext cx="7955279" cy="777240"/>
           </a:xfrm>
           <a:prstGeom prst="rect">
@@ -23536,7 +23501,7 @@
         </p:nvSpPr>
         <p:spPr>
           <a:xfrm>
-            <a:off x="594360" y="1389888"/>
+            <a:off x="594360" y="1698415"/>
             <a:ext cx="7955279" cy="228600"/>
           </a:xfrm>
           <a:prstGeom prst="rect">
@@ -23590,7 +23555,7 @@
         </p:nvSpPr>
         <p:spPr>
           <a:xfrm>
-            <a:off x="594360" y="1737360"/>
+            <a:off x="594360" y="1988234"/>
             <a:ext cx="7955279" cy="1691640"/>
           </a:xfrm>
           <a:prstGeom prst="rect">
@@ -23644,7 +23609,7 @@
         </p:nvSpPr>
         <p:spPr>
           <a:xfrm>
-            <a:off x="594360" y="3712463"/>
+            <a:off x="594360" y="3483431"/>
             <a:ext cx="7955279" cy="777240"/>
           </a:xfrm>
           <a:prstGeom prst="rect">
@@ -24185,7 +24150,7 @@
         </p:nvSpPr>
         <p:spPr>
           <a:xfrm>
-            <a:off x="594360" y="1389888"/>
+            <a:off x="594360" y="1863572"/>
             <a:ext cx="7955279" cy="228600"/>
           </a:xfrm>
           <a:prstGeom prst="rect">
@@ -24239,7 +24204,7 @@
         </p:nvSpPr>
         <p:spPr>
           <a:xfrm>
-            <a:off x="594360" y="1737360"/>
+            <a:off x="594360" y="2153391"/>
             <a:ext cx="7955279" cy="1691640"/>
           </a:xfrm>
           <a:prstGeom prst="rect">
@@ -24293,7 +24258,7 @@
         </p:nvSpPr>
         <p:spPr>
           <a:xfrm>
-            <a:off x="594360" y="3712463"/>
+            <a:off x="594360" y="3319545"/>
             <a:ext cx="7955279" cy="777240"/>
           </a:xfrm>
           <a:prstGeom prst="rect">
@@ -25149,7 +25114,7 @@
         </p:nvSpPr>
         <p:spPr>
           <a:xfrm>
-            <a:off x="594360" y="1389888"/>
+            <a:off x="594360" y="1863572"/>
             <a:ext cx="7955279" cy="228600"/>
           </a:xfrm>
           <a:prstGeom prst="rect">
@@ -25203,7 +25168,7 @@
         </p:nvSpPr>
         <p:spPr>
           <a:xfrm>
-            <a:off x="594360" y="1737360"/>
+            <a:off x="594360" y="2153391"/>
             <a:ext cx="7955279" cy="1691640"/>
           </a:xfrm>
           <a:prstGeom prst="rect">
@@ -25257,7 +25222,7 @@
         </p:nvSpPr>
         <p:spPr>
           <a:xfrm>
-            <a:off x="594360" y="3712463"/>
+            <a:off x="594360" y="3319545"/>
             <a:ext cx="7955279" cy="777240"/>
           </a:xfrm>
           <a:prstGeom prst="rect">
@@ -25798,7 +25763,7 @@
         </p:nvSpPr>
         <p:spPr>
           <a:xfrm>
-            <a:off x="594360" y="1389888"/>
+            <a:off x="594360" y="1863572"/>
             <a:ext cx="7955279" cy="228600"/>
           </a:xfrm>
           <a:prstGeom prst="rect">
@@ -25852,7 +25817,7 @@
         </p:nvSpPr>
         <p:spPr>
           <a:xfrm>
-            <a:off x="594360" y="1737360"/>
+            <a:off x="594360" y="2153391"/>
             <a:ext cx="7955279" cy="1691640"/>
           </a:xfrm>
           <a:prstGeom prst="rect">
@@ -25906,7 +25871,7 @@
         </p:nvSpPr>
         <p:spPr>
           <a:xfrm>
-            <a:off x="594360" y="3712463"/>
+            <a:off x="594360" y="3319545"/>
             <a:ext cx="7955279" cy="777240"/>
           </a:xfrm>
           <a:prstGeom prst="rect">
@@ -26447,7 +26412,7 @@
         </p:nvSpPr>
         <p:spPr>
           <a:xfrm>
-            <a:off x="594360" y="1389888"/>
+            <a:off x="594360" y="1699050"/>
             <a:ext cx="7955279" cy="228600"/>
           </a:xfrm>
           <a:prstGeom prst="rect">
@@ -26501,7 +26466,7 @@
         </p:nvSpPr>
         <p:spPr>
           <a:xfrm>
-            <a:off x="594360" y="1737360"/>
+            <a:off x="594360" y="1988869"/>
             <a:ext cx="7955279" cy="1691640"/>
           </a:xfrm>
           <a:prstGeom prst="rect">
@@ -26555,7 +26520,7 @@
         </p:nvSpPr>
         <p:spPr>
           <a:xfrm>
-            <a:off x="594360" y="3712463"/>
+            <a:off x="594360" y="3484067"/>
             <a:ext cx="7955279" cy="777240"/>
           </a:xfrm>
           <a:prstGeom prst="rect">
@@ -35689,7 +35654,7 @@
         </p:nvSpPr>
         <p:spPr>
           <a:xfrm>
-            <a:off x="594360" y="1389888"/>
+            <a:off x="594360" y="1534534"/>
             <a:ext cx="7955279" cy="228600"/>
           </a:xfrm>
           <a:prstGeom prst="rect">
@@ -35743,7 +35708,7 @@
         </p:nvSpPr>
         <p:spPr>
           <a:xfrm>
-            <a:off x="594360" y="1737360"/>
+            <a:off x="594360" y="1824353"/>
             <a:ext cx="7955279" cy="1691640"/>
           </a:xfrm>
           <a:prstGeom prst="rect">
@@ -35797,7 +35762,7 @@
         </p:nvSpPr>
         <p:spPr>
           <a:xfrm>
-            <a:off x="594360" y="3712463"/>
+            <a:off x="594360" y="3648582"/>
             <a:ext cx="7955279" cy="777240"/>
           </a:xfrm>
           <a:prstGeom prst="rect">

--- a/slides/datasets-in-10-minutes-mcp-atlas.pptx
+++ b/slides/datasets-in-10-minutes-mcp-atlas.pptx
@@ -8402,7 +8402,7 @@
                 <a:ea typeface="Noto Sans CJK JP"/>
                 <a:cs typeface="Noto Sans"/>
               </a:rPr>
-              <a:t>外部の出来事を、社内データの期間指定へ使う</a:t>
+              <a:t>外部の出来事を、社内データの期間指定に使う</a:t>
             </a:r>
           </a:p>
         </p:txBody>
@@ -11882,23 +11882,23 @@
                 <a:spcPct val="110000"/>
               </a:lnSpc>
               <a:buNone/>
-              <a:defRPr sz="2800" b="0">
-                <a:solidFill>
-                  <a:srgbClr val="303437"/>
-                </a:solidFill>
-                <a:latin typeface="Noto Sans"/>
-              </a:defRPr>
-            </a:pPr>
-            <a:r>
-              <a:rPr sz="2800" b="1" lang="ja-JP" altLang="en-US">
-                <a:solidFill>
-                  <a:srgbClr val="303437"/>
-                </a:solidFill>
-                <a:latin typeface="Noto Sans"/>
-                <a:ea typeface="Noto Sans CJK JP"/>
-                <a:cs typeface="Noto Sans"/>
-              </a:rPr>
-              <a:t>論文バージョン3では、上位モデルは約8割</a:t>
+              <a:defRPr sz="2500" b="0">
+                <a:solidFill>
+                  <a:srgbClr val="303437"/>
+                </a:solidFill>
+                <a:latin typeface="Noto Sans"/>
+              </a:defRPr>
+            </a:pPr>
+            <a:r>
+              <a:rPr sz="2500" b="1" lang="ja-JP" altLang="en-US">
+                <a:solidFill>
+                  <a:srgbClr val="303437"/>
+                </a:solidFill>
+                <a:latin typeface="Noto Sans"/>
+                <a:ea typeface="Noto Sans CJK JP"/>
+                <a:cs typeface="Noto Sans"/>
+              </a:rPr>
+              <a:t>論文バージョン3では、上位モデルの合格率は約8割</a:t>
             </a:r>
           </a:p>
         </p:txBody>
@@ -13403,7 +13403,7 @@
                 <a:ea typeface="Noto Sans CJK JP"/>
                 <a:cs typeface="Noto Sans"/>
               </a:rPr>
-              <a:t>Gemini 3.1 Proの公式Performance表で採用。</a:t>
+              <a:t>表の評価データはGemini 3.1 Proの公式比較に掲載。</a:t>
             </a:r>
           </a:p>
           <a:p>
@@ -14243,7 +14243,7 @@
                 <a:ea typeface="Noto Sans CJK JP"/>
                 <a:cs typeface="Noto Sans"/>
               </a:rPr>
-              <a:t>専門家が、外部データの必要な仕事を作る</a:t>
+              <a:t>専門家が、外部データが必要な課題を作る</a:t>
             </a:r>
           </a:p>
         </p:txBody>
@@ -14356,7 +14356,7 @@
                 <a:ea typeface="Noto Sans CJK JP"/>
                 <a:cs typeface="Noto Sans"/>
               </a:rPr>
-              <a:t>参照の操作履歴と、ツールの返した情報に基づく最終回答を用意する。1課題の作成・検証・文書化は平均4.6時間。</a:t>
+              <a:t>参照用の操作履歴と、ツールの返した情報に基づく最終回答を用意する。1課題の作成・検証・文書化は平均4.6時間。</a:t>
             </a:r>
           </a:p>
         </p:txBody>
@@ -15031,7 +15031,7 @@
                           <a:ea typeface="Noto Sans CJK JP"/>
                           <a:cs typeface="Noto Sans"/>
                         </a:rPr>
-                        <a:t>確かめる内容</a:t>
+                        <a:t>検証内容</a:t>
                       </a:r>
                     </a:p>
                   </a:txBody>
@@ -15299,7 +15299,7 @@
                           <a:ea typeface="Noto Sans CJK JP"/>
                           <a:cs typeface="Noto Sans"/>
                         </a:rPr>
-                        <a:t>別のレビュー</a:t>
+                        <a:t>別担当者によるレビュー</a:t>
                       </a:r>
                     </a:p>
                   </a:txBody>
@@ -16129,7 +16129,7 @@
                 <a:ea typeface="Noto Sans CJK JP"/>
                 <a:cs typeface="Noto Sans"/>
               </a:rPr>
-              <a:t>全1,000課題の必要サーバー数の割合（%）。平均2.55。</a:t>
+              <a:t>全1,000課題の必要サーバー数の割合（%）。平均2.55サーバー。</a:t>
             </a:r>
           </a:p>
         </p:txBody>
@@ -16283,7 +16283,7 @@
                 <a:ea typeface="Noto Sans CJK JP"/>
                 <a:cs typeface="Noto Sans"/>
               </a:rPr>
-              <a:t>公開500課題には、依頼と正解条件を配布する</a:t>
+              <a:t>公開500課題では、依頼と正解条件を配布する</a:t>
             </a:r>
           </a:p>
         </p:txBody>
@@ -16823,7 +16823,7 @@
                           <a:ea typeface="Noto Sans CJK JP"/>
                           <a:cs typeface="Noto Sans"/>
                         </a:rPr>
-                        <a:t>運営側で保持する評価用の課題</a:t>
+                        <a:t>入手不可（運営側で保持する評価用課題）</a:t>
                       </a:r>
                     </a:p>
                   </a:txBody>
@@ -17201,7 +17201,7 @@
                 <a:ea typeface="Noto Sans CJK JP"/>
                 <a:cs typeface="Noto Sans"/>
               </a:rPr>
-              <a:t>MCPサーバーを固定したコンテナーで動かす</a:t>
+              <a:t>バージョンを固定したMCPサーバーを動かす</a:t>
             </a:r>
           </a:p>
         </p:txBody>
@@ -17359,7 +17359,7 @@
                           <a:ea typeface="Noto Sans CJK JP"/>
                           <a:cs typeface="Noto Sans"/>
                         </a:rPr>
-                        <a:t>使うもの</a:t>
+                        <a:t>実装・動作内容</a:t>
                       </a:r>
                     </a:p>
                   </a:txBody>
@@ -18990,7 +18990,7 @@
                 <a:ea typeface="Noto Sans CJK JP"/>
                 <a:cs typeface="Noto Sans"/>
               </a:rPr>
-              <a:t>MCP Atlasは、自然な依頼に対して、必要なツールを探し、複数サーバーの結果をつないで回答を作る評価。</a:t>
+              <a:t>MCP Atlasは、自然な依頼に対して、必要なツールを探し、複数サーバーの結果をつないで回答を作る能力を評価する。</a:t>
             </a:r>
           </a:p>
           <a:p>
@@ -21212,7 +21212,7 @@
                 <a:ea typeface="Noto Sans CJK JP"/>
                 <a:cs typeface="Noto Sans"/>
               </a:rPr>
-              <a:t>参照履歴は、ローカルのディレクトリや複数ファイルを読み、端末コマンドでコード量と依存情報を確認する。</a:t>
+              <a:t>参照履歴では、ローカルのディレクトリや複数ファイルを読み、端末コマンドでコード量と依存情報を確認している。</a:t>
             </a:r>
           </a:p>
         </p:txBody>
@@ -21975,7 +21975,7 @@
                 <a:ea typeface="Noto Sans CJK JP"/>
                 <a:cs typeface="Noto Sans"/>
               </a:rPr>
-              <a:t>参照履歴は、端末でリポジトリを調べ、Gitの履歴を取得する。コードで対象コミットを絞り、Gitで変更内容を読む。</a:t>
+              <a:t>参照履歴では、端末でリポジトリを調べ、Gitの履歴を取得する。コードで対象コミットを絞り、Gitで変更内容を読む。</a:t>
             </a:r>
           </a:p>
         </p:txBody>
@@ -22624,7 +22624,7 @@
                 <a:ea typeface="Noto Sans CJK JP"/>
                 <a:cs typeface="Noto Sans"/>
               </a:rPr>
-              <a:t>参照履歴は、Slackのチャンネルとメッセージを検索した後、ローカルのディレクトリを探して該当ファイルを読む。</a:t>
+              <a:t>参照履歴では、Slackのチャンネルとメッセージを検索した後、ローカルのディレクトリを探して該当ファイルを読んでいる。</a:t>
             </a:r>
           </a:p>
         </p:txBody>
@@ -23273,7 +23273,7 @@
                 <a:ea typeface="Noto Sans CJK JP"/>
                 <a:cs typeface="Noto Sans"/>
               </a:rPr>
-              <a:t>参照履歴は、メモリーサーバーの組織グラフを読み、Notionで満足度調査のデータベースを検索・照会する。</a:t>
+              <a:t>参照履歴では、メモリーサーバーの組織グラフを読み、Notionで満足度調査のデータベースを検索・照会している。</a:t>
             </a:r>
           </a:p>
         </p:txBody>
@@ -23839,7 +23839,7 @@
                 <a:ea typeface="Noto Sans CJK JP"/>
                 <a:cs typeface="Noto Sans"/>
               </a:rPr>
-              <a:t>二つの日付を特定し、同じ期間の価格を比べる</a:t>
+              <a:t>二つの日付を特定し、その期間の価格を比べる</a:t>
             </a:r>
           </a:p>
         </p:txBody>
@@ -23922,7 +23922,7 @@
                 <a:ea typeface="Noto Sans CJK JP"/>
                 <a:cs typeface="Noto Sans"/>
               </a:rPr>
-              <a:t>配布正解の価格変化率は約47.03%の上昇。参照履歴はWeb検索で日付を確認し、AlchemyでEthereumの価格履歴を取得してコードで計算する。</a:t>
+              <a:t>配布正解の価格変化率は約47.03%の上昇。参照履歴ではWeb検索で日付を確認し、AlchemyでEthereumの価格履歴を取得してコードで計算している。</a:t>
             </a:r>
           </a:p>
         </p:txBody>
@@ -24571,7 +24571,7 @@
                 <a:ea typeface="Noto Sans CJK JP"/>
                 <a:cs typeface="Noto Sans"/>
               </a:rPr>
-              <a:t>2025年8月11日の日最高気温は30.6℃。参照履歴は、公園情報と案内所を検索してから、その地点の気象履歴を取得する。</a:t>
+              <a:t>2025年8月11日の日最高気温は30.6℃。参照履歴では、公園情報と案内所を検索してから、その地点の気象履歴を取得している。</a:t>
             </a:r>
           </a:p>
         </p:txBody>
@@ -24826,7 +24826,7 @@
                 <a:ea typeface="Noto Sans CJK JP"/>
                 <a:cs typeface="Noto Sans"/>
               </a:rPr>
-              <a:t>MCP Atlasは、自然言語で頼まれた仕事を、外部ツールを使って完了できるかを評価する。</a:t>
+              <a:t>MCPは、モデルが外部のデータや機能へアクセスするための共通の接続方式。サーバーは検索・ファイル・データベースなどのツールを提供する。</a:t>
             </a:r>
           </a:p>
           <a:p>
@@ -24856,7 +24856,7 @@
                 <a:ea typeface="Noto Sans CJK JP"/>
                 <a:cs typeface="Noto Sans"/>
               </a:rPr>
-              <a:t>MCPは、モデルが外部のデータや機能へアクセスするための共通の接続方式。サーバーは検索・ファイル・データベースなどのツールを提供する。</a:t>
+              <a:t>MCP Atlasは、自然言語で頼まれた仕事を、外部ツールを使って完了できるかを評価する。</a:t>
             </a:r>
           </a:p>
           <a:p>
@@ -25535,7 +25535,7 @@
                 <a:ea typeface="Noto Sans CJK JP"/>
                 <a:cs typeface="Noto Sans"/>
               </a:rPr>
-              <a:t>参照履歴は、Metの所蔵品検索で作品を見つけて詳細を読み、DuckDuckGoで工房の歴史を検索する。</a:t>
+              <a:t>参照履歴では、Metの所蔵品検索で作品を見つけて詳細を読み、DuckDuckGoで工房の歴史を検索している。</a:t>
             </a:r>
           </a:p>
         </p:txBody>
@@ -26184,7 +26184,7 @@
                 <a:ea typeface="Noto Sans CJK JP"/>
                 <a:cs typeface="Noto Sans"/>
               </a:rPr>
-              <a:t>家族の映画鑑賞会は2025年7月29日、20:00〜22:00（ET）。参照履歴は、ローカルの映画ファイルを読み、Google Workspaceの予定を取得する。</a:t>
+              <a:t>家族の映画鑑賞会は2025年7月29日、20:00〜22:00（ET）。参照履歴では、ローカルの映画ファイルを読み、Google Workspaceの予定を取得する。</a:t>
             </a:r>
           </a:p>
         </p:txBody>
@@ -26833,7 +26833,7 @@
                 <a:ea typeface="Noto Sans CJK JP"/>
                 <a:cs typeface="Noto Sans"/>
               </a:rPr>
-              <a:t>参照履歴は、端末でローカルファイルを探し、コード実行サーバーでCSVを集計する。依頼の対象でないBarber 3は比較に含めない。</a:t>
+              <a:t>参照履歴では、端末でローカルファイルを探し、コード実行サーバーでCSVを集計する。依頼の対象でないBarber 3は比較に含めない。</a:t>
             </a:r>
           </a:p>
         </p:txBody>
@@ -27019,23 +27019,23 @@
                 <a:spcPct val="110000"/>
               </a:lnSpc>
               <a:buNone/>
-              <a:defRPr sz="2800" b="0">
-                <a:solidFill>
-                  <a:srgbClr val="303437"/>
-                </a:solidFill>
-                <a:latin typeface="Noto Sans"/>
-              </a:defRPr>
-            </a:pPr>
-            <a:r>
-              <a:rPr sz="2800" b="1" lang="ja-JP" altLang="en-US">
-                <a:solidFill>
-                  <a:srgbClr val="303437"/>
-                </a:solidFill>
-                <a:latin typeface="Noto Sans"/>
-                <a:ea typeface="Noto Sans CJK JP"/>
-                <a:cs typeface="Noto Sans"/>
-              </a:rPr>
-              <a:t>36サーバーのうち、検索系は多くの課題で使う</a:t>
+              <a:defRPr sz="2500" b="0">
+                <a:solidFill>
+                  <a:srgbClr val="303437"/>
+                </a:solidFill>
+                <a:latin typeface="Noto Sans"/>
+              </a:defRPr>
+            </a:pPr>
+            <a:r>
+              <a:rPr sz="2500" b="1" lang="ja-JP" altLang="en-US">
+                <a:solidFill>
+                  <a:srgbClr val="303437"/>
+                </a:solidFill>
+                <a:latin typeface="Noto Sans"/>
+                <a:ea typeface="Noto Sans CJK JP"/>
+                <a:cs typeface="Noto Sans"/>
+              </a:rPr>
+              <a:t>36サーバーのうち、検索系は多くの課題で使われる</a:t>
             </a:r>
           </a:p>
         </p:txBody>
@@ -28111,7 +28111,7 @@
                 <a:ea typeface="Noto Sans CJK JP"/>
                 <a:cs typeface="Noto Sans"/>
               </a:rPr>
-              <a:t>参照の操作履歴は、1課題あたり平均9.8回のツール呼び出し。</a:t>
+              <a:t>参照の操作履歴におけるツール呼び出しは、1課題あたり平均9.8回。</a:t>
             </a:r>
           </a:p>
         </p:txBody>
@@ -28630,7 +28630,7 @@
                           <a:ea typeface="Noto Sans CJK JP"/>
                           <a:cs typeface="Noto Sans"/>
                         </a:rPr>
-                        <a:t>ツールの選択違い</a:t>
+                        <a:t>ツールの選択誤り</a:t>
                       </a:r>
                     </a:p>
                   </a:txBody>
@@ -28680,7 +28680,7 @@
                           <a:ea typeface="Noto Sans CJK JP"/>
                           <a:cs typeface="Noto Sans"/>
                         </a:rPr>
-                        <a:t>依頼を解けないツールを選ぶ</a:t>
+                        <a:t>依頼に対応できないツールを選ぶ</a:t>
                       </a:r>
                     </a:p>
                   </a:txBody>
@@ -36550,7 +36550,7 @@
                 <a:ea typeface="Noto Sans CJK JP"/>
                 <a:cs typeface="Noto Sans"/>
               </a:rPr>
-              <a:t>参照履歴はGitHubで対象リポジトリを確認し、</a:t>
+              <a:t>参照履歴ではGitHubで対象リポジトリを確認し、</a:t>
             </a:r>
           </a:p>
           <a:p>
